--- a/Group Project/Group3_Milestone3_Presentation.pptx
+++ b/Group Project/Group3_Milestone3_Presentation.pptx
@@ -4,6 +4,9 @@
   <p:sldMasterIdLst>
     <p:sldMasterId id="2147483648" r:id="rId1"/>
   </p:sldMasterIdLst>
+  <p:notesMasterIdLst>
+    <p:notesMasterId r:id="rId16"/>
+  </p:notesMasterIdLst>
   <p:sldIdLst>
     <p:sldId id="256" r:id="rId2"/>
     <p:sldId id="257" r:id="rId3"/>
@@ -20,10 +23,7 @@
     <p:sldId id="268" r:id="rId14"/>
     <p:sldId id="269" r:id="rId15"/>
   </p:sldIdLst>
-  <p:notesMasterIdLst>
-    <p:notesMasterId r:id="rId16"/>
-  </p:notesMasterIdLst>
-  <p:sldSz cx="9144000" cy="5143500"/>
+  <p:sldSz cx="9144000" cy="5143500" type="screen16x9"/>
   <p:notesSz cx="5143500" cy="9144000"/>
   <p:defaultTextStyle>
     <a:lvl1pPr marL="0" algn="l" defTabSz="914400" rtl="0" eaLnBrk="1" latinLnBrk="0" hangingPunct="1">
@@ -120,10 +120,57 @@
 </p:presentation>
 </file>
 
+<file path=ppt/revisionInfo.xml><?xml version="1.0" encoding="utf-8"?>
+<p1510:revInfo xmlns:a="http://schemas.openxmlformats.org/drawingml/2006/main" xmlns:r="http://schemas.openxmlformats.org/officeDocument/2006/relationships" xmlns:p1510="http://schemas.microsoft.com/office/powerpoint/2015/10/main">
+  <p1510:revLst>
+    <p1510:client id="{EB9B67E4-5983-0066-EDB6-5BD4D10F0685}" v="12" dt="2026-04-21T03:21:32.054"/>
+  </p1510:revLst>
+</p1510:revInfo>
+</file>
+
+<file path=ppt/changesInfos/changesInfo1.xml><?xml version="1.0" encoding="utf-8"?>
+<pc:chgInfo xmlns:a="http://schemas.openxmlformats.org/drawingml/2006/main" xmlns:r="http://schemas.openxmlformats.org/officeDocument/2006/relationships" xmlns:ac="http://schemas.microsoft.com/office/drawing/2013/main/command" xmlns:pc="http://schemas.microsoft.com/office/powerpoint/2013/main/command">
+  <pc:docChgLst>
+    <pc:chgData name="Bahar, Muhammad H" userId="S::mbahar@albany.edu::84031f88-3164-421f-897b-6250739e55f4" providerId="AD" clId="Web-{EB9B67E4-5983-0066-EDB6-5BD4D10F0685}"/>
+    <pc:docChg chg="modSld">
+      <pc:chgData name="Bahar, Muhammad H" userId="S::mbahar@albany.edu::84031f88-3164-421f-897b-6250739e55f4" providerId="AD" clId="Web-{EB9B67E4-5983-0066-EDB6-5BD4D10F0685}" dt="2026-04-21T03:21:32.054" v="11" actId="14100"/>
+      <pc:docMkLst>
+        <pc:docMk/>
+      </pc:docMkLst>
+      <pc:sldChg chg="modSp">
+        <pc:chgData name="Bahar, Muhammad H" userId="S::mbahar@albany.edu::84031f88-3164-421f-897b-6250739e55f4" providerId="AD" clId="Web-{EB9B67E4-5983-0066-EDB6-5BD4D10F0685}" dt="2026-04-21T03:21:32.054" v="11" actId="14100"/>
+        <pc:sldMkLst>
+          <pc:docMk/>
+          <pc:sldMk cId="0" sldId="256"/>
+        </pc:sldMkLst>
+        <pc:spChg chg="mod">
+          <ac:chgData name="Bahar, Muhammad H" userId="S::mbahar@albany.edu::84031f88-3164-421f-897b-6250739e55f4" providerId="AD" clId="Web-{EB9B67E4-5983-0066-EDB6-5BD4D10F0685}" dt="2026-04-21T03:21:32.054" v="11" actId="14100"/>
+          <ac:spMkLst>
+            <pc:docMk/>
+            <pc:sldMk cId="0" sldId="256"/>
+            <ac:spMk id="3" creationId="{00000000-0000-0000-0000-000000000000}"/>
+          </ac:spMkLst>
+        </pc:spChg>
+        <pc:spChg chg="mod">
+          <ac:chgData name="Bahar, Muhammad H" userId="S::mbahar@albany.edu::84031f88-3164-421f-897b-6250739e55f4" providerId="AD" clId="Web-{EB9B67E4-5983-0066-EDB6-5BD4D10F0685}" dt="2026-04-21T03:21:31.867" v="10" actId="14100"/>
+          <ac:spMkLst>
+            <pc:docMk/>
+            <pc:sldMk cId="0" sldId="256"/>
+            <ac:spMk id="4" creationId="{00000000-0000-0000-0000-000000000000}"/>
+          </ac:spMkLst>
+        </pc:spChg>
+      </pc:sldChg>
+    </pc:docChg>
+  </pc:docChgLst>
+</pc:chgInfo>
+</file>
+
 <file path=ppt/charts/chart1.xml><?xml version="1.0" encoding="utf-8"?>
-<c:chartSpace xmlns:c="http://schemas.openxmlformats.org/drawingml/2006/chart" xmlns:a="http://schemas.openxmlformats.org/drawingml/2006/main" xmlns:r="http://schemas.openxmlformats.org/officeDocument/2006/relationships">
+<c:chartSpace xmlns:c="http://schemas.openxmlformats.org/drawingml/2006/chart" xmlns:a="http://schemas.openxmlformats.org/drawingml/2006/main" xmlns:r="http://schemas.openxmlformats.org/officeDocument/2006/relationships" xmlns:c16r2="http://schemas.microsoft.com/office/drawing/2015/06/chart">
   <c:date1904 val="0"/>
+  <c:lang val="en-US"/>
   <c:roundedCorners val="0"/>
+  <c:style val="2"/>
   <c:chart>
     <c:autoTitleDeleted val="1"/>
     <c:plotArea>
@@ -153,54 +200,28 @@
             <a:effectLst/>
           </c:spPr>
           <c:invertIfNegative val="0"/>
-          <c:dLbls>
-            <c:numFmt formatCode="#,##0" sourceLinked="0"/>
-            <c:txPr>
-              <a:bodyPr/>
-              <a:lstStyle/>
-              <a:p>
-                <a:pPr>
-                  <a:defRPr b="0" i="0" strike="noStrike" sz="1200" u="none">
-                    <a:solidFill>
-                      <a:srgbClr val="000000"/>
-                    </a:solidFill>
-                    <a:latin typeface="Arial"/>
-                  </a:defRPr>
-                </a:pPr>
-              </a:p>
-            </c:txPr>
-            <c:showLegendKey val="0"/>
-            <c:showVal val="0"/>
-            <c:showCatName val="0"/>
-            <c:showSerName val="0"/>
-            <c:showPercent val="0"/>
-            <c:showBubbleSize val="0"/>
-            <c:showLeaderLines val="0"/>
-          </c:dLbls>
           <c:cat>
-            <c:multiLvlStrRef>
+            <c:strRef>
               <c:f>Sheet1!$A$2:$A$6</c:f>
-              <c:multiLvlStrCache>
+              <c:strCache>
                 <c:ptCount val="5"/>
-                <c:lvl>
-                  <c:pt idx="0">
-                    <c:v>Accuracy</c:v>
-                  </c:pt>
-                  <c:pt idx="1">
-                    <c:v>Precision*</c:v>
-                  </c:pt>
-                  <c:pt idx="2">
-                    <c:v>Recall*</c:v>
-                  </c:pt>
-                  <c:pt idx="3">
-                    <c:v>F1-Score*</c:v>
-                  </c:pt>
-                  <c:pt idx="4">
-                    <c:v>ROC-AUC</c:v>
-                  </c:pt>
-                </c:lvl>
-              </c:multiLvlStrCache>
-            </c:multiLvlStrRef>
+                <c:pt idx="0">
+                  <c:v>Accuracy</c:v>
+                </c:pt>
+                <c:pt idx="1">
+                  <c:v>Precision*</c:v>
+                </c:pt>
+                <c:pt idx="2">
+                  <c:v>Recall*</c:v>
+                </c:pt>
+                <c:pt idx="3">
+                  <c:v>F1-Score*</c:v>
+                </c:pt>
+                <c:pt idx="4">
+                  <c:v>ROC-AUC</c:v>
+                </c:pt>
+              </c:strCache>
+            </c:strRef>
           </c:cat>
           <c:val>
             <c:numRef>
@@ -209,23 +230,28 @@
                 <c:formatCode>General</c:formatCode>
                 <c:ptCount val="5"/>
                 <c:pt idx="0">
-                  <c:v>0.6795</c:v>
+                  <c:v>0.67949999999999999</c:v>
                 </c:pt>
                 <c:pt idx="1">
-                  <c:v>0.3671</c:v>
+                  <c:v>0.36709999999999998</c:v>
                 </c:pt>
                 <c:pt idx="2">
-                  <c:v>0.6202</c:v>
+                  <c:v>0.62019999999999997</c:v>
                 </c:pt>
                 <c:pt idx="3">
                   <c:v>0.4612</c:v>
                 </c:pt>
                 <c:pt idx="4">
-                  <c:v>0.7084</c:v>
+                  <c:v>0.70840000000000003</c:v>
                 </c:pt>
               </c:numCache>
             </c:numRef>
           </c:val>
+          <c:extLst>
+            <c:ext xmlns:c16="http://schemas.microsoft.com/office/drawing/2014/chart" uri="{C3380CC4-5D6E-409C-BE32-E72D297353CC}">
+              <c16:uniqueId val="{00000000-7E1A-44ED-9873-5996C4CF7C8A}"/>
+            </c:ext>
+          </c:extLst>
         </c:ser>
         <c:ser>
           <c:idx val="1"/>
@@ -248,54 +274,28 @@
             <a:effectLst/>
           </c:spPr>
           <c:invertIfNegative val="0"/>
-          <c:dLbls>
-            <c:numFmt formatCode="#,##0" sourceLinked="0"/>
-            <c:txPr>
-              <a:bodyPr/>
-              <a:lstStyle/>
-              <a:p>
-                <a:pPr>
-                  <a:defRPr b="0" i="0" strike="noStrike" sz="1200" u="none">
-                    <a:solidFill>
-                      <a:srgbClr val="000000"/>
-                    </a:solidFill>
-                    <a:latin typeface="Arial"/>
-                  </a:defRPr>
-                </a:pPr>
-              </a:p>
-            </c:txPr>
-            <c:showLegendKey val="0"/>
-            <c:showVal val="0"/>
-            <c:showCatName val="0"/>
-            <c:showSerName val="0"/>
-            <c:showPercent val="0"/>
-            <c:showBubbleSize val="0"/>
-            <c:showLeaderLines val="0"/>
-          </c:dLbls>
           <c:cat>
-            <c:multiLvlStrRef>
+            <c:strRef>
               <c:f>Sheet1!$A$2:$A$6</c:f>
-              <c:multiLvlStrCache>
+              <c:strCache>
                 <c:ptCount val="5"/>
-                <c:lvl>
-                  <c:pt idx="0">
-                    <c:v>Accuracy</c:v>
-                  </c:pt>
-                  <c:pt idx="1">
-                    <c:v>Precision*</c:v>
-                  </c:pt>
-                  <c:pt idx="2">
-                    <c:v>Recall*</c:v>
-                  </c:pt>
-                  <c:pt idx="3">
-                    <c:v>F1-Score*</c:v>
-                  </c:pt>
-                  <c:pt idx="4">
-                    <c:v>ROC-AUC</c:v>
-                  </c:pt>
-                </c:lvl>
-              </c:multiLvlStrCache>
-            </c:multiLvlStrRef>
+                <c:pt idx="0">
+                  <c:v>Accuracy</c:v>
+                </c:pt>
+                <c:pt idx="1">
+                  <c:v>Precision*</c:v>
+                </c:pt>
+                <c:pt idx="2">
+                  <c:v>Recall*</c:v>
+                </c:pt>
+                <c:pt idx="3">
+                  <c:v>F1-Score*</c:v>
+                </c:pt>
+                <c:pt idx="4">
+                  <c:v>ROC-AUC</c:v>
+                </c:pt>
+              </c:strCache>
+            </c:strRef>
           </c:cat>
           <c:val>
             <c:numRef>
@@ -304,16 +304,16 @@
                 <c:formatCode>General</c:formatCode>
                 <c:ptCount val="5"/>
                 <c:pt idx="0">
-                  <c:v>0.7518</c:v>
+                  <c:v>0.75180000000000002</c:v>
                 </c:pt>
                 <c:pt idx="1">
-                  <c:v>0.4504</c:v>
+                  <c:v>0.45040000000000002</c:v>
                 </c:pt>
                 <c:pt idx="2">
-                  <c:v>0.5539</c:v>
+                  <c:v>0.55389999999999995</c:v>
                 </c:pt>
                 <c:pt idx="3">
-                  <c:v>0.4968</c:v>
+                  <c:v>0.49680000000000002</c:v>
                 </c:pt>
                 <c:pt idx="4">
                   <c:v>0.7248</c:v>
@@ -321,6 +321,11 @@
               </c:numCache>
             </c:numRef>
           </c:val>
+          <c:extLst>
+            <c:ext xmlns:c16="http://schemas.microsoft.com/office/drawing/2014/chart" uri="{C3380CC4-5D6E-409C-BE32-E72D297353CC}">
+              <c16:uniqueId val="{00000001-7E1A-44ED-9873-5996C4CF7C8A}"/>
+            </c:ext>
+          </c:extLst>
         </c:ser>
         <c:ser>
           <c:idx val="2"/>
@@ -343,54 +348,28 @@
             <a:effectLst/>
           </c:spPr>
           <c:invertIfNegative val="0"/>
-          <c:dLbls>
-            <c:numFmt formatCode="#,##0" sourceLinked="0"/>
-            <c:txPr>
-              <a:bodyPr/>
-              <a:lstStyle/>
-              <a:p>
-                <a:pPr>
-                  <a:defRPr b="0" i="0" strike="noStrike" sz="1200" u="none">
-                    <a:solidFill>
-                      <a:srgbClr val="000000"/>
-                    </a:solidFill>
-                    <a:latin typeface="Arial"/>
-                  </a:defRPr>
-                </a:pPr>
-              </a:p>
-            </c:txPr>
-            <c:showLegendKey val="0"/>
-            <c:showVal val="0"/>
-            <c:showCatName val="0"/>
-            <c:showSerName val="0"/>
-            <c:showPercent val="0"/>
-            <c:showBubbleSize val="0"/>
-            <c:showLeaderLines val="0"/>
-          </c:dLbls>
           <c:cat>
-            <c:multiLvlStrRef>
+            <c:strRef>
               <c:f>Sheet1!$A$2:$A$6</c:f>
-              <c:multiLvlStrCache>
+              <c:strCache>
                 <c:ptCount val="5"/>
-                <c:lvl>
-                  <c:pt idx="0">
-                    <c:v>Accuracy</c:v>
-                  </c:pt>
-                  <c:pt idx="1">
-                    <c:v>Precision*</c:v>
-                  </c:pt>
-                  <c:pt idx="2">
-                    <c:v>Recall*</c:v>
-                  </c:pt>
-                  <c:pt idx="3">
-                    <c:v>F1-Score*</c:v>
-                  </c:pt>
-                  <c:pt idx="4">
-                    <c:v>ROC-AUC</c:v>
-                  </c:pt>
-                </c:lvl>
-              </c:multiLvlStrCache>
-            </c:multiLvlStrRef>
+                <c:pt idx="0">
+                  <c:v>Accuracy</c:v>
+                </c:pt>
+                <c:pt idx="1">
+                  <c:v>Precision*</c:v>
+                </c:pt>
+                <c:pt idx="2">
+                  <c:v>Recall*</c:v>
+                </c:pt>
+                <c:pt idx="3">
+                  <c:v>F1-Score*</c:v>
+                </c:pt>
+                <c:pt idx="4">
+                  <c:v>ROC-AUC</c:v>
+                </c:pt>
+              </c:strCache>
+            </c:strRef>
           </c:cat>
           <c:val>
             <c:numRef>
@@ -399,53 +378,40 @@
                 <c:formatCode>General</c:formatCode>
                 <c:ptCount val="5"/>
                 <c:pt idx="0">
-                  <c:v>0.7723</c:v>
+                  <c:v>0.77229999999999999</c:v>
                 </c:pt>
                 <c:pt idx="1">
-                  <c:v>0.487</c:v>
+                  <c:v>0.48699999999999999</c:v>
                 </c:pt>
                 <c:pt idx="2">
-                  <c:v>0.5516</c:v>
+                  <c:v>0.55159999999999998</c:v>
                 </c:pt>
                 <c:pt idx="3">
-                  <c:v>0.5173</c:v>
+                  <c:v>0.51729999999999998</c:v>
                 </c:pt>
                 <c:pt idx="4">
-                  <c:v>0.7589</c:v>
+                  <c:v>0.75890000000000002</c:v>
                 </c:pt>
               </c:numCache>
             </c:numRef>
           </c:val>
+          <c:extLst>
+            <c:ext xmlns:c16="http://schemas.microsoft.com/office/drawing/2014/chart" uri="{C3380CC4-5D6E-409C-BE32-E72D297353CC}">
+              <c16:uniqueId val="{00000002-7E1A-44ED-9873-5996C4CF7C8A}"/>
+            </c:ext>
+          </c:extLst>
         </c:ser>
         <c:dLbls>
-          <c:numFmt formatCode="#,##0" sourceLinked="0"/>
-          <c:txPr>
-            <a:bodyPr/>
-            <a:lstStyle/>
-            <a:p>
-              <a:pPr>
-                <a:defRPr b="0" i="0" strike="noStrike" sz="1200" u="none">
-                  <a:solidFill>
-                    <a:srgbClr val="000000"/>
-                  </a:solidFill>
-                  <a:latin typeface="Arial"/>
-                </a:defRPr>
-              </a:pPr>
-            </a:p>
-          </c:txPr>
           <c:showLegendKey val="0"/>
           <c:showVal val="0"/>
           <c:showCatName val="0"/>
           <c:showSerName val="0"/>
           <c:showPercent val="0"/>
           <c:showBubbleSize val="0"/>
-          <c:showLeaderLines val="0"/>
         </c:dLbls>
         <c:gapWidth val="150"/>
-        <c:overlap val="0"/>
         <c:axId val="2094734554"/>
         <c:axId val="2094734552"/>
-        <c:axId val="2094734556"/>
       </c:barChart>
       <c:catAx>
         <c:axId val="2094734554"/>
@@ -486,6 +452,7 @@
         <c:crosses val="autoZero"/>
         <c:auto val="1"/>
         <c:lblAlgn val="ctr"/>
+        <c:lblOffset val="100"/>
         <c:noMultiLvlLbl val="1"/>
       </c:catAx>
       <c:valAx>
@@ -556,7 +523,7 @@
         <a:lstStyle/>
         <a:p>
           <a:pPr>
-            <a:defRPr sz="1200">      </a:defRPr>
+            <a:defRPr sz="1200"/>
           </a:pPr>
           <a:endParaRPr lang="en-US"/>
         </a:p>
@@ -564,6 +531,7 @@
     </c:legend>
     <c:plotVisOnly val="1"/>
     <c:dispBlanksAs val="span"/>
+    <c:showDLblsOverMax val="1"/>
   </c:chart>
   <c:spPr>
     <a:solidFill>
@@ -581,9 +549,11 @@
 </file>
 
 <file path=ppt/charts/chart2.xml><?xml version="1.0" encoding="utf-8"?>
-<c:chartSpace xmlns:c="http://schemas.openxmlformats.org/drawingml/2006/chart" xmlns:a="http://schemas.openxmlformats.org/drawingml/2006/main" xmlns:r="http://schemas.openxmlformats.org/officeDocument/2006/relationships">
+<c:chartSpace xmlns:c="http://schemas.openxmlformats.org/drawingml/2006/chart" xmlns:a="http://schemas.openxmlformats.org/drawingml/2006/main" xmlns:r="http://schemas.openxmlformats.org/officeDocument/2006/relationships" xmlns:c16r2="http://schemas.microsoft.com/office/drawing/2015/06/chart">
   <c:date1904 val="0"/>
+  <c:lang val="en-US"/>
   <c:roundedCorners val="1"/>
+  <c:style val="2"/>
   <c:chart>
     <c:autoTitleDeleted val="1"/>
     <c:plotArea>
@@ -613,40 +583,15 @@
             <a:effectLst/>
           </c:spPr>
           <c:invertIfNegative val="0"/>
-          <c:dLbls>
-            <c:numFmt formatCode="#,##0" sourceLinked="0"/>
-            <c:txPr>
-              <a:bodyPr/>
-              <a:lstStyle/>
-              <a:p>
-                <a:pPr>
-                  <a:defRPr b="0" i="0" strike="noStrike" sz="900" u="none">
-                    <a:solidFill>
-                      <a:srgbClr val="FFFFFF"/>
-                    </a:solidFill>
-                    <a:latin typeface="Arial"/>
-                  </a:defRPr>
-                </a:pPr>
-              </a:p>
-            </c:txPr>
-            <c:showLegendKey val="0"/>
-            <c:showVal val="1"/>
-            <c:showCatName val="0"/>
-            <c:showSerName val="0"/>
-            <c:showPercent val="0"/>
-            <c:showBubbleSize val="0"/>
-            <c:showLeaderLines val="0"/>
-          </c:dLbls>
           <c:dPt>
             <c:idx val="0"/>
             <c:invertIfNegative val="0"/>
             <c:bubble3D val="0"/>
-            <c:spPr>
-              <a:solidFill>
-                <a:srgbClr val="00B8D4"/>
-              </a:solidFill>
-              <a:effectLst/>
-            </c:spPr>
+            <c:extLst>
+              <c:ext xmlns:c16="http://schemas.microsoft.com/office/drawing/2014/chart" uri="{C3380CC4-5D6E-409C-BE32-E72D297353CC}">
+                <c16:uniqueId val="{00000001-1697-450C-A5A2-D055D2C17CAB}"/>
+              </c:ext>
+            </c:extLst>
           </c:dPt>
           <c:dPt>
             <c:idx val="1"/>
@@ -658,6 +603,11 @@
               </a:solidFill>
               <a:effectLst/>
             </c:spPr>
+            <c:extLst>
+              <c:ext xmlns:c16="http://schemas.microsoft.com/office/drawing/2014/chart" uri="{C3380CC4-5D6E-409C-BE32-E72D297353CC}">
+                <c16:uniqueId val="{00000003-1697-450C-A5A2-D055D2C17CAB}"/>
+              </c:ext>
+            </c:extLst>
           </c:dPt>
           <c:dPt>
             <c:idx val="2"/>
@@ -669,6 +619,11 @@
               </a:solidFill>
               <a:effectLst/>
             </c:spPr>
+            <c:extLst>
+              <c:ext xmlns:c16="http://schemas.microsoft.com/office/drawing/2014/chart" uri="{C3380CC4-5D6E-409C-BE32-E72D297353CC}">
+                <c16:uniqueId val="{00000005-1697-450C-A5A2-D055D2C17CAB}"/>
+              </c:ext>
+            </c:extLst>
           </c:dPt>
           <c:dPt>
             <c:idx val="3"/>
@@ -680,6 +635,11 @@
               </a:solidFill>
               <a:effectLst/>
             </c:spPr>
+            <c:extLst>
+              <c:ext xmlns:c16="http://schemas.microsoft.com/office/drawing/2014/chart" uri="{C3380CC4-5D6E-409C-BE32-E72D297353CC}">
+                <c16:uniqueId val="{00000007-1697-450C-A5A2-D055D2C17CAB}"/>
+              </c:ext>
+            </c:extLst>
           </c:dPt>
           <c:dPt>
             <c:idx val="4"/>
@@ -691,6 +651,11 @@
               </a:solidFill>
               <a:effectLst/>
             </c:spPr>
+            <c:extLst>
+              <c:ext xmlns:c16="http://schemas.microsoft.com/office/drawing/2014/chart" uri="{C3380CC4-5D6E-409C-BE32-E72D297353CC}">
+                <c16:uniqueId val="{00000009-1697-450C-A5A2-D055D2C17CAB}"/>
+              </c:ext>
+            </c:extLst>
           </c:dPt>
           <c:dPt>
             <c:idx val="5"/>
@@ -702,6 +667,11 @@
               </a:solidFill>
               <a:effectLst/>
             </c:spPr>
+            <c:extLst>
+              <c:ext xmlns:c16="http://schemas.microsoft.com/office/drawing/2014/chart" uri="{C3380CC4-5D6E-409C-BE32-E72D297353CC}">
+                <c16:uniqueId val="{0000000B-1697-450C-A5A2-D055D2C17CAB}"/>
+              </c:ext>
+            </c:extLst>
           </c:dPt>
           <c:dPt>
             <c:idx val="6"/>
@@ -713,6 +683,11 @@
               </a:solidFill>
               <a:effectLst/>
             </c:spPr>
+            <c:extLst>
+              <c:ext xmlns:c16="http://schemas.microsoft.com/office/drawing/2014/chart" uri="{C3380CC4-5D6E-409C-BE32-E72D297353CC}">
+                <c16:uniqueId val="{0000000D-1697-450C-A5A2-D055D2C17CAB}"/>
+              </c:ext>
+            </c:extLst>
           </c:dPt>
           <c:dPt>
             <c:idx val="7"/>
@@ -724,6 +699,11 @@
               </a:solidFill>
               <a:effectLst/>
             </c:spPr>
+            <c:extLst>
+              <c:ext xmlns:c16="http://schemas.microsoft.com/office/drawing/2014/chart" uri="{C3380CC4-5D6E-409C-BE32-E72D297353CC}">
+                <c16:uniqueId val="{0000000F-1697-450C-A5A2-D055D2C17CAB}"/>
+              </c:ext>
+            </c:extLst>
           </c:dPt>
           <c:dPt>
             <c:idx val="8"/>
@@ -735,6 +715,11 @@
               </a:solidFill>
               <a:effectLst/>
             </c:spPr>
+            <c:extLst>
+              <c:ext xmlns:c16="http://schemas.microsoft.com/office/drawing/2014/chart" uri="{C3380CC4-5D6E-409C-BE32-E72D297353CC}">
+                <c16:uniqueId val="{00000011-1697-450C-A5A2-D055D2C17CAB}"/>
+              </c:ext>
+            </c:extLst>
           </c:dPt>
           <c:dPt>
             <c:idx val="9"/>
@@ -746,46 +731,86 @@
               </a:solidFill>
               <a:effectLst/>
             </c:spPr>
+            <c:extLst>
+              <c:ext xmlns:c16="http://schemas.microsoft.com/office/drawing/2014/chart" uri="{C3380CC4-5D6E-409C-BE32-E72D297353CC}">
+                <c16:uniqueId val="{00000013-1697-450C-A5A2-D055D2C17CAB}"/>
+              </c:ext>
+            </c:extLst>
           </c:dPt>
+          <c:dLbls>
+            <c:numFmt formatCode="#,##0" sourceLinked="0"/>
+            <c:spPr>
+              <a:noFill/>
+              <a:ln>
+                <a:noFill/>
+              </a:ln>
+              <a:effectLst/>
+            </c:spPr>
+            <c:txPr>
+              <a:bodyPr/>
+              <a:lstStyle/>
+              <a:p>
+                <a:pPr>
+                  <a:defRPr sz="900" b="0" i="0" u="none" strike="noStrike">
+                    <a:solidFill>
+                      <a:srgbClr val="FFFFFF"/>
+                    </a:solidFill>
+                    <a:latin typeface="Arial"/>
+                  </a:defRPr>
+                </a:pPr>
+                <a:endParaRPr lang="en-US"/>
+              </a:p>
+            </c:txPr>
+            <c:showLegendKey val="0"/>
+            <c:showVal val="1"/>
+            <c:showCatName val="0"/>
+            <c:showSerName val="0"/>
+            <c:showPercent val="0"/>
+            <c:showBubbleSize val="0"/>
+            <c:showLeaderLines val="0"/>
+            <c:extLst>
+              <c:ext xmlns:c15="http://schemas.microsoft.com/office/drawing/2012/chart" uri="{CE6537A1-D6FC-4f65-9D91-7224C49458BB}">
+                <c15:showLeaderLines val="0"/>
+              </c:ext>
+            </c:extLst>
+          </c:dLbls>
           <c:cat>
-            <c:multiLvlStrRef>
+            <c:strRef>
               <c:f>Sheet1!$A$2:$A$11</c:f>
-              <c:multiLvlStrCache>
+              <c:strCache>
                 <c:ptCount val="10"/>
-                <c:lvl>
-                  <c:pt idx="0">
-                    <c:v>PAY_0</c:v>
-                  </c:pt>
-                  <c:pt idx="1">
-                    <c:v>PAY_AMT2</c:v>
-                  </c:pt>
-                  <c:pt idx="2">
-                    <c:v>PAY_4</c:v>
-                  </c:pt>
-                  <c:pt idx="3">
-                    <c:v>LIMIT_BAL</c:v>
-                  </c:pt>
-                  <c:pt idx="4">
-                    <c:v>PAY_3</c:v>
-                  </c:pt>
-                  <c:pt idx="5">
-                    <c:v>PAY_2</c:v>
-                  </c:pt>
-                  <c:pt idx="6">
-                    <c:v>PAY_AMT4</c:v>
-                  </c:pt>
-                  <c:pt idx="7">
-                    <c:v>PAY_AMT3</c:v>
-                  </c:pt>
-                  <c:pt idx="8">
-                    <c:v>PAY_AMT1</c:v>
-                  </c:pt>
-                  <c:pt idx="9">
-                    <c:v>BILL_AMT2</c:v>
-                  </c:pt>
-                </c:lvl>
-              </c:multiLvlStrCache>
-            </c:multiLvlStrRef>
+                <c:pt idx="0">
+                  <c:v>PAY_0</c:v>
+                </c:pt>
+                <c:pt idx="1">
+                  <c:v>PAY_AMT2</c:v>
+                </c:pt>
+                <c:pt idx="2">
+                  <c:v>PAY_4</c:v>
+                </c:pt>
+                <c:pt idx="3">
+                  <c:v>LIMIT_BAL</c:v>
+                </c:pt>
+                <c:pt idx="4">
+                  <c:v>PAY_3</c:v>
+                </c:pt>
+                <c:pt idx="5">
+                  <c:v>PAY_2</c:v>
+                </c:pt>
+                <c:pt idx="6">
+                  <c:v>PAY_AMT4</c:v>
+                </c:pt>
+                <c:pt idx="7">
+                  <c:v>PAY_AMT3</c:v>
+                </c:pt>
+                <c:pt idx="8">
+                  <c:v>PAY_AMT1</c:v>
+                </c:pt>
+                <c:pt idx="9">
+                  <c:v>BILL_AMT2</c:v>
+                </c:pt>
+              </c:strCache>
+            </c:strRef>
           </c:cat>
           <c:val>
             <c:numRef>
@@ -826,36 +851,23 @@
               </c:numCache>
             </c:numRef>
           </c:val>
+          <c:extLst>
+            <c:ext xmlns:c16="http://schemas.microsoft.com/office/drawing/2014/chart" uri="{C3380CC4-5D6E-409C-BE32-E72D297353CC}">
+              <c16:uniqueId val="{00000014-1697-450C-A5A2-D055D2C17CAB}"/>
+            </c:ext>
+          </c:extLst>
         </c:ser>
         <c:dLbls>
-          <c:numFmt formatCode="#,##0" sourceLinked="0"/>
-          <c:txPr>
-            <a:bodyPr/>
-            <a:lstStyle/>
-            <a:p>
-              <a:pPr>
-                <a:defRPr b="0" i="0" strike="noStrike" sz="900" u="none">
-                  <a:solidFill>
-                    <a:srgbClr val="FFFFFF"/>
-                  </a:solidFill>
-                  <a:latin typeface="Arial"/>
-                </a:defRPr>
-              </a:pPr>
-            </a:p>
-          </c:txPr>
           <c:showLegendKey val="0"/>
           <c:showVal val="1"/>
           <c:showCatName val="0"/>
           <c:showSerName val="0"/>
           <c:showPercent val="0"/>
           <c:showBubbleSize val="0"/>
-          <c:showLeaderLines val="0"/>
         </c:dLbls>
         <c:gapWidth val="150"/>
-        <c:overlap val="0"/>
         <c:axId val="2094734554"/>
         <c:axId val="2094734552"/>
-        <c:axId val="2094734556"/>
       </c:barChart>
       <c:catAx>
         <c:axId val="2094734554"/>
@@ -896,6 +908,7 @@
         <c:crosses val="autoZero"/>
         <c:auto val="1"/>
         <c:lblAlgn val="ctr"/>
+        <c:lblOffset val="100"/>
         <c:noMultiLvlLbl val="1"/>
       </c:catAx>
       <c:valAx>
@@ -959,6 +972,7 @@
     </c:plotArea>
     <c:plotVisOnly val="1"/>
     <c:dispBlanksAs val="span"/>
+    <c:showDLblsOverMax val="1"/>
   </c:chart>
   <c:spPr>
     <a:solidFill>
@@ -976,9 +990,11 @@
 </file>
 
 <file path=ppt/charts/chart3.xml><?xml version="1.0" encoding="utf-8"?>
-<c:chartSpace xmlns:c="http://schemas.openxmlformats.org/drawingml/2006/chart" xmlns:a="http://schemas.openxmlformats.org/drawingml/2006/main" xmlns:r="http://schemas.openxmlformats.org/officeDocument/2006/relationships">
+<c:chartSpace xmlns:c="http://schemas.openxmlformats.org/drawingml/2006/chart" xmlns:a="http://schemas.openxmlformats.org/drawingml/2006/main" xmlns:r="http://schemas.openxmlformats.org/officeDocument/2006/relationships" xmlns:c16r2="http://schemas.microsoft.com/office/drawing/2015/06/chart">
   <c:date1904 val="0"/>
+  <c:lang val="en-US"/>
   <c:roundedCorners val="1"/>
+  <c:style val="2"/>
   <c:chart>
     <c:title>
       <c:tx>
@@ -1006,13 +1022,13 @@
           </a:p>
         </c:rich>
       </c:tx>
-      <c:layout/>
       <c:overlay val="0"/>
     </c:title>
     <c:autoTitleDeleted val="0"/>
     <c:plotArea>
       <c:layout/>
       <c:lineChart>
+        <c:grouping val="standard"/>
         <c:varyColors val="0"/>
         <c:ser>
           <c:idx val="0"/>
@@ -1029,9 +1045,6 @@
             </c:strRef>
           </c:tx>
           <c:spPr>
-            <a:solidFill>
-              <a:srgbClr val="1565C0"/>
-            </a:solidFill>
             <a:ln w="38100" cap="flat">
               <a:solidFill>
                 <a:srgbClr val="1565C0"/>
@@ -1041,31 +1054,6 @@
             </a:ln>
             <a:effectLst/>
           </c:spPr>
-          <c:invertIfNegative val="0"/>
-          <c:dLbls>
-            <c:numFmt formatCode="#,##0" sourceLinked="0"/>
-            <c:txPr>
-              <a:bodyPr/>
-              <a:lstStyle/>
-              <a:p>
-                <a:pPr>
-                  <a:defRPr b="0" i="0" strike="noStrike" sz="1200" u="none">
-                    <a:solidFill>
-                      <a:srgbClr val="000000"/>
-                    </a:solidFill>
-                    <a:latin typeface="Arial"/>
-                  </a:defRPr>
-                </a:pPr>
-              </a:p>
-            </c:txPr>
-            <c:showLegendKey val="0"/>
-            <c:showVal val="0"/>
-            <c:showCatName val="0"/>
-            <c:showSerName val="0"/>
-            <c:showPercent val="0"/>
-            <c:showBubbleSize val="0"/>
-            <c:showLeaderLines val="0"/>
-          </c:dLbls>
           <c:marker>
             <c:symbol val="circle"/>
             <c:size val="6"/>
@@ -1084,71 +1072,69 @@
             </c:spPr>
           </c:marker>
           <c:cat>
-            <c:multiLvlStrRef>
+            <c:strRef>
               <c:f>Sheet1!$A$2:$A$20</c:f>
-              <c:multiLvlStrCache>
+              <c:strCache>
                 <c:ptCount val="19"/>
-                <c:lvl>
-                  <c:pt idx="0">
-                    <c:v>PC1</c:v>
-                  </c:pt>
-                  <c:pt idx="1">
-                    <c:v>PC2</c:v>
-                  </c:pt>
-                  <c:pt idx="2">
-                    <c:v>PC3</c:v>
-                  </c:pt>
-                  <c:pt idx="3">
-                    <c:v>PC4</c:v>
-                  </c:pt>
-                  <c:pt idx="4">
-                    <c:v>PC5</c:v>
-                  </c:pt>
-                  <c:pt idx="5">
-                    <c:v>PC6</c:v>
-                  </c:pt>
-                  <c:pt idx="6">
-                    <c:v>PC7</c:v>
-                  </c:pt>
-                  <c:pt idx="7">
-                    <c:v>PC8</c:v>
-                  </c:pt>
-                  <c:pt idx="8">
-                    <c:v>PC9</c:v>
-                  </c:pt>
-                  <c:pt idx="9">
-                    <c:v>PC10</c:v>
-                  </c:pt>
-                  <c:pt idx="10">
-                    <c:v>PC11</c:v>
-                  </c:pt>
-                  <c:pt idx="11">
-                    <c:v>PC12</c:v>
-                  </c:pt>
-                  <c:pt idx="12">
-                    <c:v>PC13</c:v>
-                  </c:pt>
-                  <c:pt idx="13">
-                    <c:v>PC14</c:v>
-                  </c:pt>
-                  <c:pt idx="14">
-                    <c:v>PC15</c:v>
-                  </c:pt>
-                  <c:pt idx="15">
-                    <c:v>PC16</c:v>
-                  </c:pt>
-                  <c:pt idx="16">
-                    <c:v>PC17</c:v>
-                  </c:pt>
-                  <c:pt idx="17">
-                    <c:v>PC18</c:v>
-                  </c:pt>
-                  <c:pt idx="18">
-                    <c:v>PC19</c:v>
-                  </c:pt>
-                </c:lvl>
-              </c:multiLvlStrCache>
-            </c:multiLvlStrRef>
+                <c:pt idx="0">
+                  <c:v>PC1</c:v>
+                </c:pt>
+                <c:pt idx="1">
+                  <c:v>PC2</c:v>
+                </c:pt>
+                <c:pt idx="2">
+                  <c:v>PC3</c:v>
+                </c:pt>
+                <c:pt idx="3">
+                  <c:v>PC4</c:v>
+                </c:pt>
+                <c:pt idx="4">
+                  <c:v>PC5</c:v>
+                </c:pt>
+                <c:pt idx="5">
+                  <c:v>PC6</c:v>
+                </c:pt>
+                <c:pt idx="6">
+                  <c:v>PC7</c:v>
+                </c:pt>
+                <c:pt idx="7">
+                  <c:v>PC8</c:v>
+                </c:pt>
+                <c:pt idx="8">
+                  <c:v>PC9</c:v>
+                </c:pt>
+                <c:pt idx="9">
+                  <c:v>PC10</c:v>
+                </c:pt>
+                <c:pt idx="10">
+                  <c:v>PC11</c:v>
+                </c:pt>
+                <c:pt idx="11">
+                  <c:v>PC12</c:v>
+                </c:pt>
+                <c:pt idx="12">
+                  <c:v>PC13</c:v>
+                </c:pt>
+                <c:pt idx="13">
+                  <c:v>PC14</c:v>
+                </c:pt>
+                <c:pt idx="14">
+                  <c:v>PC15</c:v>
+                </c:pt>
+                <c:pt idx="15">
+                  <c:v>PC16</c:v>
+                </c:pt>
+                <c:pt idx="16">
+                  <c:v>PC17</c:v>
+                </c:pt>
+                <c:pt idx="17">
+                  <c:v>PC18</c:v>
+                </c:pt>
+                <c:pt idx="18">
+                  <c:v>PC19</c:v>
+                </c:pt>
+              </c:strCache>
+            </c:strRef>
           </c:cat>
           <c:val>
             <c:numRef>
@@ -1217,35 +1203,24 @@
             </c:numRef>
           </c:val>
           <c:smooth val="1"/>
+          <c:extLst>
+            <c:ext xmlns:c16="http://schemas.microsoft.com/office/drawing/2014/chart" uri="{C3380CC4-5D6E-409C-BE32-E72D297353CC}">
+              <c16:uniqueId val="{00000000-E234-4B0A-A1C4-707A3001542E}"/>
+            </c:ext>
+          </c:extLst>
         </c:ser>
         <c:dLbls>
-          <c:numFmt formatCode="#,##0" sourceLinked="0"/>
-          <c:txPr>
-            <a:bodyPr/>
-            <a:lstStyle/>
-            <a:p>
-              <a:pPr>
-                <a:defRPr b="0" i="0" strike="noStrike" sz="1200" u="none">
-                  <a:solidFill>
-                    <a:srgbClr val="000000"/>
-                  </a:solidFill>
-                  <a:latin typeface="Arial"/>
-                </a:defRPr>
-              </a:pPr>
-            </a:p>
-          </c:txPr>
           <c:showLegendKey val="0"/>
           <c:showVal val="0"/>
           <c:showCatName val="0"/>
           <c:showSerName val="0"/>
           <c:showPercent val="0"/>
           <c:showBubbleSize val="0"/>
-          <c:showLeaderLines val="0"/>
         </c:dLbls>
         <c:marker val="1"/>
+        <c:smooth val="0"/>
         <c:axId val="2094734554"/>
         <c:axId val="2094734552"/>
-        <c:axId val="2094734556"/>
       </c:lineChart>
       <c:catAx>
         <c:axId val="2094734554"/>
@@ -1286,6 +1261,7 @@
         <c:crosses val="autoZero"/>
         <c:auto val="1"/>
         <c:lblAlgn val="ctr"/>
+        <c:lblOffset val="100"/>
         <c:noMultiLvlLbl val="1"/>
       </c:catAx>
       <c:valAx>
@@ -1356,7 +1332,7 @@
         <a:lstStyle/>
         <a:p>
           <a:pPr>
-            <a:defRPr sz="1000">      </a:defRPr>
+            <a:defRPr sz="1000"/>
           </a:pPr>
           <a:endParaRPr lang="en-US"/>
         </a:p>
@@ -1364,6 +1340,7 @@
     </c:legend>
     <c:plotVisOnly val="1"/>
     <c:dispBlanksAs val="span"/>
+    <c:showDLblsOverMax val="1"/>
   </c:chart>
   <c:spPr>
     <a:solidFill>
@@ -1415,7 +1392,7 @@
         <p:spPr>
           <a:xfrm>
             <a:off x="0" y="0"/>
-            <a:ext cx="2971800" cy="458788"/>
+            <a:ext cx="2228850" cy="458788"/>
           </a:xfrm>
           <a:prstGeom prst="rect">
             <a:avLst/>
@@ -1445,8 +1422,8 @@
         </p:nvSpPr>
         <p:spPr>
           <a:xfrm>
-            <a:off x="3884613" y="0"/>
-            <a:ext cx="2971800" cy="458788"/>
+            <a:off x="2913063" y="0"/>
+            <a:ext cx="2228850" cy="458788"/>
           </a:xfrm>
           <a:prstGeom prst="rect">
             <a:avLst/>
@@ -1460,9 +1437,8 @@
             </a:lvl1pPr>
           </a:lstStyle>
           <a:p>
-            <a:fld id="{5282F153-3F37-0F45-9E97-73ACFA13230C}" type="datetimeFigureOut">
-              <a:rPr lang="en-US"/>
-              <a:t>7/23/19</a:t>
+            <a:fld id="{60BFCF48-CA5B-4806-9798-296E93EE5D0C}" type="datetimeFigureOut">
+              <a:t>4/20/2026</a:t>
             </a:fld>
             <a:endParaRPr lang="en-US"/>
           </a:p>
@@ -1480,7 +1456,7 @@
         </p:nvSpPr>
         <p:spPr>
           <a:xfrm>
-            <a:off x="685800" y="1143000"/>
+            <a:off x="-171450" y="1143000"/>
             <a:ext cx="5486400" cy="3086100"/>
           </a:xfrm>
           <a:prstGeom prst="rect">
@@ -1513,8 +1489,8 @@
         </p:nvSpPr>
         <p:spPr>
           <a:xfrm>
-            <a:off x="685800" y="4400550"/>
-            <a:ext cx="5486400" cy="3600450"/>
+            <a:off x="514350" y="4400550"/>
+            <a:ext cx="4114800" cy="3600450"/>
           </a:xfrm>
           <a:prstGeom prst="rect">
             <a:avLst/>
@@ -1573,7 +1549,7 @@
         <p:spPr>
           <a:xfrm>
             <a:off x="0" y="8685213"/>
-            <a:ext cx="2971800" cy="458787"/>
+            <a:ext cx="2228850" cy="458787"/>
           </a:xfrm>
           <a:prstGeom prst="rect">
             <a:avLst/>
@@ -1603,8 +1579,8 @@
         </p:nvSpPr>
         <p:spPr>
           <a:xfrm>
-            <a:off x="3884613" y="8685213"/>
-            <a:ext cx="2971800" cy="458787"/>
+            <a:off x="2913063" y="8685213"/>
+            <a:ext cx="2228850" cy="458787"/>
           </a:xfrm>
           <a:prstGeom prst="rect">
             <a:avLst/>
@@ -1618,8 +1594,7 @@
             </a:lvl1pPr>
           </a:lstStyle>
           <a:p>
-            <a:fld id="{CE5E9CC1-C706-0F49-92D6-E571CC5EEA8F}" type="slidenum">
-              <a:rPr lang="en-US"/>
+            <a:fld id="{8C9A18B9-4859-4842-9184-AFFED091AC37}" type="slidenum">
               <a:t>‹#›</a:t>
             </a:fld>
             <a:endParaRPr lang="en-US"/>
@@ -1629,7 +1604,7 @@
     </p:spTree>
     <p:extLst>
       <p:ext uri="{BB962C8B-B14F-4D97-AF65-F5344CB8AC3E}">
-        <p14:creationId xmlns:p14="http://schemas.microsoft.com/office/powerpoint/2010/main" val="1024086991"/>
+        <p14:creationId xmlns:p14="http://schemas.microsoft.com/office/powerpoint/2010/main" val="1898826587"/>
       </p:ext>
     </p:extLst>
   </p:cSld>
@@ -1773,11 +1748,7 @@
           <a:bodyPr/>
           <a:lstStyle/>
           <a:p>
-            <a:r>
-              <a:rPr lang="en-US" dirty="0"/>
-              <a:t/>
-            </a:r>
-            <a:endParaRPr lang="en-US" dirty="0"/>
+            <a:endParaRPr lang="en-US"/>
           </a:p>
         </p:txBody>
       </p:sp>
@@ -1861,11 +1832,7 @@
           <a:bodyPr/>
           <a:lstStyle/>
           <a:p>
-            <a:r>
-              <a:rPr lang="en-US" dirty="0"/>
-              <a:t/>
-            </a:r>
-            <a:endParaRPr lang="en-US" dirty="0"/>
+            <a:endParaRPr lang="en-US"/>
           </a:p>
         </p:txBody>
       </p:sp>
@@ -1949,11 +1916,7 @@
           <a:bodyPr/>
           <a:lstStyle/>
           <a:p>
-            <a:r>
-              <a:rPr lang="en-US" dirty="0"/>
-              <a:t/>
-            </a:r>
-            <a:endParaRPr lang="en-US" dirty="0"/>
+            <a:endParaRPr lang="en-US"/>
           </a:p>
         </p:txBody>
       </p:sp>
@@ -2037,11 +2000,7 @@
           <a:bodyPr/>
           <a:lstStyle/>
           <a:p>
-            <a:r>
-              <a:rPr lang="en-US" dirty="0"/>
-              <a:t/>
-            </a:r>
-            <a:endParaRPr lang="en-US" dirty="0"/>
+            <a:endParaRPr lang="en-US"/>
           </a:p>
         </p:txBody>
       </p:sp>
@@ -2125,11 +2084,7 @@
           <a:bodyPr/>
           <a:lstStyle/>
           <a:p>
-            <a:r>
-              <a:rPr lang="en-US" dirty="0"/>
-              <a:t/>
-            </a:r>
-            <a:endParaRPr lang="en-US" dirty="0"/>
+            <a:endParaRPr lang="en-US"/>
           </a:p>
         </p:txBody>
       </p:sp>
@@ -2213,11 +2168,7 @@
           <a:bodyPr/>
           <a:lstStyle/>
           <a:p>
-            <a:r>
-              <a:rPr lang="en-US" dirty="0"/>
-              <a:t/>
-            </a:r>
-            <a:endParaRPr lang="en-US" dirty="0"/>
+            <a:endParaRPr lang="en-US"/>
           </a:p>
         </p:txBody>
       </p:sp>
@@ -2301,11 +2252,7 @@
           <a:bodyPr/>
           <a:lstStyle/>
           <a:p>
-            <a:r>
-              <a:rPr lang="en-US" dirty="0"/>
-              <a:t/>
-            </a:r>
-            <a:endParaRPr lang="en-US" dirty="0"/>
+            <a:endParaRPr lang="en-US"/>
           </a:p>
         </p:txBody>
       </p:sp>
@@ -2389,11 +2336,7 @@
           <a:bodyPr/>
           <a:lstStyle/>
           <a:p>
-            <a:r>
-              <a:rPr lang="en-US" dirty="0"/>
-              <a:t/>
-            </a:r>
-            <a:endParaRPr lang="en-US" dirty="0"/>
+            <a:endParaRPr lang="en-US"/>
           </a:p>
         </p:txBody>
       </p:sp>
@@ -2477,11 +2420,7 @@
           <a:bodyPr/>
           <a:lstStyle/>
           <a:p>
-            <a:r>
-              <a:rPr lang="en-US" dirty="0"/>
-              <a:t/>
-            </a:r>
-            <a:endParaRPr lang="en-US" dirty="0"/>
+            <a:endParaRPr lang="en-US"/>
           </a:p>
         </p:txBody>
       </p:sp>
@@ -2565,11 +2504,7 @@
           <a:bodyPr/>
           <a:lstStyle/>
           <a:p>
-            <a:r>
-              <a:rPr lang="en-US" dirty="0"/>
-              <a:t/>
-            </a:r>
-            <a:endParaRPr lang="en-US" dirty="0"/>
+            <a:endParaRPr lang="en-US"/>
           </a:p>
         </p:txBody>
       </p:sp>
@@ -2653,11 +2588,7 @@
           <a:bodyPr/>
           <a:lstStyle/>
           <a:p>
-            <a:r>
-              <a:rPr lang="en-US" dirty="0"/>
-              <a:t/>
-            </a:r>
-            <a:endParaRPr lang="en-US" dirty="0"/>
+            <a:endParaRPr lang="en-US"/>
           </a:p>
         </p:txBody>
       </p:sp>
@@ -2741,11 +2672,7 @@
           <a:bodyPr/>
           <a:lstStyle/>
           <a:p>
-            <a:r>
-              <a:rPr lang="en-US" dirty="0"/>
-              <a:t/>
-            </a:r>
-            <a:endParaRPr lang="en-US" dirty="0"/>
+            <a:endParaRPr lang="en-US"/>
           </a:p>
         </p:txBody>
       </p:sp>
@@ -2829,11 +2756,7 @@
           <a:bodyPr/>
           <a:lstStyle/>
           <a:p>
-            <a:r>
-              <a:rPr lang="en-US" dirty="0"/>
-              <a:t/>
-            </a:r>
-            <a:endParaRPr lang="en-US" dirty="0"/>
+            <a:endParaRPr lang="en-US"/>
           </a:p>
         </p:txBody>
       </p:sp>
@@ -2917,11 +2840,7 @@
           <a:bodyPr/>
           <a:lstStyle/>
           <a:p>
-            <a:r>
-              <a:rPr lang="en-US" dirty="0"/>
-              <a:t/>
-            </a:r>
-            <a:endParaRPr lang="en-US" dirty="0"/>
+            <a:endParaRPr lang="en-US"/>
           </a:p>
         </p:txBody>
       </p:sp>
@@ -2994,6 +2913,11 @@
 <file path=ppt/slideMasters/slideMaster1.xml><?xml version="1.0" encoding="utf-8"?>
 <p:sldMaster xmlns:a="http://schemas.openxmlformats.org/drawingml/2006/main" xmlns:r="http://schemas.openxmlformats.org/officeDocument/2006/relationships" xmlns:p="http://schemas.openxmlformats.org/presentationml/2006/main">
   <p:cSld>
+    <p:bg>
+      <p:bgRef idx="1001">
+        <a:schemeClr val="bg1"/>
+      </p:bgRef>
+    </p:bg>
     <p:spTree>
       <p:nvGrpSpPr>
         <p:cNvPr id="1" name=""/>
@@ -3276,6 +3200,7 @@
         <a:solidFill>
           <a:srgbClr val="0D2137"/>
         </a:solidFill>
+        <a:effectLst/>
       </p:bgPr>
     </p:bg>
     <p:spTree>
@@ -3388,11 +3313,11 @@
           <a:bodyPr wrap="square" rtlCol="0" anchor="ctr"/>
           <a:lstStyle/>
           <a:p>
-            <a:pPr indent="0" marL="0">
-              <a:buNone/>
-            </a:pPr>
-            <a:r>
-              <a:rPr lang="en-US" sz="1300" b="1" spc="600" kern="0" dirty="0">
+            <a:pPr marL="0" indent="0">
+              <a:buNone/>
+            </a:pPr>
+            <a:r>
+              <a:rPr lang="en-US" sz="1300" b="1" kern="0" spc="600">
                 <a:solidFill>
                   <a:srgbClr val="00B8D4"/>
                 </a:solidFill>
@@ -3402,7 +3327,7 @@
               </a:rPr>
               <a:t>PREDICTING</a:t>
             </a:r>
-            <a:endParaRPr lang="en-US" sz="1300" dirty="0"/>
+            <a:endParaRPr lang="en-US" sz="1300"/>
           </a:p>
         </p:txBody>
       </p:sp>
@@ -3427,11 +3352,11 @@
           <a:bodyPr wrap="square" lIns="0" tIns="0" rIns="0" bIns="0" rtlCol="0" anchor="ctr"/>
           <a:lstStyle/>
           <a:p>
-            <a:pPr indent="0" marL="0">
-              <a:buNone/>
-            </a:pPr>
-            <a:r>
-              <a:rPr lang="en-US" sz="4000" b="1" dirty="0">
+            <a:pPr marL="0" indent="0">
+              <a:buNone/>
+            </a:pPr>
+            <a:r>
+              <a:rPr lang="en-US" sz="4000" b="1">
                 <a:solidFill>
                   <a:srgbClr val="FFFFFF"/>
                 </a:solidFill>
@@ -3441,7 +3366,7 @@
               </a:rPr>
               <a:t>Credit Card Defaults</a:t>
             </a:r>
-            <a:endParaRPr lang="en-US" sz="4000" dirty="0"/>
+            <a:endParaRPr lang="en-US" sz="4000"/>
           </a:p>
         </p:txBody>
       </p:sp>
@@ -3466,11 +3391,11 @@
           <a:bodyPr wrap="square" rtlCol="0" anchor="ctr"/>
           <a:lstStyle/>
           <a:p>
-            <a:pPr indent="0" marL="0">
-              <a:buNone/>
-            </a:pPr>
-            <a:r>
-              <a:rPr lang="en-US" sz="1800" dirty="0">
+            <a:pPr marL="0" indent="0">
+              <a:buNone/>
+            </a:pPr>
+            <a:r>
+              <a:rPr lang="en-US" sz="1800">
                 <a:solidFill>
                   <a:srgbClr val="4FC3F7"/>
                 </a:solidFill>
@@ -3480,7 +3405,7 @@
               </a:rPr>
               <a:t>Using Machine Learning Techniques</a:t>
             </a:r>
-            <a:endParaRPr lang="en-US" sz="1800" dirty="0"/>
+            <a:endParaRPr lang="en-US" sz="1800"/>
           </a:p>
         </p:txBody>
       </p:sp>
@@ -3530,11 +3455,11 @@
           <a:bodyPr wrap="square" rtlCol="0" anchor="ctr"/>
           <a:lstStyle/>
           <a:p>
-            <a:pPr indent="0" marL="0">
-              <a:buNone/>
-            </a:pPr>
-            <a:r>
-              <a:rPr lang="en-US" sz="1100" dirty="0">
+            <a:pPr marL="0" indent="0">
+              <a:buNone/>
+            </a:pPr>
+            <a:r>
+              <a:rPr lang="en-US" sz="1100">
                 <a:solidFill>
                   <a:srgbClr val="546E7A"/>
                 </a:solidFill>
@@ -3544,7 +3469,7 @@
               </a:rPr>
               <a:t>BFOR 516 – Advanced Data Analytics for Cybersecurity  |  Spring 2026</a:t>
             </a:r>
-            <a:endParaRPr lang="en-US" sz="1100" dirty="0"/>
+            <a:endParaRPr lang="en-US" sz="1100"/>
           </a:p>
         </p:txBody>
       </p:sp>
@@ -3594,11 +3519,11 @@
           <a:bodyPr wrap="square" lIns="0" tIns="0" rIns="0" bIns="0" rtlCol="0" anchor="ctr"/>
           <a:lstStyle/>
           <a:p>
-            <a:pPr indent="0" marL="0">
-              <a:buNone/>
-            </a:pPr>
-            <a:r>
-              <a:rPr lang="en-US" sz="1200" dirty="0">
+            <a:pPr marL="0" indent="0">
+              <a:buNone/>
+            </a:pPr>
+            <a:r>
+              <a:rPr lang="en-US" sz="1200">
                 <a:solidFill>
                   <a:srgbClr val="FFFFFF"/>
                 </a:solidFill>
@@ -3608,7 +3533,7 @@
               </a:rPr>
               <a:t>Spencer Kone</a:t>
             </a:r>
-            <a:endParaRPr lang="en-US" sz="1200" dirty="0"/>
+            <a:endParaRPr lang="en-US" sz="1200"/>
           </a:p>
         </p:txBody>
       </p:sp>
@@ -3658,11 +3583,11 @@
           <a:bodyPr wrap="square" lIns="0" tIns="0" rIns="0" bIns="0" rtlCol="0" anchor="ctr"/>
           <a:lstStyle/>
           <a:p>
-            <a:pPr indent="0" marL="0">
-              <a:buNone/>
-            </a:pPr>
-            <a:r>
-              <a:rPr lang="en-US" sz="1200" dirty="0">
+            <a:pPr marL="0" indent="0">
+              <a:buNone/>
+            </a:pPr>
+            <a:r>
+              <a:rPr lang="en-US" sz="1200">
                 <a:solidFill>
                   <a:srgbClr val="FFFFFF"/>
                 </a:solidFill>
@@ -3672,7 +3597,7 @@
               </a:rPr>
               <a:t>Muhammad H. Bahar</a:t>
             </a:r>
-            <a:endParaRPr lang="en-US" sz="1200" dirty="0"/>
+            <a:endParaRPr lang="en-US" sz="1200"/>
           </a:p>
         </p:txBody>
       </p:sp>
@@ -3722,11 +3647,11 @@
           <a:bodyPr wrap="square" lIns="0" tIns="0" rIns="0" bIns="0" rtlCol="0" anchor="ctr"/>
           <a:lstStyle/>
           <a:p>
-            <a:pPr indent="0" marL="0">
-              <a:buNone/>
-            </a:pPr>
-            <a:r>
-              <a:rPr lang="en-US" sz="1200" dirty="0">
+            <a:pPr marL="0" indent="0">
+              <a:buNone/>
+            </a:pPr>
+            <a:r>
+              <a:rPr lang="en-US" sz="1200">
                 <a:solidFill>
                   <a:srgbClr val="FFFFFF"/>
                 </a:solidFill>
@@ -3736,7 +3661,7 @@
               </a:rPr>
               <a:t>Kunapureddy Leela Pavan Kumar</a:t>
             </a:r>
-            <a:endParaRPr lang="en-US" sz="1200" dirty="0"/>
+            <a:endParaRPr lang="en-US" sz="1200"/>
           </a:p>
         </p:txBody>
       </p:sp>
@@ -3786,11 +3711,11 @@
           <a:bodyPr wrap="square" lIns="0" tIns="0" rIns="0" bIns="0" rtlCol="0" anchor="ctr"/>
           <a:lstStyle/>
           <a:p>
-            <a:pPr indent="0" marL="0">
-              <a:buNone/>
-            </a:pPr>
-            <a:r>
-              <a:rPr lang="en-US" sz="1200" dirty="0">
+            <a:pPr marL="0" indent="0">
+              <a:buNone/>
+            </a:pPr>
+            <a:r>
+              <a:rPr lang="en-US" sz="1200">
                 <a:solidFill>
                   <a:srgbClr val="FFFFFF"/>
                 </a:solidFill>
@@ -3800,7 +3725,7 @@
               </a:rPr>
               <a:t>Maddirala Shalem Raju</a:t>
             </a:r>
-            <a:endParaRPr lang="en-US" sz="1200" dirty="0"/>
+            <a:endParaRPr lang="en-US" sz="1200"/>
           </a:p>
         </p:txBody>
       </p:sp>
@@ -3825,11 +3750,11 @@
           <a:bodyPr wrap="square" rtlCol="0" anchor="ctr"/>
           <a:lstStyle/>
           <a:p>
-            <a:pPr indent="0" marL="0">
-              <a:buNone/>
-            </a:pPr>
-            <a:r>
-              <a:rPr lang="en-US" sz="1000" dirty="0">
+            <a:pPr marL="0" indent="0">
+              <a:buNone/>
+            </a:pPr>
+            <a:r>
+              <a:rPr lang="en-US" sz="1000">
                 <a:solidFill>
                   <a:srgbClr val="546E7A"/>
                 </a:solidFill>
@@ -3839,7 +3764,7 @@
               </a:rPr>
               <a:t>Faculty: Dr. Srishti Gupta  |  Group 3</a:t>
             </a:r>
-            <a:endParaRPr lang="en-US" sz="1000" dirty="0"/>
+            <a:endParaRPr lang="en-US" sz="1000"/>
           </a:p>
         </p:txBody>
       </p:sp>
@@ -3859,6 +3784,7 @@
         <a:solidFill>
           <a:srgbClr val="F0F6FC"/>
         </a:solidFill>
+        <a:effectLst/>
       </p:bgPr>
     </p:bg>
     <p:spTree>
@@ -3921,11 +3847,11 @@
           <a:bodyPr wrap="square" rtlCol="0" anchor="ctr"/>
           <a:lstStyle/>
           <a:p>
-            <a:pPr indent="0" marL="0">
-              <a:buNone/>
-            </a:pPr>
-            <a:r>
-              <a:rPr lang="en-US" sz="2600" b="1" dirty="0">
+            <a:pPr marL="0" indent="0">
+              <a:buNone/>
+            </a:pPr>
+            <a:r>
+              <a:rPr lang="en-US" sz="2600" b="1">
                 <a:solidFill>
                   <a:srgbClr val="FFFFFF"/>
                 </a:solidFill>
@@ -3935,13 +3861,13 @@
               </a:rPr>
               <a:t>PCA &amp; Dimensionality Insights</a:t>
             </a:r>
-            <a:endParaRPr lang="en-US" sz="2600" dirty="0"/>
+            <a:endParaRPr lang="en-US" sz="2600"/>
           </a:p>
         </p:txBody>
       </p:sp>
       <p:graphicFrame>
         <p:nvGraphicFramePr>
-          <p:cNvPr id="4" name="Chart 0" descr=""/>
+          <p:cNvPr id="4" name="Chart 0"/>
           <p:cNvGraphicFramePr/>
           <p:nvPr/>
         </p:nvGraphicFramePr>
@@ -3949,9 +3875,9 @@
           <a:off x="365760" y="914400"/>
           <a:ext cx="5029200" cy="3840480"/>
         </p:xfrm>
-        <a:graphic xmlns:a="http://schemas.openxmlformats.org/drawingml/2006/main">
+        <a:graphic>
           <a:graphicData uri="http://schemas.openxmlformats.org/drawingml/2006/chart">
-            <c:chart xmlns:c="http://schemas.openxmlformats.org/drawingml/2006/chart" r:id="rId1"/>
+            <c:chart xmlns:c="http://schemas.openxmlformats.org/drawingml/2006/chart" xmlns:r="http://schemas.openxmlformats.org/officeDocument/2006/relationships" r:id="rId3"/>
           </a:graphicData>
         </a:graphic>
       </p:graphicFrame>
@@ -3976,11 +3902,11 @@
           <a:bodyPr wrap="square" rtlCol="0" anchor="ctr"/>
           <a:lstStyle/>
           <a:p>
-            <a:pPr indent="0" marL="0">
-              <a:buNone/>
-            </a:pPr>
-            <a:r>
-              <a:rPr lang="en-US" sz="1400" b="1" dirty="0">
+            <a:pPr marL="0" indent="0">
+              <a:buNone/>
+            </a:pPr>
+            <a:r>
+              <a:rPr lang="en-US" sz="1400" b="1">
                 <a:solidFill>
                   <a:srgbClr val="0D2137"/>
                 </a:solidFill>
@@ -3990,7 +3916,7 @@
               </a:rPr>
               <a:t>Variance Thresholds</a:t>
             </a:r>
-            <a:endParaRPr lang="en-US" sz="1400" dirty="0"/>
+            <a:endParaRPr lang="en-US" sz="1400"/>
           </a:p>
         </p:txBody>
       </p:sp>
@@ -4018,7 +3944,7 @@
             <a:prstDash val="solid"/>
           </a:ln>
           <a:effectLst>
-            <a:outerShdw sx="100000" sy="100000" kx="0" ky="0" algn="bl" rotWithShape="0" blurRad="101600" dist="38100" dir="8100000">
+            <a:outerShdw blurRad="101600" dist="38100" dir="8100000" algn="bl" rotWithShape="0">
               <a:srgbClr val="000000">
                 <a:alpha val="12000"/>
               </a:srgbClr>
@@ -4072,11 +3998,11 @@
           <a:bodyPr wrap="square" rtlCol="0" anchor="ctr"/>
           <a:lstStyle/>
           <a:p>
-            <a:pPr indent="0" marL="0">
-              <a:buNone/>
-            </a:pPr>
-            <a:r>
-              <a:rPr lang="en-US" sz="1300" b="1" dirty="0">
+            <a:pPr marL="0" indent="0">
+              <a:buNone/>
+            </a:pPr>
+            <a:r>
+              <a:rPr lang="en-US" sz="1300" b="1">
                 <a:solidFill>
                   <a:srgbClr val="0D2137"/>
                 </a:solidFill>
@@ -4086,7 +4012,7 @@
               </a:rPr>
               <a:t>90% variance</a:t>
             </a:r>
-            <a:endParaRPr lang="en-US" sz="1300" dirty="0"/>
+            <a:endParaRPr lang="en-US" sz="1300"/>
           </a:p>
         </p:txBody>
       </p:sp>
@@ -4111,11 +4037,11 @@
           <a:bodyPr wrap="square" rtlCol="0" anchor="ctr"/>
           <a:lstStyle/>
           <a:p>
-            <a:pPr indent="0" marL="0">
-              <a:buNone/>
-            </a:pPr>
-            <a:r>
-              <a:rPr lang="en-US" sz="1100" dirty="0">
+            <a:pPr marL="0" indent="0">
+              <a:buNone/>
+            </a:pPr>
+            <a:r>
+              <a:rPr lang="en-US" sz="1100">
                 <a:solidFill>
                   <a:srgbClr val="546E7A"/>
                 </a:solidFill>
@@ -4125,7 +4051,7 @@
               </a:rPr>
               <a:t>→  13 components needed</a:t>
             </a:r>
-            <a:endParaRPr lang="en-US" sz="1100" dirty="0"/>
+            <a:endParaRPr lang="en-US" sz="1100"/>
           </a:p>
         </p:txBody>
       </p:sp>
@@ -4153,7 +4079,7 @@
             <a:prstDash val="solid"/>
           </a:ln>
           <a:effectLst>
-            <a:outerShdw sx="100000" sy="100000" kx="0" ky="0" algn="bl" rotWithShape="0" blurRad="101600" dist="38100" dir="8100000">
+            <a:outerShdw blurRad="101600" dist="38100" dir="8100000" algn="bl" rotWithShape="0">
               <a:srgbClr val="000000">
                 <a:alpha val="12000"/>
               </a:srgbClr>
@@ -4207,11 +4133,11 @@
           <a:bodyPr wrap="square" rtlCol="0" anchor="ctr"/>
           <a:lstStyle/>
           <a:p>
-            <a:pPr indent="0" marL="0">
-              <a:buNone/>
-            </a:pPr>
-            <a:r>
-              <a:rPr lang="en-US" sz="1300" b="1" dirty="0">
+            <a:pPr marL="0" indent="0">
+              <a:buNone/>
+            </a:pPr>
+            <a:r>
+              <a:rPr lang="en-US" sz="1300" b="1">
                 <a:solidFill>
                   <a:srgbClr val="0D2137"/>
                 </a:solidFill>
@@ -4221,7 +4147,7 @@
               </a:rPr>
               <a:t>95% variance</a:t>
             </a:r>
-            <a:endParaRPr lang="en-US" sz="1300" dirty="0"/>
+            <a:endParaRPr lang="en-US" sz="1300"/>
           </a:p>
         </p:txBody>
       </p:sp>
@@ -4246,11 +4172,11 @@
           <a:bodyPr wrap="square" rtlCol="0" anchor="ctr"/>
           <a:lstStyle/>
           <a:p>
-            <a:pPr indent="0" marL="0">
-              <a:buNone/>
-            </a:pPr>
-            <a:r>
-              <a:rPr lang="en-US" sz="1100" dirty="0">
+            <a:pPr marL="0" indent="0">
+              <a:buNone/>
+            </a:pPr>
+            <a:r>
+              <a:rPr lang="en-US" sz="1100">
                 <a:solidFill>
                   <a:srgbClr val="546E7A"/>
                 </a:solidFill>
@@ -4260,7 +4186,7 @@
               </a:rPr>
               <a:t>→  15 components needed</a:t>
             </a:r>
-            <a:endParaRPr lang="en-US" sz="1100" dirty="0"/>
+            <a:endParaRPr lang="en-US" sz="1100"/>
           </a:p>
         </p:txBody>
       </p:sp>
@@ -4288,7 +4214,7 @@
             <a:prstDash val="solid"/>
           </a:ln>
           <a:effectLst>
-            <a:outerShdw sx="100000" sy="100000" kx="0" ky="0" algn="bl" rotWithShape="0" blurRad="101600" dist="38100" dir="8100000">
+            <a:outerShdw blurRad="101600" dist="38100" dir="8100000" algn="bl" rotWithShape="0">
               <a:srgbClr val="000000">
                 <a:alpha val="12000"/>
               </a:srgbClr>
@@ -4342,11 +4268,11 @@
           <a:bodyPr wrap="square" rtlCol="0" anchor="ctr"/>
           <a:lstStyle/>
           <a:p>
-            <a:pPr indent="0" marL="0">
-              <a:buNone/>
-            </a:pPr>
-            <a:r>
-              <a:rPr lang="en-US" sz="1300" b="1" dirty="0">
+            <a:pPr marL="0" indent="0">
+              <a:buNone/>
+            </a:pPr>
+            <a:r>
+              <a:rPr lang="en-US" sz="1300" b="1">
                 <a:solidFill>
                   <a:srgbClr val="0D2137"/>
                 </a:solidFill>
@@ -4356,7 +4282,7 @@
               </a:rPr>
               <a:t>99% variance</a:t>
             </a:r>
-            <a:endParaRPr lang="en-US" sz="1300" dirty="0"/>
+            <a:endParaRPr lang="en-US" sz="1300"/>
           </a:p>
         </p:txBody>
       </p:sp>
@@ -4381,11 +4307,11 @@
           <a:bodyPr wrap="square" rtlCol="0" anchor="ctr"/>
           <a:lstStyle/>
           <a:p>
-            <a:pPr indent="0" marL="0">
-              <a:buNone/>
-            </a:pPr>
-            <a:r>
-              <a:rPr lang="en-US" sz="1100" dirty="0">
+            <a:pPr marL="0" indent="0">
+              <a:buNone/>
+            </a:pPr>
+            <a:r>
+              <a:rPr lang="en-US" sz="1100">
                 <a:solidFill>
                   <a:srgbClr val="546E7A"/>
                 </a:solidFill>
@@ -4395,7 +4321,7 @@
               </a:rPr>
               <a:t>→  19 components needed</a:t>
             </a:r>
-            <a:endParaRPr lang="en-US" sz="1100" dirty="0"/>
+            <a:endParaRPr lang="en-US" sz="1100"/>
           </a:p>
         </p:txBody>
       </p:sp>
@@ -4420,11 +4346,11 @@
           <a:bodyPr wrap="square" rtlCol="0" anchor="ctr"/>
           <a:lstStyle/>
           <a:p>
-            <a:pPr indent="0" marL="0">
-              <a:buNone/>
-            </a:pPr>
-            <a:r>
-              <a:rPr lang="en-US" sz="1200" b="1" dirty="0">
+            <a:pPr marL="0" indent="0">
+              <a:buNone/>
+            </a:pPr>
+            <a:r>
+              <a:rPr lang="en-US" sz="1200" b="1">
                 <a:solidFill>
                   <a:srgbClr val="0D2137"/>
                 </a:solidFill>
@@ -4434,7 +4360,7 @@
               </a:rPr>
               <a:t>What this tells us:</a:t>
             </a:r>
-            <a:endParaRPr lang="en-US" sz="1200" dirty="0"/>
+            <a:endParaRPr lang="en-US" sz="1200"/>
           </a:p>
         </p:txBody>
       </p:sp>
@@ -4459,11 +4385,11 @@
           <a:bodyPr wrap="square" rtlCol="0" anchor="ctr"/>
           <a:lstStyle/>
           <a:p>
-            <a:pPr indent="0" marL="0">
-              <a:buNone/>
-            </a:pPr>
-            <a:r>
-              <a:rPr lang="en-US" sz="1050" dirty="0">
+            <a:pPr marL="0" indent="0">
+              <a:buNone/>
+            </a:pPr>
+            <a:r>
+              <a:rPr lang="en-US" sz="1050">
                 <a:solidFill>
                   <a:srgbClr val="1A2B3C"/>
                 </a:solidFill>
@@ -4471,53 +4397,11 @@
                 <a:ea typeface="Calibri" pitchFamily="34" charset="-122"/>
                 <a:cs typeface="Calibri" pitchFamily="34" charset="-120"/>
               </a:rPr>
-              <a:t>• </a:t>
-            </a:r>
-            <a:pPr indent="0" marL="0">
-              <a:buNone/>
-            </a:pPr>
-            <a:r>
-              <a:rPr lang="en-US" sz="1050" dirty="0">
-                <a:solidFill>
-                  <a:srgbClr val="1A2B3C"/>
-                </a:solidFill>
-                <a:latin typeface="Calibri" pitchFamily="34" charset="0"/>
-                <a:ea typeface="Calibri" pitchFamily="34" charset="-122"/>
-                <a:cs typeface="Calibri" pitchFamily="34" charset="-120"/>
-              </a:rPr>
-              <a:t>Dataset has moderate correlations — not strongly reducible
-</a:t>
-            </a:r>
-            <a:pPr indent="0" marL="0">
-              <a:buNone/>
-            </a:pPr>
-            <a:r>
-              <a:rPr lang="en-US" sz="1050" dirty="0">
-                <a:solidFill>
-                  <a:srgbClr val="1A2B3C"/>
-                </a:solidFill>
-                <a:latin typeface="Calibri" pitchFamily="34" charset="0"/>
-                <a:ea typeface="Calibri" pitchFamily="34" charset="-122"/>
-                <a:cs typeface="Calibri" pitchFamily="34" charset="-120"/>
-              </a:rPr>
-              <a:t>• Classes overlap in 2D PCA space — confirms non-linear boundaries
-</a:t>
-            </a:r>
-            <a:pPr indent="0" marL="0">
-              <a:buNone/>
-            </a:pPr>
-            <a:r>
-              <a:rPr lang="en-US" sz="1050" dirty="0">
-                <a:solidFill>
-                  <a:srgbClr val="1A2B3C"/>
-                </a:solidFill>
-                <a:latin typeface="Calibri" pitchFamily="34" charset="0"/>
-                <a:ea typeface="Calibri" pitchFamily="34" charset="-122"/>
-                <a:cs typeface="Calibri" pitchFamily="34" charset="-120"/>
-              </a:rPr>
-              <a:t>• Explains why Decision Tree outperforms Logistic Regression</a:t>
-            </a:r>
-            <a:endParaRPr lang="en-US" sz="1050" dirty="0"/>
+              <a:t>• Dataset has moderate correlations — not strongly reducible
+• Classes overlap in 2D PCA space — confirms non-linear boundaries
+• Explains why Decision Tree outperforms Logistic Regression</a:t>
+            </a:r>
+            <a:endParaRPr lang="en-US" sz="1050"/>
           </a:p>
         </p:txBody>
       </p:sp>
@@ -4537,6 +4421,7 @@
         <a:solidFill>
           <a:srgbClr val="0D2137"/>
         </a:solidFill>
+        <a:effectLst/>
       </p:bgPr>
     </p:bg>
     <p:spTree>
@@ -4574,11 +4459,11 @@
           <a:bodyPr wrap="square" rtlCol="0" anchor="ctr"/>
           <a:lstStyle/>
           <a:p>
-            <a:pPr indent="0" marL="0">
-              <a:buNone/>
-            </a:pPr>
-            <a:r>
-              <a:rPr lang="en-US" sz="3000" b="1" dirty="0">
+            <a:pPr marL="0" indent="0">
+              <a:buNone/>
+            </a:pPr>
+            <a:r>
+              <a:rPr lang="en-US" sz="3000" b="1">
                 <a:solidFill>
                   <a:srgbClr val="FFFFFF"/>
                 </a:solidFill>
@@ -4588,7 +4473,7 @@
               </a:rPr>
               <a:t>Critical Analysis &amp; Lessons</a:t>
             </a:r>
-            <a:endParaRPr lang="en-US" sz="3000" dirty="0"/>
+            <a:endParaRPr lang="en-US" sz="3000"/>
           </a:p>
         </p:txBody>
       </p:sp>
@@ -4641,7 +4526,7 @@
             <a:prstDash val="solid"/>
           </a:ln>
           <a:effectLst>
-            <a:outerShdw sx="100000" sy="100000" kx="0" ky="0" algn="bl" rotWithShape="0" blurRad="101600" dist="38100" dir="8100000">
+            <a:outerShdw blurRad="101600" dist="38100" dir="8100000" algn="bl" rotWithShape="0">
               <a:srgbClr val="000000">
                 <a:alpha val="12000"/>
               </a:srgbClr>
@@ -4695,11 +4580,11 @@
           <a:bodyPr wrap="square" rtlCol="0" anchor="ctr"/>
           <a:lstStyle/>
           <a:p>
-            <a:pPr algn="ctr" indent="0" marL="0">
-              <a:buNone/>
-            </a:pPr>
-            <a:r>
-              <a:rPr lang="en-US" sz="1100" b="1" dirty="0">
+            <a:pPr marL="0" indent="0" algn="ctr">
+              <a:buNone/>
+            </a:pPr>
+            <a:r>
+              <a:rPr lang="en-US" sz="1100" b="1">
                 <a:solidFill>
                   <a:srgbClr val="FFFFFF"/>
                 </a:solidFill>
@@ -4709,7 +4594,7 @@
               </a:rPr>
               <a:t>LR</a:t>
             </a:r>
-            <a:endParaRPr lang="en-US" sz="1100" dirty="0"/>
+            <a:endParaRPr lang="en-US" sz="1100"/>
           </a:p>
         </p:txBody>
       </p:sp>
@@ -4734,11 +4619,11 @@
           <a:bodyPr wrap="square" rtlCol="0" anchor="ctr"/>
           <a:lstStyle/>
           <a:p>
-            <a:pPr indent="0" marL="0">
-              <a:buNone/>
-            </a:pPr>
-            <a:r>
-              <a:rPr lang="en-US" sz="1300" b="1" dirty="0">
+            <a:pPr marL="0" indent="0">
+              <a:buNone/>
+            </a:pPr>
+            <a:r>
+              <a:rPr lang="en-US" sz="1300" b="1">
                 <a:solidFill>
                   <a:srgbClr val="1565C0"/>
                 </a:solidFill>
@@ -4748,7 +4633,7 @@
               </a:rPr>
               <a:t>Logistic Regression</a:t>
             </a:r>
-            <a:endParaRPr lang="en-US" sz="1300" dirty="0"/>
+            <a:endParaRPr lang="en-US" sz="1300"/>
           </a:p>
         </p:txBody>
       </p:sp>
@@ -4773,11 +4658,11 @@
           <a:bodyPr wrap="square" rtlCol="0" anchor="ctr"/>
           <a:lstStyle/>
           <a:p>
-            <a:pPr indent="0" marL="0">
-              <a:buNone/>
-            </a:pPr>
-            <a:r>
-              <a:rPr lang="en-US" sz="1100" b="1" dirty="0">
+            <a:pPr marL="0" indent="0">
+              <a:buNone/>
+            </a:pPr>
+            <a:r>
+              <a:rPr lang="en-US" sz="1100" b="1">
                 <a:solidFill>
                   <a:srgbClr val="FFFFFF"/>
                 </a:solidFill>
@@ -4787,7 +4672,7 @@
               </a:rPr>
               <a:t>Highest recall (0.62) — finds most defaulters</a:t>
             </a:r>
-            <a:endParaRPr lang="en-US" sz="1100" dirty="0"/>
+            <a:endParaRPr lang="en-US" sz="1100"/>
           </a:p>
         </p:txBody>
       </p:sp>
@@ -4812,11 +4697,11 @@
           <a:bodyPr wrap="square" rtlCol="0" anchor="ctr"/>
           <a:lstStyle/>
           <a:p>
-            <a:pPr indent="0" marL="0">
-              <a:buNone/>
-            </a:pPr>
-            <a:r>
-              <a:rPr lang="en-US" sz="1050" dirty="0">
+            <a:pPr marL="0" indent="0">
+              <a:buNone/>
+            </a:pPr>
+            <a:r>
+              <a:rPr lang="en-US" sz="1050">
                 <a:solidFill>
                   <a:srgbClr val="4FC3F7"/>
                 </a:solidFill>
@@ -4826,7 +4711,7 @@
               </a:rPr>
               <a:t>But very low precision (0.37) — flags too many non-defaulters. Class imbalance handling essential.</a:t>
             </a:r>
-            <a:endParaRPr lang="en-US" sz="1050" dirty="0"/>
+            <a:endParaRPr lang="en-US" sz="1050"/>
           </a:p>
         </p:txBody>
       </p:sp>
@@ -4854,7 +4739,7 @@
             <a:prstDash val="solid"/>
           </a:ln>
           <a:effectLst>
-            <a:outerShdw sx="100000" sy="100000" kx="0" ky="0" algn="bl" rotWithShape="0" blurRad="101600" dist="38100" dir="8100000">
+            <a:outerShdw blurRad="101600" dist="38100" dir="8100000" algn="bl" rotWithShape="0">
               <a:srgbClr val="000000">
                 <a:alpha val="12000"/>
               </a:srgbClr>
@@ -4908,11 +4793,11 @@
           <a:bodyPr wrap="square" rtlCol="0" anchor="ctr"/>
           <a:lstStyle/>
           <a:p>
-            <a:pPr algn="ctr" indent="0" marL="0">
-              <a:buNone/>
-            </a:pPr>
-            <a:r>
-              <a:rPr lang="en-US" sz="1100" b="1" dirty="0">
+            <a:pPr marL="0" indent="0" algn="ctr">
+              <a:buNone/>
+            </a:pPr>
+            <a:r>
+              <a:rPr lang="en-US" sz="1100" b="1">
                 <a:solidFill>
                   <a:srgbClr val="FFFFFF"/>
                 </a:solidFill>
@@ -4922,7 +4807,7 @@
               </a:rPr>
               <a:t>NB</a:t>
             </a:r>
-            <a:endParaRPr lang="en-US" sz="1100" dirty="0"/>
+            <a:endParaRPr lang="en-US" sz="1100"/>
           </a:p>
         </p:txBody>
       </p:sp>
@@ -4947,11 +4832,11 @@
           <a:bodyPr wrap="square" rtlCol="0" anchor="ctr"/>
           <a:lstStyle/>
           <a:p>
-            <a:pPr indent="0" marL="0">
-              <a:buNone/>
-            </a:pPr>
-            <a:r>
-              <a:rPr lang="en-US" sz="1300" b="1" dirty="0">
+            <a:pPr marL="0" indent="0">
+              <a:buNone/>
+            </a:pPr>
+            <a:r>
+              <a:rPr lang="en-US" sz="1300" b="1">
                 <a:solidFill>
                   <a:srgbClr val="9C27B0"/>
                 </a:solidFill>
@@ -4961,7 +4846,7 @@
               </a:rPr>
               <a:t>Gaussian Naive Bayes</a:t>
             </a:r>
-            <a:endParaRPr lang="en-US" sz="1300" dirty="0"/>
+            <a:endParaRPr lang="en-US" sz="1300"/>
           </a:p>
         </p:txBody>
       </p:sp>
@@ -4986,11 +4871,11 @@
           <a:bodyPr wrap="square" rtlCol="0" anchor="ctr"/>
           <a:lstStyle/>
           <a:p>
-            <a:pPr indent="0" marL="0">
-              <a:buNone/>
-            </a:pPr>
-            <a:r>
-              <a:rPr lang="en-US" sz="1100" b="1" dirty="0">
+            <a:pPr marL="0" indent="0">
+              <a:buNone/>
+            </a:pPr>
+            <a:r>
+              <a:rPr lang="en-US" sz="1100" b="1">
                 <a:solidFill>
                   <a:srgbClr val="FFFFFF"/>
                 </a:solidFill>
@@ -5000,7 +4885,7 @@
               </a:rPr>
               <a:t>Moderate all-round but worst accuracy (0.75)</a:t>
             </a:r>
-            <a:endParaRPr lang="en-US" sz="1100" dirty="0"/>
+            <a:endParaRPr lang="en-US" sz="1100"/>
           </a:p>
         </p:txBody>
       </p:sp>
@@ -5025,11 +4910,11 @@
           <a:bodyPr wrap="square" rtlCol="0" anchor="ctr"/>
           <a:lstStyle/>
           <a:p>
-            <a:pPr indent="0" marL="0">
-              <a:buNone/>
-            </a:pPr>
-            <a:r>
-              <a:rPr lang="en-US" sz="1050" dirty="0">
+            <a:pPr marL="0" indent="0">
+              <a:buNone/>
+            </a:pPr>
+            <a:r>
+              <a:rPr lang="en-US" sz="1050">
                 <a:solidFill>
                   <a:srgbClr val="4FC3F7"/>
                 </a:solidFill>
@@ -5039,7 +4924,7 @@
               </a:rPr>
               <a:t>Feature independence assumption strongly violated — correlations in PAY_AMT columns hurt performance significantly.</a:t>
             </a:r>
-            <a:endParaRPr lang="en-US" sz="1050" dirty="0"/>
+            <a:endParaRPr lang="en-US" sz="1050"/>
           </a:p>
         </p:txBody>
       </p:sp>
@@ -5067,7 +4952,7 @@
             <a:prstDash val="solid"/>
           </a:ln>
           <a:effectLst>
-            <a:outerShdw sx="100000" sy="100000" kx="0" ky="0" algn="bl" rotWithShape="0" blurRad="101600" dist="38100" dir="8100000">
+            <a:outerShdw blurRad="101600" dist="38100" dir="8100000" algn="bl" rotWithShape="0">
               <a:srgbClr val="000000">
                 <a:alpha val="12000"/>
               </a:srgbClr>
@@ -5121,11 +5006,11 @@
           <a:bodyPr wrap="square" rtlCol="0" anchor="ctr"/>
           <a:lstStyle/>
           <a:p>
-            <a:pPr algn="ctr" indent="0" marL="0">
-              <a:buNone/>
-            </a:pPr>
-            <a:r>
-              <a:rPr lang="en-US" sz="1100" b="1" dirty="0">
+            <a:pPr marL="0" indent="0" algn="ctr">
+              <a:buNone/>
+            </a:pPr>
+            <a:r>
+              <a:rPr lang="en-US" sz="1100" b="1">
                 <a:solidFill>
                   <a:srgbClr val="FFFFFF"/>
                 </a:solidFill>
@@ -5135,7 +5020,7 @@
               </a:rPr>
               <a:t>DT</a:t>
             </a:r>
-            <a:endParaRPr lang="en-US" sz="1100" dirty="0"/>
+            <a:endParaRPr lang="en-US" sz="1100"/>
           </a:p>
         </p:txBody>
       </p:sp>
@@ -5160,11 +5045,11 @@
           <a:bodyPr wrap="square" rtlCol="0" anchor="ctr"/>
           <a:lstStyle/>
           <a:p>
-            <a:pPr indent="0" marL="0">
-              <a:buNone/>
-            </a:pPr>
-            <a:r>
-              <a:rPr lang="en-US" sz="1300" b="1" dirty="0">
+            <a:pPr marL="0" indent="0">
+              <a:buNone/>
+            </a:pPr>
+            <a:r>
+              <a:rPr lang="en-US" sz="1300" b="1">
                 <a:solidFill>
                   <a:srgbClr val="00C853"/>
                 </a:solidFill>
@@ -5174,7 +5059,7 @@
               </a:rPr>
               <a:t>Decision Tree (Winner)</a:t>
             </a:r>
-            <a:endParaRPr lang="en-US" sz="1300" dirty="0"/>
+            <a:endParaRPr lang="en-US" sz="1300"/>
           </a:p>
         </p:txBody>
       </p:sp>
@@ -5199,11 +5084,11 @@
           <a:bodyPr wrap="square" rtlCol="0" anchor="ctr"/>
           <a:lstStyle/>
           <a:p>
-            <a:pPr indent="0" marL="0">
-              <a:buNone/>
-            </a:pPr>
-            <a:r>
-              <a:rPr lang="en-US" sz="1100" b="1" dirty="0">
+            <a:pPr marL="0" indent="0">
+              <a:buNone/>
+            </a:pPr>
+            <a:r>
+              <a:rPr lang="en-US" sz="1100" b="1">
                 <a:solidFill>
                   <a:srgbClr val="FFFFFF"/>
                 </a:solidFill>
@@ -5213,7 +5098,7 @@
               </a:rPr>
               <a:t>Best F1 (0.52), best AUC (0.76), most stable CV</a:t>
             </a:r>
-            <a:endParaRPr lang="en-US" sz="1100" dirty="0"/>
+            <a:endParaRPr lang="en-US" sz="1100"/>
           </a:p>
         </p:txBody>
       </p:sp>
@@ -5238,11 +5123,11 @@
           <a:bodyPr wrap="square" rtlCol="0" anchor="ctr"/>
           <a:lstStyle/>
           <a:p>
-            <a:pPr indent="0" marL="0">
-              <a:buNone/>
-            </a:pPr>
-            <a:r>
-              <a:rPr lang="en-US" sz="1050" dirty="0">
+            <a:pPr marL="0" indent="0">
+              <a:buNone/>
+            </a:pPr>
+            <a:r>
+              <a:rPr lang="en-US" sz="1050">
                 <a:solidFill>
                   <a:srgbClr val="4FC3F7"/>
                 </a:solidFill>
@@ -5252,7 +5137,7 @@
               </a:rPr>
               <a:t>Non-linearity captured well. Gini impurity reveals PAY_0 dominance. Controlled depth prevents overfitting.</a:t>
             </a:r>
-            <a:endParaRPr lang="en-US" sz="1050" dirty="0"/>
+            <a:endParaRPr lang="en-US" sz="1050"/>
           </a:p>
         </p:txBody>
       </p:sp>
@@ -5280,7 +5165,7 @@
             <a:prstDash val="solid"/>
           </a:ln>
           <a:effectLst>
-            <a:outerShdw sx="100000" sy="100000" kx="0" ky="0" algn="bl" rotWithShape="0" blurRad="101600" dist="38100" dir="8100000">
+            <a:outerShdw blurRad="101600" dist="38100" dir="8100000" algn="bl" rotWithShape="0">
               <a:srgbClr val="000000">
                 <a:alpha val="12000"/>
               </a:srgbClr>
@@ -5334,11 +5219,11 @@
           <a:bodyPr wrap="square" rtlCol="0" anchor="ctr"/>
           <a:lstStyle/>
           <a:p>
-            <a:pPr algn="ctr" indent="0" marL="0">
-              <a:buNone/>
-            </a:pPr>
-            <a:r>
-              <a:rPr lang="en-US" sz="1100" b="1" dirty="0">
+            <a:pPr marL="0" indent="0" algn="ctr">
+              <a:buNone/>
+            </a:pPr>
+            <a:r>
+              <a:rPr lang="en-US" sz="1100" b="1">
                 <a:solidFill>
                   <a:srgbClr val="FFFFFF"/>
                 </a:solidFill>
@@ -5348,7 +5233,7 @@
               </a:rPr>
               <a:t>★</a:t>
             </a:r>
-            <a:endParaRPr lang="en-US" sz="1100" dirty="0"/>
+            <a:endParaRPr lang="en-US" sz="1100"/>
           </a:p>
         </p:txBody>
       </p:sp>
@@ -5373,11 +5258,11 @@
           <a:bodyPr wrap="square" rtlCol="0" anchor="ctr"/>
           <a:lstStyle/>
           <a:p>
-            <a:pPr indent="0" marL="0">
-              <a:buNone/>
-            </a:pPr>
-            <a:r>
-              <a:rPr lang="en-US" sz="1300" b="1" dirty="0">
+            <a:pPr marL="0" indent="0">
+              <a:buNone/>
+            </a:pPr>
+            <a:r>
+              <a:rPr lang="en-US" sz="1300" b="1">
                 <a:solidFill>
                   <a:srgbClr val="FFB300"/>
                 </a:solidFill>
@@ -5387,7 +5272,7 @@
               </a:rPr>
               <a:t>Overall Project Lesson</a:t>
             </a:r>
-            <a:endParaRPr lang="en-US" sz="1300" dirty="0"/>
+            <a:endParaRPr lang="en-US" sz="1300"/>
           </a:p>
         </p:txBody>
       </p:sp>
@@ -5412,11 +5297,11 @@
           <a:bodyPr wrap="square" rtlCol="0" anchor="ctr"/>
           <a:lstStyle/>
           <a:p>
-            <a:pPr indent="0" marL="0">
-              <a:buNone/>
-            </a:pPr>
-            <a:r>
-              <a:rPr lang="en-US" sz="1100" b="1" dirty="0">
+            <a:pPr marL="0" indent="0">
+              <a:buNone/>
+            </a:pPr>
+            <a:r>
+              <a:rPr lang="en-US" sz="1100" b="1">
                 <a:solidFill>
                   <a:srgbClr val="FFFFFF"/>
                 </a:solidFill>
@@ -5426,7 +5311,7 @@
               </a:rPr>
               <a:t>Recent behavior &gt; demographics &gt; historical averages</a:t>
             </a:r>
-            <a:endParaRPr lang="en-US" sz="1100" dirty="0"/>
+            <a:endParaRPr lang="en-US" sz="1100"/>
           </a:p>
         </p:txBody>
       </p:sp>
@@ -5451,11 +5336,11 @@
           <a:bodyPr wrap="square" rtlCol="0" anchor="ctr"/>
           <a:lstStyle/>
           <a:p>
-            <a:pPr indent="0" marL="0">
-              <a:buNone/>
-            </a:pPr>
-            <a:r>
-              <a:rPr lang="en-US" sz="1050" dirty="0">
+            <a:pPr marL="0" indent="0">
+              <a:buNone/>
+            </a:pPr>
+            <a:r>
+              <a:rPr lang="en-US" sz="1050">
                 <a:solidFill>
                   <a:srgbClr val="4FC3F7"/>
                 </a:solidFill>
@@ -5465,7 +5350,7 @@
               </a:rPr>
               <a:t>PAY_0 alone contributes 74.6% of split importance. Banks should weight current-month payment status highest.</a:t>
             </a:r>
-            <a:endParaRPr lang="en-US" sz="1050" dirty="0"/>
+            <a:endParaRPr lang="en-US" sz="1050"/>
           </a:p>
         </p:txBody>
       </p:sp>
@@ -5485,6 +5370,7 @@
         <a:solidFill>
           <a:srgbClr val="F0F6FC"/>
         </a:solidFill>
+        <a:effectLst/>
       </p:bgPr>
     </p:bg>
     <p:spTree>
@@ -5547,11 +5433,11 @@
           <a:bodyPr wrap="square" rtlCol="0" anchor="ctr"/>
           <a:lstStyle/>
           <a:p>
-            <a:pPr indent="0" marL="0">
-              <a:buNone/>
-            </a:pPr>
-            <a:r>
-              <a:rPr lang="en-US" sz="2600" b="1" dirty="0">
+            <a:pPr marL="0" indent="0">
+              <a:buNone/>
+            </a:pPr>
+            <a:r>
+              <a:rPr lang="en-US" sz="2600" b="1">
                 <a:solidFill>
                   <a:srgbClr val="FFFFFF"/>
                 </a:solidFill>
@@ -5561,7 +5447,7 @@
               </a:rPr>
               <a:t>How We Improved the Models</a:t>
             </a:r>
-            <a:endParaRPr lang="en-US" sz="2600" dirty="0"/>
+            <a:endParaRPr lang="en-US" sz="2600"/>
           </a:p>
         </p:txBody>
       </p:sp>
@@ -5589,7 +5475,7 @@
             <a:prstDash val="solid"/>
           </a:ln>
           <a:effectLst>
-            <a:outerShdw sx="100000" sy="100000" kx="0" ky="0" algn="bl" rotWithShape="0" blurRad="101600" dist="38100" dir="8100000">
+            <a:outerShdw blurRad="101600" dist="38100" dir="8100000" algn="bl" rotWithShape="0">
               <a:srgbClr val="000000">
                 <a:alpha val="12000"/>
               </a:srgbClr>
@@ -5643,11 +5529,11 @@
           <a:bodyPr wrap="square" rtlCol="0" anchor="ctr"/>
           <a:lstStyle/>
           <a:p>
-            <a:pPr algn="ctr" indent="0" marL="0">
-              <a:buNone/>
-            </a:pPr>
-            <a:r>
-              <a:rPr lang="en-US" sz="1100" b="1" dirty="0">
+            <a:pPr marL="0" indent="0" algn="ctr">
+              <a:buNone/>
+            </a:pPr>
+            <a:r>
+              <a:rPr lang="en-US" sz="1100" b="1">
                 <a:solidFill>
                   <a:srgbClr val="00B8D4"/>
                 </a:solidFill>
@@ -5657,7 +5543,7 @@
               </a:rPr>
               <a:t>Mar 24</a:t>
             </a:r>
-            <a:endParaRPr lang="en-US" sz="1100" dirty="0"/>
+            <a:endParaRPr lang="en-US" sz="1100"/>
           </a:p>
         </p:txBody>
       </p:sp>
@@ -5707,11 +5593,11 @@
           <a:bodyPr wrap="square" rtlCol="0" anchor="ctr"/>
           <a:lstStyle/>
           <a:p>
-            <a:pPr algn="ctr" indent="0" marL="0">
-              <a:buNone/>
-            </a:pPr>
-            <a:r>
-              <a:rPr lang="en-US" sz="900" b="1" spc="100" kern="0" dirty="0">
+            <a:pPr marL="0" indent="0" algn="ctr">
+              <a:buNone/>
+            </a:pPr>
+            <a:r>
+              <a:rPr lang="en-US" sz="900" b="1" kern="0" spc="100">
                 <a:solidFill>
                   <a:srgbClr val="FFFFFF"/>
                 </a:solidFill>
@@ -5721,7 +5607,7 @@
               </a:rPr>
               <a:t>DONE</a:t>
             </a:r>
-            <a:endParaRPr lang="en-US" sz="900" dirty="0"/>
+            <a:endParaRPr lang="en-US" sz="900"/>
           </a:p>
         </p:txBody>
       </p:sp>
@@ -5746,11 +5632,11 @@
           <a:bodyPr wrap="square" rtlCol="0" anchor="ctr"/>
           <a:lstStyle/>
           <a:p>
-            <a:pPr indent="0" marL="0">
-              <a:buNone/>
-            </a:pPr>
-            <a:r>
-              <a:rPr lang="en-US" sz="1300" b="1" dirty="0">
+            <a:pPr marL="0" indent="0">
+              <a:buNone/>
+            </a:pPr>
+            <a:r>
+              <a:rPr lang="en-US" sz="1300" b="1">
                 <a:solidFill>
                   <a:srgbClr val="0D2137"/>
                 </a:solidFill>
@@ -5760,7 +5646,7 @@
               </a:rPr>
               <a:t>Hyperparameter Tuning</a:t>
             </a:r>
-            <a:endParaRPr lang="en-US" sz="1300" dirty="0"/>
+            <a:endParaRPr lang="en-US" sz="1300"/>
           </a:p>
         </p:txBody>
       </p:sp>
@@ -5785,11 +5671,11 @@
           <a:bodyPr wrap="square" rtlCol="0" anchor="ctr"/>
           <a:lstStyle/>
           <a:p>
-            <a:pPr indent="0" marL="0">
-              <a:buNone/>
-            </a:pPr>
-            <a:r>
-              <a:rPr lang="en-US" sz="1050" dirty="0">
+            <a:pPr marL="0" indent="0">
+              <a:buNone/>
+            </a:pPr>
+            <a:r>
+              <a:rPr lang="en-US" sz="1050">
                 <a:solidFill>
                   <a:srgbClr val="546E7A"/>
                 </a:solidFill>
@@ -5799,7 +5685,7 @@
               </a:rPr>
               <a:t>GridSearchCV — varying C for LR, max_depth &amp; min_samples_leaf for DT</a:t>
             </a:r>
-            <a:endParaRPr lang="en-US" sz="1050" dirty="0"/>
+            <a:endParaRPr lang="en-US" sz="1050"/>
           </a:p>
         </p:txBody>
       </p:sp>
@@ -5827,7 +5713,7 @@
             <a:prstDash val="solid"/>
           </a:ln>
           <a:effectLst>
-            <a:outerShdw sx="100000" sy="100000" kx="0" ky="0" algn="bl" rotWithShape="0" blurRad="101600" dist="38100" dir="8100000">
+            <a:outerShdw blurRad="101600" dist="38100" dir="8100000" algn="bl" rotWithShape="0">
               <a:srgbClr val="000000">
                 <a:alpha val="12000"/>
               </a:srgbClr>
@@ -5881,11 +5767,11 @@
           <a:bodyPr wrap="square" rtlCol="0" anchor="ctr"/>
           <a:lstStyle/>
           <a:p>
-            <a:pPr algn="ctr" indent="0" marL="0">
-              <a:buNone/>
-            </a:pPr>
-            <a:r>
-              <a:rPr lang="en-US" sz="1100" b="1" dirty="0">
+            <a:pPr marL="0" indent="0" algn="ctr">
+              <a:buNone/>
+            </a:pPr>
+            <a:r>
+              <a:rPr lang="en-US" sz="1100" b="1">
                 <a:solidFill>
                   <a:srgbClr val="00B8D4"/>
                 </a:solidFill>
@@ -5895,7 +5781,7 @@
               </a:rPr>
               <a:t>Mar 31</a:t>
             </a:r>
-            <a:endParaRPr lang="en-US" sz="1100" dirty="0"/>
+            <a:endParaRPr lang="en-US" sz="1100"/>
           </a:p>
         </p:txBody>
       </p:sp>
@@ -5945,11 +5831,11 @@
           <a:bodyPr wrap="square" rtlCol="0" anchor="ctr"/>
           <a:lstStyle/>
           <a:p>
-            <a:pPr algn="ctr" indent="0" marL="0">
-              <a:buNone/>
-            </a:pPr>
-            <a:r>
-              <a:rPr lang="en-US" sz="900" b="1" spc="100" kern="0" dirty="0">
+            <a:pPr marL="0" indent="0" algn="ctr">
+              <a:buNone/>
+            </a:pPr>
+            <a:r>
+              <a:rPr lang="en-US" sz="900" b="1" kern="0" spc="100">
                 <a:solidFill>
                   <a:srgbClr val="FFFFFF"/>
                 </a:solidFill>
@@ -5959,7 +5845,7 @@
               </a:rPr>
               <a:t>DONE</a:t>
             </a:r>
-            <a:endParaRPr lang="en-US" sz="900" dirty="0"/>
+            <a:endParaRPr lang="en-US" sz="900"/>
           </a:p>
         </p:txBody>
       </p:sp>
@@ -5984,11 +5870,11 @@
           <a:bodyPr wrap="square" rtlCol="0" anchor="ctr"/>
           <a:lstStyle/>
           <a:p>
-            <a:pPr indent="0" marL="0">
-              <a:buNone/>
-            </a:pPr>
-            <a:r>
-              <a:rPr lang="en-US" sz="1300" b="1" dirty="0">
+            <a:pPr marL="0" indent="0">
+              <a:buNone/>
+            </a:pPr>
+            <a:r>
+              <a:rPr lang="en-US" sz="1300" b="1">
                 <a:solidFill>
                   <a:srgbClr val="0D2137"/>
                 </a:solidFill>
@@ -5998,7 +5884,7 @@
               </a:rPr>
               <a:t>SMOTE Resampling</a:t>
             </a:r>
-            <a:endParaRPr lang="en-US" sz="1300" dirty="0"/>
+            <a:endParaRPr lang="en-US" sz="1300"/>
           </a:p>
         </p:txBody>
       </p:sp>
@@ -6023,11 +5909,11 @@
           <a:bodyPr wrap="square" rtlCol="0" anchor="ctr"/>
           <a:lstStyle/>
           <a:p>
-            <a:pPr indent="0" marL="0">
-              <a:buNone/>
-            </a:pPr>
-            <a:r>
-              <a:rPr lang="en-US" sz="1050" dirty="0">
+            <a:pPr marL="0" indent="0">
+              <a:buNone/>
+            </a:pPr>
+            <a:r>
+              <a:rPr lang="en-US" sz="1050">
                 <a:solidFill>
                   <a:srgbClr val="546E7A"/>
                 </a:solidFill>
@@ -6037,7 +5923,7 @@
               </a:rPr>
               <a:t>imblearn SMOTE to synthesize minority class samples &amp; address 3.5:1 imbalance</a:t>
             </a:r>
-            <a:endParaRPr lang="en-US" sz="1050" dirty="0"/>
+            <a:endParaRPr lang="en-US" sz="1050"/>
           </a:p>
         </p:txBody>
       </p:sp>
@@ -6065,7 +5951,7 @@
             <a:prstDash val="solid"/>
           </a:ln>
           <a:effectLst>
-            <a:outerShdw sx="100000" sy="100000" kx="0" ky="0" algn="bl" rotWithShape="0" blurRad="101600" dist="38100" dir="8100000">
+            <a:outerShdw blurRad="101600" dist="38100" dir="8100000" algn="bl" rotWithShape="0">
               <a:srgbClr val="000000">
                 <a:alpha val="12000"/>
               </a:srgbClr>
@@ -6119,11 +6005,11 @@
           <a:bodyPr wrap="square" rtlCol="0" anchor="ctr"/>
           <a:lstStyle/>
           <a:p>
-            <a:pPr algn="ctr" indent="0" marL="0">
-              <a:buNone/>
-            </a:pPr>
-            <a:r>
-              <a:rPr lang="en-US" sz="1100" b="1" dirty="0">
+            <a:pPr marL="0" indent="0" algn="ctr">
+              <a:buNone/>
+            </a:pPr>
+            <a:r>
+              <a:rPr lang="en-US" sz="1100" b="1">
                 <a:solidFill>
                   <a:srgbClr val="00B8D4"/>
                 </a:solidFill>
@@ -6133,7 +6019,7 @@
               </a:rPr>
               <a:t>Apr 7</a:t>
             </a:r>
-            <a:endParaRPr lang="en-US" sz="1100" dirty="0"/>
+            <a:endParaRPr lang="en-US" sz="1100"/>
           </a:p>
         </p:txBody>
       </p:sp>
@@ -6183,11 +6069,11 @@
           <a:bodyPr wrap="square" rtlCol="0" anchor="ctr"/>
           <a:lstStyle/>
           <a:p>
-            <a:pPr algn="ctr" indent="0" marL="0">
-              <a:buNone/>
-            </a:pPr>
-            <a:r>
-              <a:rPr lang="en-US" sz="900" b="1" spc="100" kern="0" dirty="0">
+            <a:pPr marL="0" indent="0" algn="ctr">
+              <a:buNone/>
+            </a:pPr>
+            <a:r>
+              <a:rPr lang="en-US" sz="900" b="1" kern="0" spc="100">
                 <a:solidFill>
                   <a:srgbClr val="FFFFFF"/>
                 </a:solidFill>
@@ -6197,7 +6083,7 @@
               </a:rPr>
               <a:t>DONE</a:t>
             </a:r>
-            <a:endParaRPr lang="en-US" sz="900" dirty="0"/>
+            <a:endParaRPr lang="en-US" sz="900"/>
           </a:p>
         </p:txBody>
       </p:sp>
@@ -6222,11 +6108,11 @@
           <a:bodyPr wrap="square" rtlCol="0" anchor="ctr"/>
           <a:lstStyle/>
           <a:p>
-            <a:pPr indent="0" marL="0">
-              <a:buNone/>
-            </a:pPr>
-            <a:r>
-              <a:rPr lang="en-US" sz="1300" b="1" dirty="0">
+            <a:pPr marL="0" indent="0">
+              <a:buNone/>
+            </a:pPr>
+            <a:r>
+              <a:rPr lang="en-US" sz="1300" b="1">
                 <a:solidFill>
                   <a:srgbClr val="0D2137"/>
                 </a:solidFill>
@@ -6236,7 +6122,7 @@
               </a:rPr>
               <a:t>Feature Engineering</a:t>
             </a:r>
-            <a:endParaRPr lang="en-US" sz="1300" dirty="0"/>
+            <a:endParaRPr lang="en-US" sz="1300"/>
           </a:p>
         </p:txBody>
       </p:sp>
@@ -6261,11 +6147,11 @@
           <a:bodyPr wrap="square" rtlCol="0" anchor="ctr"/>
           <a:lstStyle/>
           <a:p>
-            <a:pPr indent="0" marL="0">
-              <a:buNone/>
-            </a:pPr>
-            <a:r>
-              <a:rPr lang="en-US" sz="1050" dirty="0">
+            <a:pPr marL="0" indent="0">
+              <a:buNone/>
+            </a:pPr>
+            <a:r>
+              <a:rPr lang="en-US" sz="1050">
                 <a:solidFill>
                   <a:srgbClr val="546E7A"/>
                 </a:solidFill>
@@ -6275,7 +6161,7 @@
               </a:rPr>
               <a:t>Payment utilization ratios (PAY_AMT / BILL_AMT) as new features + Random Forest tested</a:t>
             </a:r>
-            <a:endParaRPr lang="en-US" sz="1050" dirty="0"/>
+            <a:endParaRPr lang="en-US" sz="1050"/>
           </a:p>
         </p:txBody>
       </p:sp>
@@ -6303,7 +6189,7 @@
             <a:prstDash val="solid"/>
           </a:ln>
           <a:effectLst>
-            <a:outerShdw sx="100000" sy="100000" kx="0" ky="0" algn="bl" rotWithShape="0" blurRad="101600" dist="38100" dir="8100000">
+            <a:outerShdw blurRad="101600" dist="38100" dir="8100000" algn="bl" rotWithShape="0">
               <a:srgbClr val="000000">
                 <a:alpha val="12000"/>
               </a:srgbClr>
@@ -6357,11 +6243,11 @@
           <a:bodyPr wrap="square" rtlCol="0" anchor="ctr"/>
           <a:lstStyle/>
           <a:p>
-            <a:pPr algn="ctr" indent="0" marL="0">
-              <a:buNone/>
-            </a:pPr>
-            <a:r>
-              <a:rPr lang="en-US" sz="1100" b="1" dirty="0">
+            <a:pPr marL="0" indent="0" algn="ctr">
+              <a:buNone/>
+            </a:pPr>
+            <a:r>
+              <a:rPr lang="en-US" sz="1100" b="1">
                 <a:solidFill>
                   <a:srgbClr val="00B8D4"/>
                 </a:solidFill>
@@ -6371,7 +6257,7 @@
               </a:rPr>
               <a:t>Apr 14</a:t>
             </a:r>
-            <a:endParaRPr lang="en-US" sz="1100" dirty="0"/>
+            <a:endParaRPr lang="en-US" sz="1100"/>
           </a:p>
         </p:txBody>
       </p:sp>
@@ -6421,11 +6307,11 @@
           <a:bodyPr wrap="square" rtlCol="0" anchor="ctr"/>
           <a:lstStyle/>
           <a:p>
-            <a:pPr algn="ctr" indent="0" marL="0">
-              <a:buNone/>
-            </a:pPr>
-            <a:r>
-              <a:rPr lang="en-US" sz="900" b="1" spc="100" kern="0" dirty="0">
+            <a:pPr marL="0" indent="0" algn="ctr">
+              <a:buNone/>
+            </a:pPr>
+            <a:r>
+              <a:rPr lang="en-US" sz="900" b="1" kern="0" spc="100">
                 <a:solidFill>
                   <a:srgbClr val="FFFFFF"/>
                 </a:solidFill>
@@ -6435,7 +6321,7 @@
               </a:rPr>
               <a:t>FINAL</a:t>
             </a:r>
-            <a:endParaRPr lang="en-US" sz="900" dirty="0"/>
+            <a:endParaRPr lang="en-US" sz="900"/>
           </a:p>
         </p:txBody>
       </p:sp>
@@ -6460,11 +6346,11 @@
           <a:bodyPr wrap="square" rtlCol="0" anchor="ctr"/>
           <a:lstStyle/>
           <a:p>
-            <a:pPr indent="0" marL="0">
-              <a:buNone/>
-            </a:pPr>
-            <a:r>
-              <a:rPr lang="en-US" sz="1300" b="1" dirty="0">
+            <a:pPr marL="0" indent="0">
+              <a:buNone/>
+            </a:pPr>
+            <a:r>
+              <a:rPr lang="en-US" sz="1300" b="1">
                 <a:solidFill>
                   <a:srgbClr val="0D2137"/>
                 </a:solidFill>
@@ -6474,7 +6360,7 @@
               </a:rPr>
               <a:t>Final Model Selection</a:t>
             </a:r>
-            <a:endParaRPr lang="en-US" sz="1300" dirty="0"/>
+            <a:endParaRPr lang="en-US" sz="1300"/>
           </a:p>
         </p:txBody>
       </p:sp>
@@ -6499,11 +6385,11 @@
           <a:bodyPr wrap="square" rtlCol="0" anchor="ctr"/>
           <a:lstStyle/>
           <a:p>
-            <a:pPr indent="0" marL="0">
-              <a:buNone/>
-            </a:pPr>
-            <a:r>
-              <a:rPr lang="en-US" sz="1050" dirty="0">
+            <a:pPr marL="0" indent="0">
+              <a:buNone/>
+            </a:pPr>
+            <a:r>
+              <a:rPr lang="en-US" sz="1050">
                 <a:solidFill>
                   <a:srgbClr val="546E7A"/>
                 </a:solidFill>
@@ -6513,7 +6399,7 @@
               </a:rPr>
               <a:t>Complete pipeline comparison, final report, and this presentation</a:t>
             </a:r>
-            <a:endParaRPr lang="en-US" sz="1050" dirty="0"/>
+            <a:endParaRPr lang="en-US" sz="1050"/>
           </a:p>
         </p:txBody>
       </p:sp>
@@ -6533,6 +6419,7 @@
         <a:solidFill>
           <a:srgbClr val="0D2137"/>
         </a:solidFill>
+        <a:effectLst/>
       </p:bgPr>
     </p:bg>
     <p:spTree>
@@ -6595,11 +6482,11 @@
           <a:bodyPr wrap="square" rtlCol="0" anchor="ctr"/>
           <a:lstStyle/>
           <a:p>
-            <a:pPr indent="0" marL="0">
-              <a:buNone/>
-            </a:pPr>
-            <a:r>
-              <a:rPr lang="en-US" sz="1200" b="1" spc="600" kern="0" dirty="0">
+            <a:pPr marL="0" indent="0">
+              <a:buNone/>
+            </a:pPr>
+            <a:r>
+              <a:rPr lang="en-US" sz="1200" b="1" kern="0" spc="600">
                 <a:solidFill>
                   <a:srgbClr val="00B8D4"/>
                 </a:solidFill>
@@ -6609,7 +6496,7 @@
               </a:rPr>
               <a:t>CONCLUSIONS</a:t>
             </a:r>
-            <a:endParaRPr lang="en-US" sz="1200" dirty="0"/>
+            <a:endParaRPr lang="en-US" sz="1200"/>
           </a:p>
         </p:txBody>
       </p:sp>
@@ -6634,11 +6521,11 @@
           <a:bodyPr wrap="square" rtlCol="0" anchor="ctr"/>
           <a:lstStyle/>
           <a:p>
-            <a:pPr indent="0" marL="0">
-              <a:buNone/>
-            </a:pPr>
-            <a:r>
-              <a:rPr lang="en-US" sz="3600" b="1" dirty="0">
+            <a:pPr marL="0" indent="0">
+              <a:buNone/>
+            </a:pPr>
+            <a:r>
+              <a:rPr lang="en-US" sz="3600" b="1">
                 <a:solidFill>
                   <a:srgbClr val="FFFFFF"/>
                 </a:solidFill>
@@ -6648,7 +6535,7 @@
               </a:rPr>
               <a:t>Key Takeaways</a:t>
             </a:r>
-            <a:endParaRPr lang="en-US" sz="3600" dirty="0"/>
+            <a:endParaRPr lang="en-US" sz="3600"/>
           </a:p>
         </p:txBody>
       </p:sp>
@@ -6698,11 +6585,11 @@
           <a:bodyPr wrap="square" rtlCol="0" anchor="ctr"/>
           <a:lstStyle/>
           <a:p>
-            <a:pPr algn="ctr" indent="0" marL="0">
-              <a:buNone/>
-            </a:pPr>
-            <a:r>
-              <a:rPr lang="en-US" sz="1200" b="1" dirty="0">
+            <a:pPr marL="0" indent="0" algn="ctr">
+              <a:buNone/>
+            </a:pPr>
+            <a:r>
+              <a:rPr lang="en-US" sz="1200" b="1">
                 <a:solidFill>
                   <a:srgbClr val="0D2137"/>
                 </a:solidFill>
@@ -6712,7 +6599,7 @@
               </a:rPr>
               <a:t>01</a:t>
             </a:r>
-            <a:endParaRPr lang="en-US" sz="1200" dirty="0"/>
+            <a:endParaRPr lang="en-US" sz="1200"/>
           </a:p>
         </p:txBody>
       </p:sp>
@@ -6737,11 +6624,11 @@
           <a:bodyPr wrap="square" rtlCol="0" anchor="ctr"/>
           <a:lstStyle/>
           <a:p>
-            <a:pPr indent="0" marL="0">
-              <a:buNone/>
-            </a:pPr>
-            <a:r>
-              <a:rPr lang="en-US" sz="1250" dirty="0">
+            <a:pPr marL="0" indent="0">
+              <a:buNone/>
+            </a:pPr>
+            <a:r>
+              <a:rPr lang="en-US" sz="1250">
                 <a:solidFill>
                   <a:srgbClr val="FFFFFF"/>
                 </a:solidFill>
@@ -6751,7 +6638,7 @@
               </a:rPr>
               <a:t>Decision Tree is the best model — highest F1 (0.52), ROC-AUC (0.76), and lowest CV variance (±0.007)</a:t>
             </a:r>
-            <a:endParaRPr lang="en-US" sz="1250" dirty="0"/>
+            <a:endParaRPr lang="en-US" sz="1250"/>
           </a:p>
         </p:txBody>
       </p:sp>
@@ -6801,11 +6688,11 @@
           <a:bodyPr wrap="square" rtlCol="0" anchor="ctr"/>
           <a:lstStyle/>
           <a:p>
-            <a:pPr algn="ctr" indent="0" marL="0">
-              <a:buNone/>
-            </a:pPr>
-            <a:r>
-              <a:rPr lang="en-US" sz="1200" b="1" dirty="0">
+            <a:pPr marL="0" indent="0" algn="ctr">
+              <a:buNone/>
+            </a:pPr>
+            <a:r>
+              <a:rPr lang="en-US" sz="1200" b="1">
                 <a:solidFill>
                   <a:srgbClr val="0D2137"/>
                 </a:solidFill>
@@ -6815,7 +6702,7 @@
               </a:rPr>
               <a:t>02</a:t>
             </a:r>
-            <a:endParaRPr lang="en-US" sz="1200" dirty="0"/>
+            <a:endParaRPr lang="en-US" sz="1200"/>
           </a:p>
         </p:txBody>
       </p:sp>
@@ -6840,11 +6727,11 @@
           <a:bodyPr wrap="square" rtlCol="0" anchor="ctr"/>
           <a:lstStyle/>
           <a:p>
-            <a:pPr indent="0" marL="0">
-              <a:buNone/>
-            </a:pPr>
-            <a:r>
-              <a:rPr lang="en-US" sz="1250" dirty="0">
+            <a:pPr marL="0" indent="0">
+              <a:buNone/>
+            </a:pPr>
+            <a:r>
+              <a:rPr lang="en-US" sz="1250">
                 <a:solidFill>
                   <a:srgbClr val="FFFFFF"/>
                 </a:solidFill>
@@ -6854,7 +6741,7 @@
               </a:rPr>
               <a:t>PAY_0 is overwhelmingly dominant at 74.6% Gini importance — recent payment behavior is the best predictor</a:t>
             </a:r>
-            <a:endParaRPr lang="en-US" sz="1250" dirty="0"/>
+            <a:endParaRPr lang="en-US" sz="1250"/>
           </a:p>
         </p:txBody>
       </p:sp>
@@ -6904,11 +6791,11 @@
           <a:bodyPr wrap="square" rtlCol="0" anchor="ctr"/>
           <a:lstStyle/>
           <a:p>
-            <a:pPr algn="ctr" indent="0" marL="0">
-              <a:buNone/>
-            </a:pPr>
-            <a:r>
-              <a:rPr lang="en-US" sz="1200" b="1" dirty="0">
+            <a:pPr marL="0" indent="0" algn="ctr">
+              <a:buNone/>
+            </a:pPr>
+            <a:r>
+              <a:rPr lang="en-US" sz="1200" b="1">
                 <a:solidFill>
                   <a:srgbClr val="0D2137"/>
                 </a:solidFill>
@@ -6918,7 +6805,7 @@
               </a:rPr>
               <a:t>03</a:t>
             </a:r>
-            <a:endParaRPr lang="en-US" sz="1200" dirty="0"/>
+            <a:endParaRPr lang="en-US" sz="1200"/>
           </a:p>
         </p:txBody>
       </p:sp>
@@ -6943,11 +6830,11 @@
           <a:bodyPr wrap="square" rtlCol="0" anchor="ctr"/>
           <a:lstStyle/>
           <a:p>
-            <a:pPr indent="0" marL="0">
-              <a:buNone/>
-            </a:pPr>
-            <a:r>
-              <a:rPr lang="en-US" sz="1250" dirty="0">
+            <a:pPr marL="0" indent="0">
+              <a:buNone/>
+            </a:pPr>
+            <a:r>
+              <a:rPr lang="en-US" sz="1250">
                 <a:solidFill>
                   <a:srgbClr val="FFFFFF"/>
                 </a:solidFill>
@@ -6957,7 +6844,7 @@
               </a:rPr>
               <a:t>Linear models fail when classes aren't separable — PCA &amp; DT results both confirm non-linear boundaries</a:t>
             </a:r>
-            <a:endParaRPr lang="en-US" sz="1250" dirty="0"/>
+            <a:endParaRPr lang="en-US" sz="1250"/>
           </a:p>
         </p:txBody>
       </p:sp>
@@ -7007,11 +6894,11 @@
           <a:bodyPr wrap="square" rtlCol="0" anchor="ctr"/>
           <a:lstStyle/>
           <a:p>
-            <a:pPr algn="ctr" indent="0" marL="0">
-              <a:buNone/>
-            </a:pPr>
-            <a:r>
-              <a:rPr lang="en-US" sz="1200" b="1" dirty="0">
+            <a:pPr marL="0" indent="0" algn="ctr">
+              <a:buNone/>
+            </a:pPr>
+            <a:r>
+              <a:rPr lang="en-US" sz="1200" b="1">
                 <a:solidFill>
                   <a:srgbClr val="0D2137"/>
                 </a:solidFill>
@@ -7021,7 +6908,7 @@
               </a:rPr>
               <a:t>04</a:t>
             </a:r>
-            <a:endParaRPr lang="en-US" sz="1200" dirty="0"/>
+            <a:endParaRPr lang="en-US" sz="1200"/>
           </a:p>
         </p:txBody>
       </p:sp>
@@ -7046,11 +6933,11 @@
           <a:bodyPr wrap="square" rtlCol="0" anchor="ctr"/>
           <a:lstStyle/>
           <a:p>
-            <a:pPr indent="0" marL="0">
-              <a:buNone/>
-            </a:pPr>
-            <a:r>
-              <a:rPr lang="en-US" sz="1250" dirty="0">
+            <a:pPr marL="0" indent="0">
+              <a:buNone/>
+            </a:pPr>
+            <a:r>
+              <a:rPr lang="en-US" sz="1250">
                 <a:solidFill>
                   <a:srgbClr val="FFFFFF"/>
                 </a:solidFill>
@@ -7060,7 +6947,7 @@
               </a:rPr>
               <a:t>Class imbalance must be handled — balanced weighting was critical; SMOTE tested in final stage</a:t>
             </a:r>
-            <a:endParaRPr lang="en-US" sz="1250" dirty="0"/>
+            <a:endParaRPr lang="en-US" sz="1250"/>
           </a:p>
         </p:txBody>
       </p:sp>
@@ -7110,11 +6997,11 @@
           <a:bodyPr wrap="square" rtlCol="0" anchor="ctr"/>
           <a:lstStyle/>
           <a:p>
-            <a:pPr algn="ctr" indent="0" marL="0">
-              <a:buNone/>
-            </a:pPr>
-            <a:r>
-              <a:rPr lang="en-US" sz="1200" b="1" dirty="0">
+            <a:pPr marL="0" indent="0" algn="ctr">
+              <a:buNone/>
+            </a:pPr>
+            <a:r>
+              <a:rPr lang="en-US" sz="1200" b="1">
                 <a:solidFill>
                   <a:srgbClr val="0D2137"/>
                 </a:solidFill>
@@ -7124,7 +7011,7 @@
               </a:rPr>
               <a:t>05</a:t>
             </a:r>
-            <a:endParaRPr lang="en-US" sz="1200" dirty="0"/>
+            <a:endParaRPr lang="en-US" sz="1200"/>
           </a:p>
         </p:txBody>
       </p:sp>
@@ -7149,11 +7036,11 @@
           <a:bodyPr wrap="square" rtlCol="0" anchor="ctr"/>
           <a:lstStyle/>
           <a:p>
-            <a:pPr indent="0" marL="0">
-              <a:buNone/>
-            </a:pPr>
-            <a:r>
-              <a:rPr lang="en-US" sz="1250" dirty="0">
+            <a:pPr marL="0" indent="0">
+              <a:buNone/>
+            </a:pPr>
+            <a:r>
+              <a:rPr lang="en-US" sz="1250">
                 <a:solidFill>
                   <a:srgbClr val="FFFFFF"/>
                 </a:solidFill>
@@ -7163,7 +7050,7 @@
               </a:rPr>
               <a:t>Recall vs. Precision trade-off is domain-specific — for banks, missing a defaulter is riskier than a false flag</a:t>
             </a:r>
-            <a:endParaRPr lang="en-US" sz="1250" dirty="0"/>
+            <a:endParaRPr lang="en-US" sz="1250"/>
           </a:p>
         </p:txBody>
       </p:sp>
@@ -7208,6 +7095,7 @@
         <a:solidFill>
           <a:srgbClr val="0D2137"/>
         </a:solidFill>
+        <a:effectLst/>
       </p:bgPr>
     </p:bg>
     <p:spTree>
@@ -7270,11 +7158,11 @@
           <a:bodyPr wrap="square" rtlCol="0" anchor="ctr"/>
           <a:lstStyle/>
           <a:p>
-            <a:pPr algn="ctr" indent="0" marL="0">
-              <a:buNone/>
-            </a:pPr>
-            <a:r>
-              <a:rPr lang="en-US" sz="4800" b="1" dirty="0">
+            <a:pPr marL="0" indent="0" algn="ctr">
+              <a:buNone/>
+            </a:pPr>
+            <a:r>
+              <a:rPr lang="en-US" sz="4800" b="1">
                 <a:solidFill>
                   <a:srgbClr val="FFFFFF"/>
                 </a:solidFill>
@@ -7284,7 +7172,7 @@
               </a:rPr>
               <a:t>Thank You</a:t>
             </a:r>
-            <a:endParaRPr lang="en-US" sz="4800" dirty="0"/>
+            <a:endParaRPr lang="en-US" sz="4800"/>
           </a:p>
         </p:txBody>
       </p:sp>
@@ -7309,11 +7197,11 @@
           <a:bodyPr wrap="square" rtlCol="0" anchor="ctr"/>
           <a:lstStyle/>
           <a:p>
-            <a:pPr algn="ctr" indent="0" marL="0">
-              <a:buNone/>
-            </a:pPr>
-            <a:r>
-              <a:rPr lang="en-US" sz="2000" dirty="0">
+            <a:pPr marL="0" indent="0" algn="ctr">
+              <a:buNone/>
+            </a:pPr>
+            <a:r>
+              <a:rPr lang="en-US" sz="2000">
                 <a:solidFill>
                   <a:srgbClr val="00B8D4"/>
                 </a:solidFill>
@@ -7323,7 +7211,7 @@
               </a:rPr>
               <a:t>Questions &amp; Discussion</a:t>
             </a:r>
-            <a:endParaRPr lang="en-US" sz="2000" dirty="0"/>
+            <a:endParaRPr lang="en-US" sz="2000"/>
           </a:p>
         </p:txBody>
       </p:sp>
@@ -7373,11 +7261,11 @@
           <a:bodyPr wrap="square" rtlCol="0" anchor="ctr"/>
           <a:lstStyle/>
           <a:p>
-            <a:pPr algn="ctr" indent="0" marL="0">
-              <a:buNone/>
-            </a:pPr>
-            <a:r>
-              <a:rPr lang="en-US" sz="1200" dirty="0">
+            <a:pPr marL="0" indent="0" algn="ctr">
+              <a:buNone/>
+            </a:pPr>
+            <a:r>
+              <a:rPr lang="en-US" sz="1200">
                 <a:solidFill>
                   <a:srgbClr val="546E7A"/>
                 </a:solidFill>
@@ -7387,7 +7275,7 @@
               </a:rPr>
               <a:t>Group 3  |  BFOR 516  |  Spring 2026</a:t>
             </a:r>
-            <a:endParaRPr lang="en-US" sz="1200" dirty="0"/>
+            <a:endParaRPr lang="en-US" sz="1200"/>
           </a:p>
         </p:txBody>
       </p:sp>
@@ -7412,11 +7300,11 @@
           <a:bodyPr wrap="square" rtlCol="0" anchor="ctr"/>
           <a:lstStyle/>
           <a:p>
-            <a:pPr algn="ctr" indent="0" marL="0">
-              <a:buNone/>
-            </a:pPr>
-            <a:r>
-              <a:rPr lang="en-US" sz="1000" dirty="0">
+            <a:pPr marL="0" indent="0" algn="ctr">
+              <a:buNone/>
+            </a:pPr>
+            <a:r>
+              <a:rPr lang="en-US" sz="1000">
                 <a:solidFill>
                   <a:srgbClr val="2A4A6A"/>
                 </a:solidFill>
@@ -7426,7 +7314,7 @@
               </a:rPr>
               <a:t>Dataset: UCI Default of Credit Card Clients  |  Yeh &amp; Lien (2009)</a:t>
             </a:r>
-            <a:endParaRPr lang="en-US" sz="1000" dirty="0"/>
+            <a:endParaRPr lang="en-US" sz="1000"/>
           </a:p>
         </p:txBody>
       </p:sp>
@@ -7446,6 +7334,7 @@
         <a:solidFill>
           <a:srgbClr val="F0F6FC"/>
         </a:solidFill>
+        <a:effectLst/>
       </p:bgPr>
     </p:bg>
     <p:spTree>
@@ -7508,11 +7397,11 @@
           <a:bodyPr wrap="square" rtlCol="0" anchor="ctr"/>
           <a:lstStyle/>
           <a:p>
-            <a:pPr indent="0" marL="0">
-              <a:buNone/>
-            </a:pPr>
-            <a:r>
-              <a:rPr lang="en-US" sz="1100" b="1" spc="500" kern="0" dirty="0">
+            <a:pPr marL="0" indent="0">
+              <a:buNone/>
+            </a:pPr>
+            <a:r>
+              <a:rPr lang="en-US" sz="1100" b="1" kern="0" spc="500">
                 <a:solidFill>
                   <a:srgbClr val="00B8D4"/>
                 </a:solidFill>
@@ -7522,7 +7411,7 @@
               </a:rPr>
               <a:t>WHY THIS MATTERS</a:t>
             </a:r>
-            <a:endParaRPr lang="en-US" sz="1100" dirty="0"/>
+            <a:endParaRPr lang="en-US" sz="1100"/>
           </a:p>
         </p:txBody>
       </p:sp>
@@ -7547,11 +7436,11 @@
           <a:bodyPr wrap="square" rtlCol="0" anchor="ctr"/>
           <a:lstStyle/>
           <a:p>
-            <a:pPr algn="r" indent="0" marL="0">
-              <a:buNone/>
-            </a:pPr>
-            <a:r>
-              <a:rPr lang="en-US" sz="2800" b="1" dirty="0">
+            <a:pPr marL="0" indent="0" algn="r">
+              <a:buNone/>
+            </a:pPr>
+            <a:r>
+              <a:rPr lang="en-US" sz="2800" b="1">
                 <a:solidFill>
                   <a:srgbClr val="FFFFFF"/>
                 </a:solidFill>
@@ -7561,7 +7450,7 @@
               </a:rPr>
               <a:t>The Problem &amp; Stakes</a:t>
             </a:r>
-            <a:endParaRPr lang="en-US" sz="2800" dirty="0"/>
+            <a:endParaRPr lang="en-US" sz="2800"/>
           </a:p>
         </p:txBody>
       </p:sp>
@@ -7589,7 +7478,7 @@
             <a:prstDash val="solid"/>
           </a:ln>
           <a:effectLst>
-            <a:outerShdw sx="100000" sy="100000" kx="0" ky="0" algn="bl" rotWithShape="0" blurRad="101600" dist="38100" dir="8100000">
+            <a:outerShdw blurRad="101600" dist="38100" dir="8100000" algn="bl" rotWithShape="0">
               <a:srgbClr val="000000">
                 <a:alpha val="12000"/>
               </a:srgbClr>
@@ -7643,11 +7532,11 @@
           <a:bodyPr wrap="square" lIns="0" tIns="0" rIns="0" bIns="0" rtlCol="0" anchor="ctr"/>
           <a:lstStyle/>
           <a:p>
-            <a:pPr indent="0" marL="0">
-              <a:buNone/>
-            </a:pPr>
-            <a:r>
-              <a:rPr lang="en-US" sz="1400" b="1" dirty="0">
+            <a:pPr marL="0" indent="0">
+              <a:buNone/>
+            </a:pPr>
+            <a:r>
+              <a:rPr lang="en-US" sz="1400" b="1">
                 <a:solidFill>
                   <a:srgbClr val="0D2137"/>
                 </a:solidFill>
@@ -7657,7 +7546,7 @@
               </a:rPr>
               <a:t>Financial Risk</a:t>
             </a:r>
-            <a:endParaRPr lang="en-US" sz="1400" dirty="0"/>
+            <a:endParaRPr lang="en-US" sz="1400"/>
           </a:p>
         </p:txBody>
       </p:sp>
@@ -7682,11 +7571,11 @@
           <a:bodyPr wrap="square" lIns="0" tIns="0" rIns="0" bIns="0" rtlCol="0" anchor="ctr"/>
           <a:lstStyle/>
           <a:p>
-            <a:pPr indent="0" marL="0">
-              <a:buNone/>
-            </a:pPr>
-            <a:r>
-              <a:rPr lang="en-US" sz="1200" dirty="0">
+            <a:pPr marL="0" indent="0">
+              <a:buNone/>
+            </a:pPr>
+            <a:r>
+              <a:rPr lang="en-US" sz="1200">
                 <a:solidFill>
                   <a:srgbClr val="1A2B3C"/>
                 </a:solidFill>
@@ -7696,7 +7585,7 @@
               </a:rPr>
               <a:t>Credit defaults cost banks billions annually — predicting them early prevents major losses</a:t>
             </a:r>
-            <a:endParaRPr lang="en-US" sz="1200" dirty="0"/>
+            <a:endParaRPr lang="en-US" sz="1200"/>
           </a:p>
         </p:txBody>
       </p:sp>
@@ -7724,7 +7613,7 @@
             <a:prstDash val="solid"/>
           </a:ln>
           <a:effectLst>
-            <a:outerShdw sx="100000" sy="100000" kx="0" ky="0" algn="bl" rotWithShape="0" blurRad="101600" dist="38100" dir="8100000">
+            <a:outerShdw blurRad="101600" dist="38100" dir="8100000" algn="bl" rotWithShape="0">
               <a:srgbClr val="000000">
                 <a:alpha val="12000"/>
               </a:srgbClr>
@@ -7778,11 +7667,11 @@
           <a:bodyPr wrap="square" lIns="0" tIns="0" rIns="0" bIns="0" rtlCol="0" anchor="ctr"/>
           <a:lstStyle/>
           <a:p>
-            <a:pPr indent="0" marL="0">
-              <a:buNone/>
-            </a:pPr>
-            <a:r>
-              <a:rPr lang="en-US" sz="1400" b="1" dirty="0">
+            <a:pPr marL="0" indent="0">
+              <a:buNone/>
+            </a:pPr>
+            <a:r>
+              <a:rPr lang="en-US" sz="1400" b="1">
                 <a:solidFill>
                   <a:srgbClr val="0D2137"/>
                 </a:solidFill>
@@ -7792,7 +7681,7 @@
               </a:rPr>
               <a:t>Class Imbalance</a:t>
             </a:r>
-            <a:endParaRPr lang="en-US" sz="1400" dirty="0"/>
+            <a:endParaRPr lang="en-US" sz="1400"/>
           </a:p>
         </p:txBody>
       </p:sp>
@@ -7817,11 +7706,11 @@
           <a:bodyPr wrap="square" lIns="0" tIns="0" rIns="0" bIns="0" rtlCol="0" anchor="ctr"/>
           <a:lstStyle/>
           <a:p>
-            <a:pPr indent="0" marL="0">
-              <a:buNone/>
-            </a:pPr>
-            <a:r>
-              <a:rPr lang="en-US" sz="1200" dirty="0">
+            <a:pPr marL="0" indent="0">
+              <a:buNone/>
+            </a:pPr>
+            <a:r>
+              <a:rPr lang="en-US" sz="1200">
                 <a:solidFill>
                   <a:srgbClr val="1A2B3C"/>
                 </a:solidFill>
@@ -7831,7 +7720,7 @@
               </a:rPr>
               <a:t>Only 22% of clients default, making prediction harder — the model must detect the minority</a:t>
             </a:r>
-            <a:endParaRPr lang="en-US" sz="1200" dirty="0"/>
+            <a:endParaRPr lang="en-US" sz="1200"/>
           </a:p>
         </p:txBody>
       </p:sp>
@@ -7859,7 +7748,7 @@
             <a:prstDash val="solid"/>
           </a:ln>
           <a:effectLst>
-            <a:outerShdw sx="100000" sy="100000" kx="0" ky="0" algn="bl" rotWithShape="0" blurRad="101600" dist="38100" dir="8100000">
+            <a:outerShdw blurRad="101600" dist="38100" dir="8100000" algn="bl" rotWithShape="0">
               <a:srgbClr val="000000">
                 <a:alpha val="12000"/>
               </a:srgbClr>
@@ -7913,11 +7802,11 @@
           <a:bodyPr wrap="square" lIns="0" tIns="0" rIns="0" bIns="0" rtlCol="0" anchor="ctr"/>
           <a:lstStyle/>
           <a:p>
-            <a:pPr indent="0" marL="0">
-              <a:buNone/>
-            </a:pPr>
-            <a:r>
-              <a:rPr lang="en-US" sz="1400" b="1" dirty="0">
+            <a:pPr marL="0" indent="0">
+              <a:buNone/>
+            </a:pPr>
+            <a:r>
+              <a:rPr lang="en-US" sz="1400" b="1">
                 <a:solidFill>
                   <a:srgbClr val="0D2137"/>
                 </a:solidFill>
@@ -7927,7 +7816,7 @@
               </a:rPr>
               <a:t>Real-World Dataset</a:t>
             </a:r>
-            <a:endParaRPr lang="en-US" sz="1400" dirty="0"/>
+            <a:endParaRPr lang="en-US" sz="1400"/>
           </a:p>
         </p:txBody>
       </p:sp>
@@ -7952,11 +7841,11 @@
           <a:bodyPr wrap="square" lIns="0" tIns="0" rIns="0" bIns="0" rtlCol="0" anchor="ctr"/>
           <a:lstStyle/>
           <a:p>
-            <a:pPr indent="0" marL="0">
-              <a:buNone/>
-            </a:pPr>
-            <a:r>
-              <a:rPr lang="en-US" sz="1200" dirty="0">
+            <a:pPr marL="0" indent="0">
+              <a:buNone/>
+            </a:pPr>
+            <a:r>
+              <a:rPr lang="en-US" sz="1200">
                 <a:solidFill>
                   <a:srgbClr val="1A2B3C"/>
                 </a:solidFill>
@@ -7966,7 +7855,7 @@
               </a:rPr>
               <a:t>30,000 Taiwan credit card clients from UCI ML Repository — real behavior, real stakes</a:t>
             </a:r>
-            <a:endParaRPr lang="en-US" sz="1200" dirty="0"/>
+            <a:endParaRPr lang="en-US" sz="1200"/>
           </a:p>
         </p:txBody>
       </p:sp>
@@ -7994,7 +7883,7 @@
             <a:prstDash val="solid"/>
           </a:ln>
           <a:effectLst>
-            <a:outerShdw sx="100000" sy="100000" kx="0" ky="0" algn="bl" rotWithShape="0" blurRad="101600" dist="38100" dir="8100000">
+            <a:outerShdw blurRad="101600" dist="38100" dir="8100000" algn="bl" rotWithShape="0">
               <a:srgbClr val="000000">
                 <a:alpha val="12000"/>
               </a:srgbClr>
@@ -8048,11 +7937,11 @@
           <a:bodyPr wrap="square" lIns="0" tIns="0" rIns="0" bIns="0" rtlCol="0" anchor="ctr"/>
           <a:lstStyle/>
           <a:p>
-            <a:pPr indent="0" marL="0">
-              <a:buNone/>
-            </a:pPr>
-            <a:r>
-              <a:rPr lang="en-US" sz="1400" b="1" dirty="0">
+            <a:pPr marL="0" indent="0">
+              <a:buNone/>
+            </a:pPr>
+            <a:r>
+              <a:rPr lang="en-US" sz="1400" b="1">
                 <a:solidFill>
                   <a:srgbClr val="0D2137"/>
                 </a:solidFill>
@@ -8062,7 +7951,7 @@
               </a:rPr>
               <a:t>Multiple Metrics</a:t>
             </a:r>
-            <a:endParaRPr lang="en-US" sz="1400" dirty="0"/>
+            <a:endParaRPr lang="en-US" sz="1400"/>
           </a:p>
         </p:txBody>
       </p:sp>
@@ -8087,11 +7976,11 @@
           <a:bodyPr wrap="square" lIns="0" tIns="0" rIns="0" bIns="0" rtlCol="0" anchor="ctr"/>
           <a:lstStyle/>
           <a:p>
-            <a:pPr indent="0" marL="0">
-              <a:buNone/>
-            </a:pPr>
-            <a:r>
-              <a:rPr lang="en-US" sz="1200" dirty="0">
+            <a:pPr marL="0" indent="0">
+              <a:buNone/>
+            </a:pPr>
+            <a:r>
+              <a:rPr lang="en-US" sz="1200">
                 <a:solidFill>
                   <a:srgbClr val="1A2B3C"/>
                 </a:solidFill>
@@ -8101,7 +7990,7 @@
               </a:rPr>
               <a:t>Accuracy alone is misleading — recall matters most since missing a defaulter is costlier</a:t>
             </a:r>
-            <a:endParaRPr lang="en-US" sz="1200" dirty="0"/>
+            <a:endParaRPr lang="en-US" sz="1200"/>
           </a:p>
         </p:txBody>
       </p:sp>
@@ -8121,6 +8010,7 @@
         <a:solidFill>
           <a:srgbClr val="0D2137"/>
         </a:solidFill>
+        <a:effectLst/>
       </p:bgPr>
     </p:bg>
     <p:spTree>
@@ -8158,11 +8048,11 @@
           <a:bodyPr wrap="square" rtlCol="0" anchor="ctr"/>
           <a:lstStyle/>
           <a:p>
-            <a:pPr indent="0" marL="0">
-              <a:buNone/>
-            </a:pPr>
-            <a:r>
-              <a:rPr lang="en-US" sz="3000" b="1" dirty="0">
+            <a:pPr marL="0" indent="0">
+              <a:buNone/>
+            </a:pPr>
+            <a:r>
+              <a:rPr lang="en-US" sz="3000" b="1">
                 <a:solidFill>
                   <a:srgbClr val="FFFFFF"/>
                 </a:solidFill>
@@ -8172,7 +8062,7 @@
               </a:rPr>
               <a:t>Dataset at a Glance</a:t>
             </a:r>
-            <a:endParaRPr lang="en-US" sz="3000" dirty="0"/>
+            <a:endParaRPr lang="en-US" sz="3000"/>
           </a:p>
         </p:txBody>
       </p:sp>
@@ -8197,11 +8087,11 @@
           <a:bodyPr wrap="square" rtlCol="0" anchor="ctr"/>
           <a:lstStyle/>
           <a:p>
-            <a:pPr indent="0" marL="0">
-              <a:buNone/>
-            </a:pPr>
-            <a:r>
-              <a:rPr lang="en-US" sz="1100" dirty="0">
+            <a:pPr marL="0" indent="0">
+              <a:buNone/>
+            </a:pPr>
+            <a:r>
+              <a:rPr lang="en-US" sz="1100">
                 <a:solidFill>
                   <a:srgbClr val="4FC3F7"/>
                 </a:solidFill>
@@ -8211,7 +8101,7 @@
               </a:rPr>
               <a:t>Default of Credit Card Clients  |  UCI Machine Learning Repository  |  Yeh &amp; Lien (2009)</a:t>
             </a:r>
-            <a:endParaRPr lang="en-US" sz="1100" dirty="0"/>
+            <a:endParaRPr lang="en-US" sz="1100"/>
           </a:p>
         </p:txBody>
       </p:sp>
@@ -8264,7 +8154,7 @@
             <a:prstDash val="solid"/>
           </a:ln>
           <a:effectLst>
-            <a:outerShdw sx="100000" sy="100000" kx="0" ky="0" algn="bl" rotWithShape="0" blurRad="101600" dist="38100" dir="8100000">
+            <a:outerShdw blurRad="101600" dist="38100" dir="8100000" algn="bl" rotWithShape="0">
               <a:srgbClr val="000000">
                 <a:alpha val="12000"/>
               </a:srgbClr>
@@ -8318,11 +8208,11 @@
           <a:bodyPr wrap="square" rtlCol="0" anchor="ctr"/>
           <a:lstStyle/>
           <a:p>
-            <a:pPr algn="ctr" indent="0" marL="0">
-              <a:buNone/>
-            </a:pPr>
-            <a:r>
-              <a:rPr lang="en-US" sz="3400" b="1" dirty="0">
+            <a:pPr marL="0" indent="0" algn="ctr">
+              <a:buNone/>
+            </a:pPr>
+            <a:r>
+              <a:rPr lang="en-US" sz="3400" b="1">
                 <a:solidFill>
                   <a:srgbClr val="00B8D4"/>
                 </a:solidFill>
@@ -8332,7 +8222,7 @@
               </a:rPr>
               <a:t>30,000</a:t>
             </a:r>
-            <a:endParaRPr lang="en-US" sz="3400" dirty="0"/>
+            <a:endParaRPr lang="en-US" sz="3400"/>
           </a:p>
         </p:txBody>
       </p:sp>
@@ -8357,11 +8247,11 @@
           <a:bodyPr wrap="square" rtlCol="0" anchor="ctr"/>
           <a:lstStyle/>
           <a:p>
-            <a:pPr algn="ctr" indent="0" marL="0">
-              <a:buNone/>
-            </a:pPr>
-            <a:r>
-              <a:rPr lang="en-US" sz="1200" dirty="0">
+            <a:pPr marL="0" indent="0" algn="ctr">
+              <a:buNone/>
+            </a:pPr>
+            <a:r>
+              <a:rPr lang="en-US" sz="1200">
                 <a:solidFill>
                   <a:srgbClr val="4FC3F7"/>
                 </a:solidFill>
@@ -8371,7 +8261,7 @@
               </a:rPr>
               <a:t>Client Records</a:t>
             </a:r>
-            <a:endParaRPr lang="en-US" sz="1200" dirty="0"/>
+            <a:endParaRPr lang="en-US" sz="1200"/>
           </a:p>
         </p:txBody>
       </p:sp>
@@ -8399,7 +8289,7 @@
             <a:prstDash val="solid"/>
           </a:ln>
           <a:effectLst>
-            <a:outerShdw sx="100000" sy="100000" kx="0" ky="0" algn="bl" rotWithShape="0" blurRad="101600" dist="38100" dir="8100000">
+            <a:outerShdw blurRad="101600" dist="38100" dir="8100000" algn="bl" rotWithShape="0">
               <a:srgbClr val="000000">
                 <a:alpha val="12000"/>
               </a:srgbClr>
@@ -8453,11 +8343,11 @@
           <a:bodyPr wrap="square" rtlCol="0" anchor="ctr"/>
           <a:lstStyle/>
           <a:p>
-            <a:pPr algn="ctr" indent="0" marL="0">
-              <a:buNone/>
-            </a:pPr>
-            <a:r>
-              <a:rPr lang="en-US" sz="3400" b="1" dirty="0">
+            <a:pPr marL="0" indent="0" algn="ctr">
+              <a:buNone/>
+            </a:pPr>
+            <a:r>
+              <a:rPr lang="en-US" sz="3400" b="1">
                 <a:solidFill>
                   <a:srgbClr val="00B8D4"/>
                 </a:solidFill>
@@ -8467,7 +8357,7 @@
               </a:rPr>
               <a:t>23</a:t>
             </a:r>
-            <a:endParaRPr lang="en-US" sz="3400" dirty="0"/>
+            <a:endParaRPr lang="en-US" sz="3400"/>
           </a:p>
         </p:txBody>
       </p:sp>
@@ -8492,11 +8382,11 @@
           <a:bodyPr wrap="square" rtlCol="0" anchor="ctr"/>
           <a:lstStyle/>
           <a:p>
-            <a:pPr algn="ctr" indent="0" marL="0">
-              <a:buNone/>
-            </a:pPr>
-            <a:r>
-              <a:rPr lang="en-US" sz="1200" dirty="0">
+            <a:pPr marL="0" indent="0" algn="ctr">
+              <a:buNone/>
+            </a:pPr>
+            <a:r>
+              <a:rPr lang="en-US" sz="1200">
                 <a:solidFill>
                   <a:srgbClr val="4FC3F7"/>
                 </a:solidFill>
@@ -8506,7 +8396,7 @@
               </a:rPr>
               <a:t>Features</a:t>
             </a:r>
-            <a:endParaRPr lang="en-US" sz="1200" dirty="0"/>
+            <a:endParaRPr lang="en-US" sz="1200"/>
           </a:p>
         </p:txBody>
       </p:sp>
@@ -8534,7 +8424,7 @@
             <a:prstDash val="solid"/>
           </a:ln>
           <a:effectLst>
-            <a:outerShdw sx="100000" sy="100000" kx="0" ky="0" algn="bl" rotWithShape="0" blurRad="101600" dist="38100" dir="8100000">
+            <a:outerShdw blurRad="101600" dist="38100" dir="8100000" algn="bl" rotWithShape="0">
               <a:srgbClr val="000000">
                 <a:alpha val="12000"/>
               </a:srgbClr>
@@ -8588,11 +8478,11 @@
           <a:bodyPr wrap="square" rtlCol="0" anchor="ctr"/>
           <a:lstStyle/>
           <a:p>
-            <a:pPr algn="ctr" indent="0" marL="0">
-              <a:buNone/>
-            </a:pPr>
-            <a:r>
-              <a:rPr lang="en-US" sz="3400" b="1" dirty="0">
+            <a:pPr marL="0" indent="0" algn="ctr">
+              <a:buNone/>
+            </a:pPr>
+            <a:r>
+              <a:rPr lang="en-US" sz="3400" b="1">
                 <a:solidFill>
                   <a:srgbClr val="00B8D4"/>
                 </a:solidFill>
@@ -8602,7 +8492,7 @@
               </a:rPr>
               <a:t>22.12%</a:t>
             </a:r>
-            <a:endParaRPr lang="en-US" sz="3400" dirty="0"/>
+            <a:endParaRPr lang="en-US" sz="3400"/>
           </a:p>
         </p:txBody>
       </p:sp>
@@ -8627,11 +8517,11 @@
           <a:bodyPr wrap="square" rtlCol="0" anchor="ctr"/>
           <a:lstStyle/>
           <a:p>
-            <a:pPr algn="ctr" indent="0" marL="0">
-              <a:buNone/>
-            </a:pPr>
-            <a:r>
-              <a:rPr lang="en-US" sz="1200" dirty="0">
+            <a:pPr marL="0" indent="0" algn="ctr">
+              <a:buNone/>
+            </a:pPr>
+            <a:r>
+              <a:rPr lang="en-US" sz="1200">
                 <a:solidFill>
                   <a:srgbClr val="4FC3F7"/>
                 </a:solidFill>
@@ -8641,7 +8531,7 @@
               </a:rPr>
               <a:t>Default Rate</a:t>
             </a:r>
-            <a:endParaRPr lang="en-US" sz="1200" dirty="0"/>
+            <a:endParaRPr lang="en-US" sz="1200"/>
           </a:p>
         </p:txBody>
       </p:sp>
@@ -8669,7 +8559,7 @@
             <a:prstDash val="solid"/>
           </a:ln>
           <a:effectLst>
-            <a:outerShdw sx="100000" sy="100000" kx="0" ky="0" algn="bl" rotWithShape="0" blurRad="101600" dist="38100" dir="8100000">
+            <a:outerShdw blurRad="101600" dist="38100" dir="8100000" algn="bl" rotWithShape="0">
               <a:srgbClr val="000000">
                 <a:alpha val="12000"/>
               </a:srgbClr>
@@ -8723,11 +8613,11 @@
           <a:bodyPr wrap="square" rtlCol="0" anchor="ctr"/>
           <a:lstStyle/>
           <a:p>
-            <a:pPr algn="ctr" indent="0" marL="0">
-              <a:buNone/>
-            </a:pPr>
-            <a:r>
-              <a:rPr lang="en-US" sz="3400" b="1" dirty="0">
+            <a:pPr marL="0" indent="0" algn="ctr">
+              <a:buNone/>
+            </a:pPr>
+            <a:r>
+              <a:rPr lang="en-US" sz="3400" b="1">
                 <a:solidFill>
                   <a:srgbClr val="00B8D4"/>
                 </a:solidFill>
@@ -8737,7 +8627,7 @@
               </a:rPr>
               <a:t>3.5:1</a:t>
             </a:r>
-            <a:endParaRPr lang="en-US" sz="3400" dirty="0"/>
+            <a:endParaRPr lang="en-US" sz="3400"/>
           </a:p>
         </p:txBody>
       </p:sp>
@@ -8762,11 +8652,11 @@
           <a:bodyPr wrap="square" rtlCol="0" anchor="ctr"/>
           <a:lstStyle/>
           <a:p>
-            <a:pPr algn="ctr" indent="0" marL="0">
-              <a:buNone/>
-            </a:pPr>
-            <a:r>
-              <a:rPr lang="en-US" sz="1200" dirty="0">
+            <a:pPr marL="0" indent="0" algn="ctr">
+              <a:buNone/>
+            </a:pPr>
+            <a:r>
+              <a:rPr lang="en-US" sz="1200">
                 <a:solidFill>
                   <a:srgbClr val="4FC3F7"/>
                 </a:solidFill>
@@ -8776,7 +8666,7 @@
               </a:rPr>
               <a:t>Class Imbalance</a:t>
             </a:r>
-            <a:endParaRPr lang="en-US" sz="1200" dirty="0"/>
+            <a:endParaRPr lang="en-US" sz="1200"/>
           </a:p>
         </p:txBody>
       </p:sp>
@@ -8804,7 +8694,7 @@
             <a:prstDash val="solid"/>
           </a:ln>
           <a:effectLst>
-            <a:outerShdw sx="100000" sy="100000" kx="0" ky="0" algn="bl" rotWithShape="0" blurRad="101600" dist="38100" dir="8100000">
+            <a:outerShdw blurRad="101600" dist="38100" dir="8100000" algn="bl" rotWithShape="0">
               <a:srgbClr val="000000">
                 <a:alpha val="12000"/>
               </a:srgbClr>
@@ -8858,11 +8748,11 @@
           <a:bodyPr wrap="square" rtlCol="0" anchor="ctr"/>
           <a:lstStyle/>
           <a:p>
-            <a:pPr algn="ctr" indent="0" marL="0">
-              <a:buNone/>
-            </a:pPr>
-            <a:r>
-              <a:rPr lang="en-US" sz="3400" b="1" dirty="0">
+            <a:pPr marL="0" indent="0" algn="ctr">
+              <a:buNone/>
+            </a:pPr>
+            <a:r>
+              <a:rPr lang="en-US" sz="3400" b="1">
                 <a:solidFill>
                   <a:srgbClr val="00B8D4"/>
                 </a:solidFill>
@@ -8872,7 +8762,7 @@
               </a:rPr>
               <a:t>NT$167K</a:t>
             </a:r>
-            <a:endParaRPr lang="en-US" sz="3400" dirty="0"/>
+            <a:endParaRPr lang="en-US" sz="3400"/>
           </a:p>
         </p:txBody>
       </p:sp>
@@ -8897,11 +8787,11 @@
           <a:bodyPr wrap="square" rtlCol="0" anchor="ctr"/>
           <a:lstStyle/>
           <a:p>
-            <a:pPr algn="ctr" indent="0" marL="0">
-              <a:buNone/>
-            </a:pPr>
-            <a:r>
-              <a:rPr lang="en-US" sz="1200" dirty="0">
+            <a:pPr marL="0" indent="0" algn="ctr">
+              <a:buNone/>
+            </a:pPr>
+            <a:r>
+              <a:rPr lang="en-US" sz="1200">
                 <a:solidFill>
                   <a:srgbClr val="4FC3F7"/>
                 </a:solidFill>
@@ -8911,7 +8801,7 @@
               </a:rPr>
               <a:t>Avg Credit Limit</a:t>
             </a:r>
-            <a:endParaRPr lang="en-US" sz="1200" dirty="0"/>
+            <a:endParaRPr lang="en-US" sz="1200"/>
           </a:p>
         </p:txBody>
       </p:sp>
@@ -8939,7 +8829,7 @@
             <a:prstDash val="solid"/>
           </a:ln>
           <a:effectLst>
-            <a:outerShdw sx="100000" sy="100000" kx="0" ky="0" algn="bl" rotWithShape="0" blurRad="101600" dist="38100" dir="8100000">
+            <a:outerShdw blurRad="101600" dist="38100" dir="8100000" algn="bl" rotWithShape="0">
               <a:srgbClr val="000000">
                 <a:alpha val="12000"/>
               </a:srgbClr>
@@ -8993,11 +8883,11 @@
           <a:bodyPr wrap="square" rtlCol="0" anchor="ctr"/>
           <a:lstStyle/>
           <a:p>
-            <a:pPr algn="ctr" indent="0" marL="0">
-              <a:buNone/>
-            </a:pPr>
-            <a:r>
-              <a:rPr lang="en-US" sz="3400" b="1" dirty="0">
+            <a:pPr marL="0" indent="0" algn="ctr">
+              <a:buNone/>
+            </a:pPr>
+            <a:r>
+              <a:rPr lang="en-US" sz="3400" b="1">
                 <a:solidFill>
                   <a:srgbClr val="00B8D4"/>
                 </a:solidFill>
@@ -9007,7 +8897,7 @@
               </a:rPr>
               <a:t>35 yrs</a:t>
             </a:r>
-            <a:endParaRPr lang="en-US" sz="3400" dirty="0"/>
+            <a:endParaRPr lang="en-US" sz="3400"/>
           </a:p>
         </p:txBody>
       </p:sp>
@@ -9032,11 +8922,11 @@
           <a:bodyPr wrap="square" rtlCol="0" anchor="ctr"/>
           <a:lstStyle/>
           <a:p>
-            <a:pPr algn="ctr" indent="0" marL="0">
-              <a:buNone/>
-            </a:pPr>
-            <a:r>
-              <a:rPr lang="en-US" sz="1200" dirty="0">
+            <a:pPr marL="0" indent="0" algn="ctr">
+              <a:buNone/>
+            </a:pPr>
+            <a:r>
+              <a:rPr lang="en-US" sz="1200">
                 <a:solidFill>
                   <a:srgbClr val="4FC3F7"/>
                 </a:solidFill>
@@ -9046,7 +8936,7 @@
               </a:rPr>
               <a:t>Average Age</a:t>
             </a:r>
-            <a:endParaRPr lang="en-US" sz="1200" dirty="0"/>
+            <a:endParaRPr lang="en-US" sz="1200"/>
           </a:p>
         </p:txBody>
       </p:sp>
@@ -9066,6 +8956,7 @@
         <a:solidFill>
           <a:srgbClr val="F0F6FC"/>
         </a:solidFill>
+        <a:effectLst/>
       </p:bgPr>
     </p:bg>
     <p:spTree>
@@ -9128,11 +9019,11 @@
           <a:bodyPr wrap="square" rtlCol="0" anchor="ctr"/>
           <a:lstStyle/>
           <a:p>
-            <a:pPr indent="0" marL="0">
-              <a:buNone/>
-            </a:pPr>
-            <a:r>
-              <a:rPr lang="en-US" sz="2600" b="1" dirty="0">
+            <a:pPr marL="0" indent="0">
+              <a:buNone/>
+            </a:pPr>
+            <a:r>
+              <a:rPr lang="en-US" sz="2600" b="1">
                 <a:solidFill>
                   <a:srgbClr val="FFFFFF"/>
                 </a:solidFill>
@@ -9142,7 +9033,7 @@
               </a:rPr>
               <a:t>Data Preparation &amp; Cleaning</a:t>
             </a:r>
-            <a:endParaRPr lang="en-US" sz="2600" dirty="0"/>
+            <a:endParaRPr lang="en-US" sz="2600"/>
           </a:p>
         </p:txBody>
       </p:sp>
@@ -9167,11 +9058,11 @@
           <a:bodyPr wrap="square" rtlCol="0" anchor="ctr"/>
           <a:lstStyle/>
           <a:p>
-            <a:pPr indent="0" marL="0">
-              <a:buNone/>
-            </a:pPr>
-            <a:r>
-              <a:rPr lang="en-US" sz="900" b="1" spc="300" kern="0" dirty="0">
+            <a:pPr marL="0" indent="0">
+              <a:buNone/>
+            </a:pPr>
+            <a:r>
+              <a:rPr lang="en-US" sz="900" b="1" kern="0" spc="300">
                 <a:solidFill>
                   <a:srgbClr val="00B8D4"/>
                 </a:solidFill>
@@ -9181,7 +9072,7 @@
               </a:rPr>
               <a:t>DATA CLEANING</a:t>
             </a:r>
-            <a:endParaRPr lang="en-US" sz="900" dirty="0"/>
+            <a:endParaRPr lang="en-US" sz="900"/>
           </a:p>
         </p:txBody>
       </p:sp>
@@ -9206,11 +9097,11 @@
           <a:bodyPr wrap="square" rtlCol="0" anchor="ctr"/>
           <a:lstStyle/>
           <a:p>
-            <a:pPr indent="0" marL="0">
-              <a:buNone/>
-            </a:pPr>
-            <a:r>
-              <a:rPr lang="en-US" sz="900" b="1" spc="300" kern="0" dirty="0">
+            <a:pPr marL="0" indent="0">
+              <a:buNone/>
+            </a:pPr>
+            <a:r>
+              <a:rPr lang="en-US" sz="900" b="1" kern="0" spc="300">
                 <a:solidFill>
                   <a:srgbClr val="FFB300"/>
                 </a:solidFill>
@@ -9220,7 +9111,7 @@
               </a:rPr>
               <a:t>PREPROCESSING PIPELINE</a:t>
             </a:r>
-            <a:endParaRPr lang="en-US" sz="900" dirty="0"/>
+            <a:endParaRPr lang="en-US" sz="900"/>
           </a:p>
         </p:txBody>
       </p:sp>
@@ -9248,7 +9139,7 @@
             <a:prstDash val="solid"/>
           </a:ln>
           <a:effectLst>
-            <a:outerShdw sx="100000" sy="100000" kx="0" ky="0" algn="bl" rotWithShape="0" blurRad="101600" dist="38100" dir="8100000">
+            <a:outerShdw blurRad="101600" dist="38100" dir="8100000" algn="bl" rotWithShape="0">
               <a:srgbClr val="000000">
                 <a:alpha val="12000"/>
               </a:srgbClr>
@@ -9302,11 +9193,11 @@
           <a:bodyPr wrap="square" rtlCol="0" anchor="ctr"/>
           <a:lstStyle/>
           <a:p>
-            <a:pPr algn="ctr" indent="0" marL="0">
-              <a:buNone/>
-            </a:pPr>
-            <a:r>
-              <a:rPr lang="en-US" sz="1300" b="1" dirty="0">
+            <a:pPr marL="0" indent="0" algn="ctr">
+              <a:buNone/>
+            </a:pPr>
+            <a:r>
+              <a:rPr lang="en-US" sz="1300" b="1">
                 <a:solidFill>
                   <a:srgbClr val="00B8D4"/>
                 </a:solidFill>
@@ -9316,7 +9207,7 @@
               </a:rPr>
               <a:t>01</a:t>
             </a:r>
-            <a:endParaRPr lang="en-US" sz="1300" dirty="0"/>
+            <a:endParaRPr lang="en-US" sz="1300"/>
           </a:p>
         </p:txBody>
       </p:sp>
@@ -9341,11 +9232,11 @@
           <a:bodyPr wrap="square" lIns="0" tIns="0" rIns="0" bIns="0" rtlCol="0" anchor="ctr"/>
           <a:lstStyle/>
           <a:p>
-            <a:pPr indent="0" marL="0">
-              <a:buNone/>
-            </a:pPr>
-            <a:r>
-              <a:rPr lang="en-US" sz="1200" b="1" dirty="0">
+            <a:pPr marL="0" indent="0">
+              <a:buNone/>
+            </a:pPr>
+            <a:r>
+              <a:rPr lang="en-US" sz="1200" b="1">
                 <a:solidFill>
                   <a:srgbClr val="0D2137"/>
                 </a:solidFill>
@@ -9355,7 +9246,7 @@
               </a:rPr>
               <a:t>Initial Inspection</a:t>
             </a:r>
-            <a:endParaRPr lang="en-US" sz="1200" dirty="0"/>
+            <a:endParaRPr lang="en-US" sz="1200"/>
           </a:p>
         </p:txBody>
       </p:sp>
@@ -9380,11 +9271,11 @@
           <a:bodyPr wrap="square" lIns="0" tIns="0" rIns="0" bIns="0" rtlCol="0" anchor="ctr"/>
           <a:lstStyle/>
           <a:p>
-            <a:pPr indent="0" marL="0">
-              <a:buNone/>
-            </a:pPr>
-            <a:r>
-              <a:rPr lang="en-US" sz="1050" dirty="0">
+            <a:pPr marL="0" indent="0">
+              <a:buNone/>
+            </a:pPr>
+            <a:r>
+              <a:rPr lang="en-US" sz="1050">
                 <a:solidFill>
                   <a:srgbClr val="546E7A"/>
                 </a:solidFill>
@@ -9394,14 +9285,14 @@
               </a:rPr>
               <a:t>30,000 rows × 24 cols, all int64</a:t>
             </a:r>
-            <a:endParaRPr lang="en-US" sz="1050" dirty="0"/>
-          </a:p>
-          <a:p>
-            <a:pPr indent="0" marL="0">
-              <a:buNone/>
-            </a:pPr>
-            <a:r>
-              <a:rPr lang="en-US" sz="1050" dirty="0">
+            <a:endParaRPr lang="en-US" sz="1050"/>
+          </a:p>
+          <a:p>
+            <a:pPr marL="0" indent="0">
+              <a:buNone/>
+            </a:pPr>
+            <a:r>
+              <a:rPr lang="en-US" sz="1050">
                 <a:solidFill>
                   <a:srgbClr val="546E7A"/>
                 </a:solidFill>
@@ -9411,7 +9302,7 @@
               </a:rPr>
               <a:t>0 missing values — 35 duplicate rows kept</a:t>
             </a:r>
-            <a:endParaRPr lang="en-US" sz="1050" dirty="0"/>
+            <a:endParaRPr lang="en-US" sz="1050"/>
           </a:p>
         </p:txBody>
       </p:sp>
@@ -9439,7 +9330,7 @@
             <a:prstDash val="solid"/>
           </a:ln>
           <a:effectLst>
-            <a:outerShdw sx="100000" sy="100000" kx="0" ky="0" algn="bl" rotWithShape="0" blurRad="101600" dist="38100" dir="8100000">
+            <a:outerShdw blurRad="101600" dist="38100" dir="8100000" algn="bl" rotWithShape="0">
               <a:srgbClr val="000000">
                 <a:alpha val="12000"/>
               </a:srgbClr>
@@ -9493,11 +9384,11 @@
           <a:bodyPr wrap="square" rtlCol="0" anchor="ctr"/>
           <a:lstStyle/>
           <a:p>
-            <a:pPr algn="ctr" indent="0" marL="0">
-              <a:buNone/>
-            </a:pPr>
-            <a:r>
-              <a:rPr lang="en-US" sz="1300" b="1" dirty="0">
+            <a:pPr marL="0" indent="0" algn="ctr">
+              <a:buNone/>
+            </a:pPr>
+            <a:r>
+              <a:rPr lang="en-US" sz="1300" b="1">
                 <a:solidFill>
                   <a:srgbClr val="00B8D4"/>
                 </a:solidFill>
@@ -9507,7 +9398,7 @@
               </a:rPr>
               <a:t>02</a:t>
             </a:r>
-            <a:endParaRPr lang="en-US" sz="1300" dirty="0"/>
+            <a:endParaRPr lang="en-US" sz="1300"/>
           </a:p>
         </p:txBody>
       </p:sp>
@@ -9532,11 +9423,11 @@
           <a:bodyPr wrap="square" lIns="0" tIns="0" rIns="0" bIns="0" rtlCol="0" anchor="ctr"/>
           <a:lstStyle/>
           <a:p>
-            <a:pPr indent="0" marL="0">
-              <a:buNone/>
-            </a:pPr>
-            <a:r>
-              <a:rPr lang="en-US" sz="1200" b="1" dirty="0">
+            <a:pPr marL="0" indent="0">
+              <a:buNone/>
+            </a:pPr>
+            <a:r>
+              <a:rPr lang="en-US" sz="1200" b="1">
                 <a:solidFill>
                   <a:srgbClr val="0D2137"/>
                 </a:solidFill>
@@ -9546,7 +9437,7 @@
               </a:rPr>
               <a:t>EDUCATION Cleaning</a:t>
             </a:r>
-            <a:endParaRPr lang="en-US" sz="1200" dirty="0"/>
+            <a:endParaRPr lang="en-US" sz="1200"/>
           </a:p>
         </p:txBody>
       </p:sp>
@@ -9571,11 +9462,11 @@
           <a:bodyPr wrap="square" lIns="0" tIns="0" rIns="0" bIns="0" rtlCol="0" anchor="ctr"/>
           <a:lstStyle/>
           <a:p>
-            <a:pPr indent="0" marL="0">
-              <a:buNone/>
-            </a:pPr>
-            <a:r>
-              <a:rPr lang="en-US" sz="1050" dirty="0">
+            <a:pPr marL="0" indent="0">
+              <a:buNone/>
+            </a:pPr>
+            <a:r>
+              <a:rPr lang="en-US" sz="1050">
                 <a:solidFill>
                   <a:srgbClr val="546E7A"/>
                 </a:solidFill>
@@ -9585,14 +9476,14 @@
               </a:rPr>
               <a:t>Values 0, 5, 6 undocumented → remapped to 4</a:t>
             </a:r>
-            <a:endParaRPr lang="en-US" sz="1050" dirty="0"/>
-          </a:p>
-          <a:p>
-            <a:pPr indent="0" marL="0">
-              <a:buNone/>
-            </a:pPr>
-            <a:r>
-              <a:rPr lang="en-US" sz="1050" dirty="0">
+            <a:endParaRPr lang="en-US" sz="1050"/>
+          </a:p>
+          <a:p>
+            <a:pPr marL="0" indent="0">
+              <a:buNone/>
+            </a:pPr>
+            <a:r>
+              <a:rPr lang="en-US" sz="1050">
                 <a:solidFill>
                   <a:srgbClr val="546E7A"/>
                 </a:solidFill>
@@ -9602,7 +9493,7 @@
               </a:rPr>
               <a:t>345 rows affected (1.15%)</a:t>
             </a:r>
-            <a:endParaRPr lang="en-US" sz="1050" dirty="0"/>
+            <a:endParaRPr lang="en-US" sz="1050"/>
           </a:p>
         </p:txBody>
       </p:sp>
@@ -9630,7 +9521,7 @@
             <a:prstDash val="solid"/>
           </a:ln>
           <a:effectLst>
-            <a:outerShdw sx="100000" sy="100000" kx="0" ky="0" algn="bl" rotWithShape="0" blurRad="101600" dist="38100" dir="8100000">
+            <a:outerShdw blurRad="101600" dist="38100" dir="8100000" algn="bl" rotWithShape="0">
               <a:srgbClr val="000000">
                 <a:alpha val="12000"/>
               </a:srgbClr>
@@ -9684,11 +9575,11 @@
           <a:bodyPr wrap="square" rtlCol="0" anchor="ctr"/>
           <a:lstStyle/>
           <a:p>
-            <a:pPr algn="ctr" indent="0" marL="0">
-              <a:buNone/>
-            </a:pPr>
-            <a:r>
-              <a:rPr lang="en-US" sz="1300" b="1" dirty="0">
+            <a:pPr marL="0" indent="0" algn="ctr">
+              <a:buNone/>
+            </a:pPr>
+            <a:r>
+              <a:rPr lang="en-US" sz="1300" b="1">
                 <a:solidFill>
                   <a:srgbClr val="00B8D4"/>
                 </a:solidFill>
@@ -9698,7 +9589,7 @@
               </a:rPr>
               <a:t>03</a:t>
             </a:r>
-            <a:endParaRPr lang="en-US" sz="1300" dirty="0"/>
+            <a:endParaRPr lang="en-US" sz="1300"/>
           </a:p>
         </p:txBody>
       </p:sp>
@@ -9723,11 +9614,11 @@
           <a:bodyPr wrap="square" lIns="0" tIns="0" rIns="0" bIns="0" rtlCol="0" anchor="ctr"/>
           <a:lstStyle/>
           <a:p>
-            <a:pPr indent="0" marL="0">
-              <a:buNone/>
-            </a:pPr>
-            <a:r>
-              <a:rPr lang="en-US" sz="1200" b="1" dirty="0">
+            <a:pPr marL="0" indent="0">
+              <a:buNone/>
+            </a:pPr>
+            <a:r>
+              <a:rPr lang="en-US" sz="1200" b="1">
                 <a:solidFill>
                   <a:srgbClr val="0D2137"/>
                 </a:solidFill>
@@ -9737,7 +9628,7 @@
               </a:rPr>
               <a:t>MARRIAGE Cleaning</a:t>
             </a:r>
-            <a:endParaRPr lang="en-US" sz="1200" dirty="0"/>
+            <a:endParaRPr lang="en-US" sz="1200"/>
           </a:p>
         </p:txBody>
       </p:sp>
@@ -9762,11 +9653,11 @@
           <a:bodyPr wrap="square" lIns="0" tIns="0" rIns="0" bIns="0" rtlCol="0" anchor="ctr"/>
           <a:lstStyle/>
           <a:p>
-            <a:pPr indent="0" marL="0">
-              <a:buNone/>
-            </a:pPr>
-            <a:r>
-              <a:rPr lang="en-US" sz="1050" dirty="0">
+            <a:pPr marL="0" indent="0">
+              <a:buNone/>
+            </a:pPr>
+            <a:r>
+              <a:rPr lang="en-US" sz="1050">
                 <a:solidFill>
                   <a:srgbClr val="546E7A"/>
                 </a:solidFill>
@@ -9776,14 +9667,14 @@
               </a:rPr>
               <a:t>Value 0 undocumented → remapped to 3</a:t>
             </a:r>
-            <a:endParaRPr lang="en-US" sz="1050" dirty="0"/>
-          </a:p>
-          <a:p>
-            <a:pPr indent="0" marL="0">
-              <a:buNone/>
-            </a:pPr>
-            <a:r>
-              <a:rPr lang="en-US" sz="1050" dirty="0">
+            <a:endParaRPr lang="en-US" sz="1050"/>
+          </a:p>
+          <a:p>
+            <a:pPr marL="0" indent="0">
+              <a:buNone/>
+            </a:pPr>
+            <a:r>
+              <a:rPr lang="en-US" sz="1050">
                 <a:solidFill>
                   <a:srgbClr val="546E7A"/>
                 </a:solidFill>
@@ -9793,7 +9684,7 @@
               </a:rPr>
               <a:t>54 rows affected. Total cleaned: 399 rows (1.3%)</a:t>
             </a:r>
-            <a:endParaRPr lang="en-US" sz="1050" dirty="0"/>
+            <a:endParaRPr lang="en-US" sz="1050"/>
           </a:p>
         </p:txBody>
       </p:sp>
@@ -9821,7 +9712,7 @@
             <a:prstDash val="solid"/>
           </a:ln>
           <a:effectLst>
-            <a:outerShdw sx="100000" sy="100000" kx="0" ky="0" algn="bl" rotWithShape="0" blurRad="101600" dist="38100" dir="8100000">
+            <a:outerShdw blurRad="101600" dist="38100" dir="8100000" algn="bl" rotWithShape="0">
               <a:srgbClr val="000000">
                 <a:alpha val="12000"/>
               </a:srgbClr>
@@ -9875,11 +9766,11 @@
           <a:bodyPr wrap="square" rtlCol="0" anchor="ctr"/>
           <a:lstStyle/>
           <a:p>
-            <a:pPr algn="ctr" indent="0" marL="0">
-              <a:buNone/>
-            </a:pPr>
-            <a:r>
-              <a:rPr lang="en-US" sz="1300" b="1" dirty="0">
+            <a:pPr marL="0" indent="0" algn="ctr">
+              <a:buNone/>
+            </a:pPr>
+            <a:r>
+              <a:rPr lang="en-US" sz="1300" b="1">
                 <a:solidFill>
                   <a:srgbClr val="FFB300"/>
                 </a:solidFill>
@@ -9889,7 +9780,7 @@
               </a:rPr>
               <a:t>04</a:t>
             </a:r>
-            <a:endParaRPr lang="en-US" sz="1300" dirty="0"/>
+            <a:endParaRPr lang="en-US" sz="1300"/>
           </a:p>
         </p:txBody>
       </p:sp>
@@ -9914,11 +9805,11 @@
           <a:bodyPr wrap="square" lIns="0" tIns="0" rIns="0" bIns="0" rtlCol="0" anchor="ctr"/>
           <a:lstStyle/>
           <a:p>
-            <a:pPr indent="0" marL="0">
-              <a:buNone/>
-            </a:pPr>
-            <a:r>
-              <a:rPr lang="en-US" sz="1200" b="1" dirty="0">
+            <a:pPr marL="0" indent="0">
+              <a:buNone/>
+            </a:pPr>
+            <a:r>
+              <a:rPr lang="en-US" sz="1200" b="1">
                 <a:solidFill>
                   <a:srgbClr val="0D2137"/>
                 </a:solidFill>
@@ -9928,7 +9819,7 @@
               </a:rPr>
               <a:t>Stratified Train/Test Split</a:t>
             </a:r>
-            <a:endParaRPr lang="en-US" sz="1200" dirty="0"/>
+            <a:endParaRPr lang="en-US" sz="1200"/>
           </a:p>
         </p:txBody>
       </p:sp>
@@ -9953,11 +9844,11 @@
           <a:bodyPr wrap="square" lIns="0" tIns="0" rIns="0" bIns="0" rtlCol="0" anchor="ctr"/>
           <a:lstStyle/>
           <a:p>
-            <a:pPr indent="0" marL="0">
-              <a:buNone/>
-            </a:pPr>
-            <a:r>
-              <a:rPr lang="en-US" sz="1050" dirty="0">
+            <a:pPr marL="0" indent="0">
+              <a:buNone/>
+            </a:pPr>
+            <a:r>
+              <a:rPr lang="en-US" sz="1050">
                 <a:solidFill>
                   <a:srgbClr val="546E7A"/>
                 </a:solidFill>
@@ -9967,14 +9858,14 @@
               </a:rPr>
               <a:t>80/20 split (random_state=42, stratify=y)</a:t>
             </a:r>
-            <a:endParaRPr lang="en-US" sz="1050" dirty="0"/>
-          </a:p>
-          <a:p>
-            <a:pPr indent="0" marL="0">
-              <a:buNone/>
-            </a:pPr>
-            <a:r>
-              <a:rPr lang="en-US" sz="1050" dirty="0">
+            <a:endParaRPr lang="en-US" sz="1050"/>
+          </a:p>
+          <a:p>
+            <a:pPr marL="0" indent="0">
+              <a:buNone/>
+            </a:pPr>
+            <a:r>
+              <a:rPr lang="en-US" sz="1050">
                 <a:solidFill>
                   <a:srgbClr val="546E7A"/>
                 </a:solidFill>
@@ -9984,7 +9875,7 @@
               </a:rPr>
               <a:t>Default rate 22.12% preserved in both sets</a:t>
             </a:r>
-            <a:endParaRPr lang="en-US" sz="1050" dirty="0"/>
+            <a:endParaRPr lang="en-US" sz="1050"/>
           </a:p>
         </p:txBody>
       </p:sp>
@@ -10012,7 +9903,7 @@
             <a:prstDash val="solid"/>
           </a:ln>
           <a:effectLst>
-            <a:outerShdw sx="100000" sy="100000" kx="0" ky="0" algn="bl" rotWithShape="0" blurRad="101600" dist="38100" dir="8100000">
+            <a:outerShdw blurRad="101600" dist="38100" dir="8100000" algn="bl" rotWithShape="0">
               <a:srgbClr val="000000">
                 <a:alpha val="12000"/>
               </a:srgbClr>
@@ -10066,11 +9957,11 @@
           <a:bodyPr wrap="square" rtlCol="0" anchor="ctr"/>
           <a:lstStyle/>
           <a:p>
-            <a:pPr algn="ctr" indent="0" marL="0">
-              <a:buNone/>
-            </a:pPr>
-            <a:r>
-              <a:rPr lang="en-US" sz="1300" b="1" dirty="0">
+            <a:pPr marL="0" indent="0" algn="ctr">
+              <a:buNone/>
+            </a:pPr>
+            <a:r>
+              <a:rPr lang="en-US" sz="1300" b="1">
                 <a:solidFill>
                   <a:srgbClr val="FFB300"/>
                 </a:solidFill>
@@ -10080,7 +9971,7 @@
               </a:rPr>
               <a:t>05</a:t>
             </a:r>
-            <a:endParaRPr lang="en-US" sz="1300" dirty="0"/>
+            <a:endParaRPr lang="en-US" sz="1300"/>
           </a:p>
         </p:txBody>
       </p:sp>
@@ -10105,11 +9996,11 @@
           <a:bodyPr wrap="square" lIns="0" tIns="0" rIns="0" bIns="0" rtlCol="0" anchor="ctr"/>
           <a:lstStyle/>
           <a:p>
-            <a:pPr indent="0" marL="0">
-              <a:buNone/>
-            </a:pPr>
-            <a:r>
-              <a:rPr lang="en-US" sz="1200" b="1" dirty="0">
+            <a:pPr marL="0" indent="0">
+              <a:buNone/>
+            </a:pPr>
+            <a:r>
+              <a:rPr lang="en-US" sz="1200" b="1">
                 <a:solidFill>
                   <a:srgbClr val="0D2137"/>
                 </a:solidFill>
@@ -10119,7 +10010,7 @@
               </a:rPr>
               <a:t>StandardScaler Normalization</a:t>
             </a:r>
-            <a:endParaRPr lang="en-US" sz="1200" dirty="0"/>
+            <a:endParaRPr lang="en-US" sz="1200"/>
           </a:p>
         </p:txBody>
       </p:sp>
@@ -10144,11 +10035,11 @@
           <a:bodyPr wrap="square" lIns="0" tIns="0" rIns="0" bIns="0" rtlCol="0" anchor="ctr"/>
           <a:lstStyle/>
           <a:p>
-            <a:pPr indent="0" marL="0">
-              <a:buNone/>
-            </a:pPr>
-            <a:r>
-              <a:rPr lang="en-US" sz="1050" dirty="0">
+            <a:pPr marL="0" indent="0">
+              <a:buNone/>
+            </a:pPr>
+            <a:r>
+              <a:rPr lang="en-US" sz="1050">
                 <a:solidFill>
                   <a:srgbClr val="546E7A"/>
                 </a:solidFill>
@@ -10158,14 +10049,14 @@
               </a:rPr>
               <a:t>Fitted on train only → applied to both sets</a:t>
             </a:r>
-            <a:endParaRPr lang="en-US" sz="1050" dirty="0"/>
-          </a:p>
-          <a:p>
-            <a:pPr indent="0" marL="0">
-              <a:buNone/>
-            </a:pPr>
-            <a:r>
-              <a:rPr lang="en-US" sz="1050" dirty="0">
+            <a:endParaRPr lang="en-US" sz="1050"/>
+          </a:p>
+          <a:p>
+            <a:pPr marL="0" indent="0">
+              <a:buNone/>
+            </a:pPr>
+            <a:r>
+              <a:rPr lang="en-US" sz="1050">
                 <a:solidFill>
                   <a:srgbClr val="546E7A"/>
                 </a:solidFill>
@@ -10175,7 +10066,7 @@
               </a:rPr>
               <a:t>Prevents data leakage from test set</a:t>
             </a:r>
-            <a:endParaRPr lang="en-US" sz="1050" dirty="0"/>
+            <a:endParaRPr lang="en-US" sz="1050"/>
           </a:p>
         </p:txBody>
       </p:sp>
@@ -10225,11 +10116,11 @@
           <a:bodyPr wrap="square" rtlCol="0" anchor="ctr"/>
           <a:lstStyle/>
           <a:p>
-            <a:pPr algn="ctr" indent="0" marL="0">
-              <a:buNone/>
-            </a:pPr>
-            <a:r>
-              <a:rPr lang="en-US" sz="1100" dirty="0">
+            <a:pPr marL="0" indent="0" algn="ctr">
+              <a:buNone/>
+            </a:pPr>
+            <a:r>
+              <a:rPr lang="en-US" sz="1100">
                 <a:solidFill>
                   <a:srgbClr val="0D2137"/>
                 </a:solidFill>
@@ -10239,7 +10130,7 @@
               </a:rPr>
               <a:t>Result: 30,000 clean records  •  399 rows corrected (1.3%)  •  24,000 train / 6,000 test  •  No data leakage</a:t>
             </a:r>
-            <a:endParaRPr lang="en-US" sz="1100" dirty="0"/>
+            <a:endParaRPr lang="en-US" sz="1100"/>
           </a:p>
         </p:txBody>
       </p:sp>
@@ -10259,6 +10150,7 @@
         <a:solidFill>
           <a:srgbClr val="F0F6FC"/>
         </a:solidFill>
+        <a:effectLst/>
       </p:bgPr>
     </p:bg>
     <p:spTree>
@@ -10321,11 +10213,11 @@
           <a:bodyPr wrap="square" rtlCol="0" anchor="ctr"/>
           <a:lstStyle/>
           <a:p>
-            <a:pPr indent="0" marL="0">
-              <a:buNone/>
-            </a:pPr>
-            <a:r>
-              <a:rPr lang="en-US" sz="2600" b="1" dirty="0">
+            <a:pPr marL="0" indent="0">
+              <a:buNone/>
+            </a:pPr>
+            <a:r>
+              <a:rPr lang="en-US" sz="2600" b="1">
                 <a:solidFill>
                   <a:srgbClr val="FFFFFF"/>
                 </a:solidFill>
@@ -10335,7 +10227,7 @@
               </a:rPr>
               <a:t>Model Selection Rationale</a:t>
             </a:r>
-            <a:endParaRPr lang="en-US" sz="2600" dirty="0"/>
+            <a:endParaRPr lang="en-US" sz="2600"/>
           </a:p>
         </p:txBody>
       </p:sp>
@@ -10363,7 +10255,7 @@
             <a:prstDash val="solid"/>
           </a:ln>
           <a:effectLst>
-            <a:outerShdw sx="100000" sy="100000" kx="0" ky="0" algn="bl" rotWithShape="0" blurRad="101600" dist="38100" dir="8100000">
+            <a:outerShdw blurRad="101600" dist="38100" dir="8100000" algn="bl" rotWithShape="0">
               <a:srgbClr val="000000">
                 <a:alpha val="12000"/>
               </a:srgbClr>
@@ -10417,11 +10309,11 @@
           <a:bodyPr wrap="square" rtlCol="0" anchor="ctr"/>
           <a:lstStyle/>
           <a:p>
-            <a:pPr algn="ctr" indent="0" marL="0">
-              <a:buNone/>
-            </a:pPr>
-            <a:r>
-              <a:rPr lang="en-US" sz="1000" b="1" spc="300" kern="0" dirty="0">
+            <a:pPr marL="0" indent="0" algn="ctr">
+              <a:buNone/>
+            </a:pPr>
+            <a:r>
+              <a:rPr lang="en-US" sz="1000" b="1" kern="0" spc="300">
                 <a:solidFill>
                   <a:srgbClr val="FFFFFF"/>
                 </a:solidFill>
@@ -10431,7 +10323,7 @@
               </a:rPr>
               <a:t>BASELINE</a:t>
             </a:r>
-            <a:endParaRPr lang="en-US" sz="1000" dirty="0"/>
+            <a:endParaRPr lang="en-US" sz="1000"/>
           </a:p>
         </p:txBody>
       </p:sp>
@@ -10456,11 +10348,11 @@
           <a:bodyPr wrap="square" rtlCol="0" anchor="ctr"/>
           <a:lstStyle/>
           <a:p>
-            <a:pPr indent="0" marL="0">
-              <a:buNone/>
-            </a:pPr>
-            <a:r>
-              <a:rPr lang="en-US" sz="1400" b="1" dirty="0">
+            <a:pPr marL="0" indent="0">
+              <a:buNone/>
+            </a:pPr>
+            <a:r>
+              <a:rPr lang="en-US" sz="1400" b="1">
                 <a:solidFill>
                   <a:srgbClr val="0D2137"/>
                 </a:solidFill>
@@ -10470,7 +10362,7 @@
               </a:rPr>
               <a:t>Logistic Regression</a:t>
             </a:r>
-            <a:endParaRPr lang="en-US" sz="1400" dirty="0"/>
+            <a:endParaRPr lang="en-US" sz="1400"/>
           </a:p>
         </p:txBody>
       </p:sp>
@@ -10495,11 +10387,11 @@
           <a:bodyPr wrap="square" rtlCol="0" anchor="ctr"/>
           <a:lstStyle/>
           <a:p>
-            <a:pPr indent="0" marL="0">
-              <a:buNone/>
-            </a:pPr>
-            <a:r>
-              <a:rPr lang="en-US" sz="900" b="1" spc="100" kern="0" dirty="0">
+            <a:pPr marL="0" indent="0">
+              <a:buNone/>
+            </a:pPr>
+            <a:r>
+              <a:rPr lang="en-US" sz="900" b="1" kern="0" spc="100">
                 <a:solidFill>
                   <a:srgbClr val="1565C0"/>
                 </a:solidFill>
@@ -10509,7 +10401,7 @@
               </a:rPr>
               <a:t>WHY CHOSEN</a:t>
             </a:r>
-            <a:endParaRPr lang="en-US" sz="900" dirty="0"/>
+            <a:endParaRPr lang="en-US" sz="900"/>
           </a:p>
         </p:txBody>
       </p:sp>
@@ -10534,11 +10426,11 @@
           <a:bodyPr wrap="square" rtlCol="0" anchor="ctr"/>
           <a:lstStyle/>
           <a:p>
-            <a:pPr indent="0" marL="0">
-              <a:buNone/>
-            </a:pPr>
-            <a:r>
-              <a:rPr lang="en-US" sz="1050" dirty="0">
+            <a:pPr marL="0" indent="0">
+              <a:buNone/>
+            </a:pPr>
+            <a:r>
+              <a:rPr lang="en-US" sz="1050">
                 <a:solidFill>
                   <a:srgbClr val="1A2B3C"/>
                 </a:solidFill>
@@ -10548,7 +10440,7 @@
               </a:rPr>
               <a:t>Industry-standard in finance; interpretable coefficients show feature impact on default probability</a:t>
             </a:r>
-            <a:endParaRPr lang="en-US" sz="1050" dirty="0"/>
+            <a:endParaRPr lang="en-US" sz="1050"/>
           </a:p>
         </p:txBody>
       </p:sp>
@@ -10573,11 +10465,11 @@
           <a:bodyPr wrap="square" rtlCol="0" anchor="ctr"/>
           <a:lstStyle/>
           <a:p>
-            <a:pPr indent="0" marL="0">
-              <a:buNone/>
-            </a:pPr>
-            <a:r>
-              <a:rPr lang="en-US" sz="900" b="1" spc="100" kern="0" dirty="0">
+            <a:pPr marL="0" indent="0">
+              <a:buNone/>
+            </a:pPr>
+            <a:r>
+              <a:rPr lang="en-US" sz="900" b="1" kern="0" spc="100">
                 <a:solidFill>
                   <a:srgbClr val="1565C0"/>
                 </a:solidFill>
@@ -10587,7 +10479,7 @@
               </a:rPr>
               <a:t>LIMITATION</a:t>
             </a:r>
-            <a:endParaRPr lang="en-US" sz="900" dirty="0"/>
+            <a:endParaRPr lang="en-US" sz="900"/>
           </a:p>
         </p:txBody>
       </p:sp>
@@ -10612,11 +10504,11 @@
           <a:bodyPr wrap="square" rtlCol="0" anchor="ctr"/>
           <a:lstStyle/>
           <a:p>
-            <a:pPr indent="0" marL="0">
-              <a:buNone/>
-            </a:pPr>
-            <a:r>
-              <a:rPr lang="en-US" sz="1050" dirty="0">
+            <a:pPr marL="0" indent="0">
+              <a:buNone/>
+            </a:pPr>
+            <a:r>
+              <a:rPr lang="en-US" sz="1050">
                 <a:solidFill>
                   <a:srgbClr val="1A2B3C"/>
                 </a:solidFill>
@@ -10626,7 +10518,7 @@
               </a:rPr>
               <a:t>Assumes linear separability — violated here (PCA shows class overlap)</a:t>
             </a:r>
-            <a:endParaRPr lang="en-US" sz="1050" dirty="0"/>
+            <a:endParaRPr lang="en-US" sz="1050"/>
           </a:p>
         </p:txBody>
       </p:sp>
@@ -10651,11 +10543,11 @@
           <a:bodyPr wrap="square" rtlCol="0" anchor="ctr"/>
           <a:lstStyle/>
           <a:p>
-            <a:pPr indent="0" marL="0">
-              <a:buNone/>
-            </a:pPr>
-            <a:r>
-              <a:rPr lang="en-US" sz="900" b="1" spc="100" kern="0" dirty="0">
+            <a:pPr marL="0" indent="0">
+              <a:buNone/>
+            </a:pPr>
+            <a:r>
+              <a:rPr lang="en-US" sz="900" b="1" kern="0" spc="100">
                 <a:solidFill>
                   <a:srgbClr val="1565C0"/>
                 </a:solidFill>
@@ -10665,7 +10557,7 @@
               </a:rPr>
               <a:t>KEY FIX</a:t>
             </a:r>
-            <a:endParaRPr lang="en-US" sz="900" dirty="0"/>
+            <a:endParaRPr lang="en-US" sz="900"/>
           </a:p>
         </p:txBody>
       </p:sp>
@@ -10690,11 +10582,11 @@
           <a:bodyPr wrap="square" rtlCol="0" anchor="ctr"/>
           <a:lstStyle/>
           <a:p>
-            <a:pPr indent="0" marL="0">
-              <a:buNone/>
-            </a:pPr>
-            <a:r>
-              <a:rPr lang="en-US" sz="1050" dirty="0">
+            <a:pPr marL="0" indent="0">
+              <a:buNone/>
+            </a:pPr>
+            <a:r>
+              <a:rPr lang="en-US" sz="1050">
                 <a:solidFill>
                   <a:srgbClr val="1A2B3C"/>
                 </a:solidFill>
@@ -10704,7 +10596,7 @@
               </a:rPr>
               <a:t>class_weight='balanced' to counter 3.5:1 imbalance</a:t>
             </a:r>
-            <a:endParaRPr lang="en-US" sz="1050" dirty="0"/>
+            <a:endParaRPr lang="en-US" sz="1050"/>
           </a:p>
         </p:txBody>
       </p:sp>
@@ -10732,7 +10624,7 @@
             <a:prstDash val="solid"/>
           </a:ln>
           <a:effectLst>
-            <a:outerShdw sx="100000" sy="100000" kx="0" ky="0" algn="bl" rotWithShape="0" blurRad="101600" dist="38100" dir="8100000">
+            <a:outerShdw blurRad="101600" dist="38100" dir="8100000" algn="bl" rotWithShape="0">
               <a:srgbClr val="000000">
                 <a:alpha val="12000"/>
               </a:srgbClr>
@@ -10786,11 +10678,11 @@
           <a:bodyPr wrap="square" rtlCol="0" anchor="ctr"/>
           <a:lstStyle/>
           <a:p>
-            <a:pPr algn="ctr" indent="0" marL="0">
-              <a:buNone/>
-            </a:pPr>
-            <a:r>
-              <a:rPr lang="en-US" sz="1000" b="1" spc="300" kern="0" dirty="0">
+            <a:pPr marL="0" indent="0" algn="ctr">
+              <a:buNone/>
+            </a:pPr>
+            <a:r>
+              <a:rPr lang="en-US" sz="1000" b="1" kern="0" spc="300">
                 <a:solidFill>
                   <a:srgbClr val="FFFFFF"/>
                 </a:solidFill>
@@ -10800,7 +10692,7 @@
               </a:rPr>
               <a:t>PROBABILISTIC</a:t>
             </a:r>
-            <a:endParaRPr lang="en-US" sz="1000" dirty="0"/>
+            <a:endParaRPr lang="en-US" sz="1000"/>
           </a:p>
         </p:txBody>
       </p:sp>
@@ -10825,11 +10717,11 @@
           <a:bodyPr wrap="square" rtlCol="0" anchor="ctr"/>
           <a:lstStyle/>
           <a:p>
-            <a:pPr indent="0" marL="0">
-              <a:buNone/>
-            </a:pPr>
-            <a:r>
-              <a:rPr lang="en-US" sz="1400" b="1" dirty="0">
+            <a:pPr marL="0" indent="0">
+              <a:buNone/>
+            </a:pPr>
+            <a:r>
+              <a:rPr lang="en-US" sz="1400" b="1">
                 <a:solidFill>
                   <a:srgbClr val="0D2137"/>
                 </a:solidFill>
@@ -10839,7 +10731,7 @@
               </a:rPr>
               <a:t>Gaussian Naive Bayes</a:t>
             </a:r>
-            <a:endParaRPr lang="en-US" sz="1400" dirty="0"/>
+            <a:endParaRPr lang="en-US" sz="1400"/>
           </a:p>
         </p:txBody>
       </p:sp>
@@ -10864,11 +10756,11 @@
           <a:bodyPr wrap="square" rtlCol="0" anchor="ctr"/>
           <a:lstStyle/>
           <a:p>
-            <a:pPr indent="0" marL="0">
-              <a:buNone/>
-            </a:pPr>
-            <a:r>
-              <a:rPr lang="en-US" sz="900" b="1" spc="100" kern="0" dirty="0">
+            <a:pPr marL="0" indent="0">
+              <a:buNone/>
+            </a:pPr>
+            <a:r>
+              <a:rPr lang="en-US" sz="900" b="1" kern="0" spc="100">
                 <a:solidFill>
                   <a:srgbClr val="7B1FA2"/>
                 </a:solidFill>
@@ -10878,7 +10770,7 @@
               </a:rPr>
               <a:t>WHY CHOSEN</a:t>
             </a:r>
-            <a:endParaRPr lang="en-US" sz="900" dirty="0"/>
+            <a:endParaRPr lang="en-US" sz="900"/>
           </a:p>
         </p:txBody>
       </p:sp>
@@ -10903,11 +10795,11 @@
           <a:bodyPr wrap="square" rtlCol="0" anchor="ctr"/>
           <a:lstStyle/>
           <a:p>
-            <a:pPr indent="0" marL="0">
-              <a:buNone/>
-            </a:pPr>
-            <a:r>
-              <a:rPr lang="en-US" sz="1050" dirty="0">
+            <a:pPr marL="0" indent="0">
+              <a:buNone/>
+            </a:pPr>
+            <a:r>
+              <a:rPr lang="en-US" sz="1050">
                 <a:solidFill>
                   <a:srgbClr val="1A2B3C"/>
                 </a:solidFill>
@@ -10917,7 +10809,7 @@
               </a:rPr>
               <a:t>Probabilistic approach using Bayes theorem — good contrast to deterministic LR</a:t>
             </a:r>
-            <a:endParaRPr lang="en-US" sz="1050" dirty="0"/>
+            <a:endParaRPr lang="en-US" sz="1050"/>
           </a:p>
         </p:txBody>
       </p:sp>
@@ -10942,11 +10834,11 @@
           <a:bodyPr wrap="square" rtlCol="0" anchor="ctr"/>
           <a:lstStyle/>
           <a:p>
-            <a:pPr indent="0" marL="0">
-              <a:buNone/>
-            </a:pPr>
-            <a:r>
-              <a:rPr lang="en-US" sz="900" b="1" spc="100" kern="0" dirty="0">
+            <a:pPr marL="0" indent="0">
+              <a:buNone/>
+            </a:pPr>
+            <a:r>
+              <a:rPr lang="en-US" sz="900" b="1" kern="0" spc="100">
                 <a:solidFill>
                   <a:srgbClr val="7B1FA2"/>
                 </a:solidFill>
@@ -10956,7 +10848,7 @@
               </a:rPr>
               <a:t>LIMITATION</a:t>
             </a:r>
-            <a:endParaRPr lang="en-US" sz="900" dirty="0"/>
+            <a:endParaRPr lang="en-US" sz="900"/>
           </a:p>
         </p:txBody>
       </p:sp>
@@ -10981,11 +10873,11 @@
           <a:bodyPr wrap="square" rtlCol="0" anchor="ctr"/>
           <a:lstStyle/>
           <a:p>
-            <a:pPr indent="0" marL="0">
-              <a:buNone/>
-            </a:pPr>
-            <a:r>
-              <a:rPr lang="en-US" sz="1050" dirty="0">
+            <a:pPr marL="0" indent="0">
+              <a:buNone/>
+            </a:pPr>
+            <a:r>
+              <a:rPr lang="en-US" sz="1050">
                 <a:solidFill>
                   <a:srgbClr val="1A2B3C"/>
                 </a:solidFill>
@@ -10995,7 +10887,7 @@
               </a:rPr>
               <a:t>Assumes feature independence — violated (PAY_AMT1–6 correlations &gt; 0.9)</a:t>
             </a:r>
-            <a:endParaRPr lang="en-US" sz="1050" dirty="0"/>
+            <a:endParaRPr lang="en-US" sz="1050"/>
           </a:p>
         </p:txBody>
       </p:sp>
@@ -11020,11 +10912,11 @@
           <a:bodyPr wrap="square" rtlCol="0" anchor="ctr"/>
           <a:lstStyle/>
           <a:p>
-            <a:pPr indent="0" marL="0">
-              <a:buNone/>
-            </a:pPr>
-            <a:r>
-              <a:rPr lang="en-US" sz="900" b="1" spc="100" kern="0" dirty="0">
+            <a:pPr marL="0" indent="0">
+              <a:buNone/>
+            </a:pPr>
+            <a:r>
+              <a:rPr lang="en-US" sz="900" b="1" kern="0" spc="100">
                 <a:solidFill>
                   <a:srgbClr val="7B1FA2"/>
                 </a:solidFill>
@@ -11034,7 +10926,7 @@
               </a:rPr>
               <a:t>KEY FIX</a:t>
             </a:r>
-            <a:endParaRPr lang="en-US" sz="900" dirty="0"/>
+            <a:endParaRPr lang="en-US" sz="900"/>
           </a:p>
         </p:txBody>
       </p:sp>
@@ -11059,11 +10951,11 @@
           <a:bodyPr wrap="square" rtlCol="0" anchor="ctr"/>
           <a:lstStyle/>
           <a:p>
-            <a:pPr indent="0" marL="0">
-              <a:buNone/>
-            </a:pPr>
-            <a:r>
-              <a:rPr lang="en-US" sz="1050" dirty="0">
+            <a:pPr marL="0" indent="0">
+              <a:buNone/>
+            </a:pPr>
+            <a:r>
+              <a:rPr lang="en-US" sz="1050">
                 <a:solidFill>
                   <a:srgbClr val="1A2B3C"/>
                 </a:solidFill>
@@ -11073,7 +10965,7 @@
               </a:rPr>
               <a:t>No class_weight support; expected lower performance</a:t>
             </a:r>
-            <a:endParaRPr lang="en-US" sz="1050" dirty="0"/>
+            <a:endParaRPr lang="en-US" sz="1050"/>
           </a:p>
         </p:txBody>
       </p:sp>
@@ -11101,7 +10993,7 @@
             <a:prstDash val="solid"/>
           </a:ln>
           <a:effectLst>
-            <a:outerShdw sx="100000" sy="100000" kx="0" ky="0" algn="bl" rotWithShape="0" blurRad="101600" dist="38100" dir="8100000">
+            <a:outerShdw blurRad="101600" dist="38100" dir="8100000" algn="bl" rotWithShape="0">
               <a:srgbClr val="000000">
                 <a:alpha val="12000"/>
               </a:srgbClr>
@@ -11155,11 +11047,11 @@
           <a:bodyPr wrap="square" rtlCol="0" anchor="ctr"/>
           <a:lstStyle/>
           <a:p>
-            <a:pPr algn="ctr" indent="0" marL="0">
-              <a:buNone/>
-            </a:pPr>
-            <a:r>
-              <a:rPr lang="en-US" sz="1000" b="1" spc="300" kern="0" dirty="0">
+            <a:pPr marL="0" indent="0" algn="ctr">
+              <a:buNone/>
+            </a:pPr>
+            <a:r>
+              <a:rPr lang="en-US" sz="1000" b="1" kern="0" spc="300">
                 <a:solidFill>
                   <a:srgbClr val="FFFFFF"/>
                 </a:solidFill>
@@ -11169,7 +11061,7 @@
               </a:rPr>
               <a:t>BEST MODEL</a:t>
             </a:r>
-            <a:endParaRPr lang="en-US" sz="1000" dirty="0"/>
+            <a:endParaRPr lang="en-US" sz="1000"/>
           </a:p>
         </p:txBody>
       </p:sp>
@@ -11194,11 +11086,11 @@
           <a:bodyPr wrap="square" rtlCol="0" anchor="ctr"/>
           <a:lstStyle/>
           <a:p>
-            <a:pPr indent="0" marL="0">
-              <a:buNone/>
-            </a:pPr>
-            <a:r>
-              <a:rPr lang="en-US" sz="1400" b="1" dirty="0">
+            <a:pPr marL="0" indent="0">
+              <a:buNone/>
+            </a:pPr>
+            <a:r>
+              <a:rPr lang="en-US" sz="1400" b="1">
                 <a:solidFill>
                   <a:srgbClr val="0D2137"/>
                 </a:solidFill>
@@ -11208,7 +11100,7 @@
               </a:rPr>
               <a:t>Decision Tree</a:t>
             </a:r>
-            <a:endParaRPr lang="en-US" sz="1400" dirty="0"/>
+            <a:endParaRPr lang="en-US" sz="1400"/>
           </a:p>
         </p:txBody>
       </p:sp>
@@ -11233,11 +11125,11 @@
           <a:bodyPr wrap="square" rtlCol="0" anchor="ctr"/>
           <a:lstStyle/>
           <a:p>
-            <a:pPr indent="0" marL="0">
-              <a:buNone/>
-            </a:pPr>
-            <a:r>
-              <a:rPr lang="en-US" sz="900" b="1" spc="100" kern="0" dirty="0">
+            <a:pPr marL="0" indent="0">
+              <a:buNone/>
+            </a:pPr>
+            <a:r>
+              <a:rPr lang="en-US" sz="900" b="1" kern="0" spc="100">
                 <a:solidFill>
                   <a:srgbClr val="00695C"/>
                 </a:solidFill>
@@ -11247,7 +11139,7 @@
               </a:rPr>
               <a:t>WHY CHOSEN</a:t>
             </a:r>
-            <a:endParaRPr lang="en-US" sz="900" dirty="0"/>
+            <a:endParaRPr lang="en-US" sz="900"/>
           </a:p>
         </p:txBody>
       </p:sp>
@@ -11272,11 +11164,11 @@
           <a:bodyPr wrap="square" rtlCol="0" anchor="ctr"/>
           <a:lstStyle/>
           <a:p>
-            <a:pPr indent="0" marL="0">
-              <a:buNone/>
-            </a:pPr>
-            <a:r>
-              <a:rPr lang="en-US" sz="1050" dirty="0">
+            <a:pPr marL="0" indent="0">
+              <a:buNone/>
+            </a:pPr>
+            <a:r>
+              <a:rPr lang="en-US" sz="1050">
                 <a:solidFill>
                   <a:srgbClr val="1A2B3C"/>
                 </a:solidFill>
@@ -11286,7 +11178,7 @@
               </a:rPr>
               <a:t>Captures non-linear relationships without requiring feature scaling</a:t>
             </a:r>
-            <a:endParaRPr lang="en-US" sz="1050" dirty="0"/>
+            <a:endParaRPr lang="en-US" sz="1050"/>
           </a:p>
         </p:txBody>
       </p:sp>
@@ -11311,11 +11203,11 @@
           <a:bodyPr wrap="square" rtlCol="0" anchor="ctr"/>
           <a:lstStyle/>
           <a:p>
-            <a:pPr indent="0" marL="0">
-              <a:buNone/>
-            </a:pPr>
-            <a:r>
-              <a:rPr lang="en-US" sz="900" b="1" spc="100" kern="0" dirty="0">
+            <a:pPr marL="0" indent="0">
+              <a:buNone/>
+            </a:pPr>
+            <a:r>
+              <a:rPr lang="en-US" sz="900" b="1" kern="0" spc="100">
                 <a:solidFill>
                   <a:srgbClr val="00695C"/>
                 </a:solidFill>
@@ -11325,7 +11217,7 @@
               </a:rPr>
               <a:t>LIMITATION</a:t>
             </a:r>
-            <a:endParaRPr lang="en-US" sz="900" dirty="0"/>
+            <a:endParaRPr lang="en-US" sz="900"/>
           </a:p>
         </p:txBody>
       </p:sp>
@@ -11350,11 +11242,11 @@
           <a:bodyPr wrap="square" rtlCol="0" anchor="ctr"/>
           <a:lstStyle/>
           <a:p>
-            <a:pPr indent="0" marL="0">
-              <a:buNone/>
-            </a:pPr>
-            <a:r>
-              <a:rPr lang="en-US" sz="1050" dirty="0">
+            <a:pPr marL="0" indent="0">
+              <a:buNone/>
+            </a:pPr>
+            <a:r>
+              <a:rPr lang="en-US" sz="1050">
                 <a:solidFill>
                   <a:srgbClr val="1A2B3C"/>
                 </a:solidFill>
@@ -11364,7 +11256,7 @@
               </a:rPr>
               <a:t>Prone to overfitting — controlled with max_depth=5, min_samples_leaf=20</a:t>
             </a:r>
-            <a:endParaRPr lang="en-US" sz="1050" dirty="0"/>
+            <a:endParaRPr lang="en-US" sz="1050"/>
           </a:p>
         </p:txBody>
       </p:sp>
@@ -11389,11 +11281,11 @@
           <a:bodyPr wrap="square" rtlCol="0" anchor="ctr"/>
           <a:lstStyle/>
           <a:p>
-            <a:pPr indent="0" marL="0">
-              <a:buNone/>
-            </a:pPr>
-            <a:r>
-              <a:rPr lang="en-US" sz="900" b="1" spc="100" kern="0" dirty="0">
+            <a:pPr marL="0" indent="0">
+              <a:buNone/>
+            </a:pPr>
+            <a:r>
+              <a:rPr lang="en-US" sz="900" b="1" kern="0" spc="100">
                 <a:solidFill>
                   <a:srgbClr val="00695C"/>
                 </a:solidFill>
@@ -11403,7 +11295,7 @@
               </a:rPr>
               <a:t>KEY FIX</a:t>
             </a:r>
-            <a:endParaRPr lang="en-US" sz="900" dirty="0"/>
+            <a:endParaRPr lang="en-US" sz="900"/>
           </a:p>
         </p:txBody>
       </p:sp>
@@ -11428,11 +11320,11 @@
           <a:bodyPr wrap="square" rtlCol="0" anchor="ctr"/>
           <a:lstStyle/>
           <a:p>
-            <a:pPr indent="0" marL="0">
-              <a:buNone/>
-            </a:pPr>
-            <a:r>
-              <a:rPr lang="en-US" sz="1050" dirty="0">
+            <a:pPr marL="0" indent="0">
+              <a:buNone/>
+            </a:pPr>
+            <a:r>
+              <a:rPr lang="en-US" sz="1050">
                 <a:solidFill>
                   <a:srgbClr val="1A2B3C"/>
                 </a:solidFill>
@@ -11442,7 +11334,7 @@
               </a:rPr>
               <a:t>Gini impurity as criterion; class_weight='balanced' applied</a:t>
             </a:r>
-            <a:endParaRPr lang="en-US" sz="1050" dirty="0"/>
+            <a:endParaRPr lang="en-US" sz="1050"/>
           </a:p>
         </p:txBody>
       </p:sp>
@@ -11462,6 +11354,7 @@
         <a:solidFill>
           <a:srgbClr val="0D2137"/>
         </a:solidFill>
+        <a:effectLst/>
       </p:bgPr>
     </p:bg>
     <p:spTree>
@@ -11499,11 +11392,11 @@
           <a:bodyPr wrap="square" rtlCol="0" anchor="ctr"/>
           <a:lstStyle/>
           <a:p>
-            <a:pPr indent="0" marL="0">
-              <a:buNone/>
-            </a:pPr>
-            <a:r>
-              <a:rPr lang="en-US" sz="3000" b="1" dirty="0">
+            <a:pPr marL="0" indent="0">
+              <a:buNone/>
+            </a:pPr>
+            <a:r>
+              <a:rPr lang="en-US" sz="3000" b="1">
                 <a:solidFill>
                   <a:srgbClr val="FFFFFF"/>
                 </a:solidFill>
@@ -11513,7 +11406,7 @@
               </a:rPr>
               <a:t>Evaluation Framework</a:t>
             </a:r>
-            <a:endParaRPr lang="en-US" sz="3000" dirty="0"/>
+            <a:endParaRPr lang="en-US" sz="3000"/>
           </a:p>
         </p:txBody>
       </p:sp>
@@ -11563,11 +11456,11 @@
           <a:bodyPr wrap="square" rtlCol="0" anchor="ctr"/>
           <a:lstStyle/>
           <a:p>
-            <a:pPr indent="0" marL="0">
-              <a:buNone/>
-            </a:pPr>
-            <a:r>
-              <a:rPr lang="en-US" sz="1200" dirty="0">
+            <a:pPr marL="0" indent="0">
+              <a:buNone/>
+            </a:pPr>
+            <a:r>
+              <a:rPr lang="en-US" sz="1200">
                 <a:solidFill>
                   <a:srgbClr val="4FC3F7"/>
                 </a:solidFill>
@@ -11577,7 +11470,7 @@
               </a:rPr>
               <a:t>Why we used multiple metrics — accuracy alone is misleading with 78/22 class split</a:t>
             </a:r>
-            <a:endParaRPr lang="en-US" sz="1200" dirty="0"/>
+            <a:endParaRPr lang="en-US" sz="1200"/>
           </a:p>
         </p:txBody>
       </p:sp>
@@ -11605,7 +11498,7 @@
             <a:prstDash val="solid"/>
           </a:ln>
           <a:effectLst>
-            <a:outerShdw sx="100000" sy="100000" kx="0" ky="0" algn="bl" rotWithShape="0" blurRad="101600" dist="38100" dir="8100000">
+            <a:outerShdw blurRad="101600" dist="38100" dir="8100000" algn="bl" rotWithShape="0">
               <a:srgbClr val="000000">
                 <a:alpha val="12000"/>
               </a:srgbClr>
@@ -11659,11 +11552,11 @@
           <a:bodyPr wrap="square" rtlCol="0" anchor="ctr"/>
           <a:lstStyle/>
           <a:p>
-            <a:pPr indent="0" marL="0">
-              <a:buNone/>
-            </a:pPr>
-            <a:r>
-              <a:rPr lang="en-US" sz="850" b="1" spc="100" kern="0" dirty="0">
+            <a:pPr marL="0" indent="0">
+              <a:buNone/>
+            </a:pPr>
+            <a:r>
+              <a:rPr lang="en-US" sz="850" b="1" kern="0" spc="100">
                 <a:solidFill>
                   <a:srgbClr val="F44336"/>
                 </a:solidFill>
@@ -11673,7 +11566,7 @@
               </a:rPr>
               <a:t>★ HIGHEST PRIORITY</a:t>
             </a:r>
-            <a:endParaRPr lang="en-US" sz="850" dirty="0"/>
+            <a:endParaRPr lang="en-US" sz="850"/>
           </a:p>
         </p:txBody>
       </p:sp>
@@ -11698,11 +11591,11 @@
           <a:bodyPr wrap="square" rtlCol="0" anchor="ctr"/>
           <a:lstStyle/>
           <a:p>
-            <a:pPr indent="0" marL="0">
-              <a:buNone/>
-            </a:pPr>
-            <a:r>
-              <a:rPr lang="en-US" sz="1300" b="1" dirty="0">
+            <a:pPr marL="0" indent="0">
+              <a:buNone/>
+            </a:pPr>
+            <a:r>
+              <a:rPr lang="en-US" sz="1300" b="1">
                 <a:solidFill>
                   <a:srgbClr val="FFFFFF"/>
                 </a:solidFill>
@@ -11712,7 +11605,7 @@
               </a:rPr>
               <a:t>Recall (Default class)</a:t>
             </a:r>
-            <a:endParaRPr lang="en-US" sz="1300" dirty="0"/>
+            <a:endParaRPr lang="en-US" sz="1300"/>
           </a:p>
         </p:txBody>
       </p:sp>
@@ -11762,11 +11655,11 @@
           <a:bodyPr wrap="square" rtlCol="0" anchor="ctr"/>
           <a:lstStyle/>
           <a:p>
-            <a:pPr indent="0" marL="0">
-              <a:buNone/>
-            </a:pPr>
-            <a:r>
-              <a:rPr lang="en-US" sz="1050" dirty="0">
+            <a:pPr marL="0" indent="0">
+              <a:buNone/>
+            </a:pPr>
+            <a:r>
+              <a:rPr lang="en-US" sz="1050">
                 <a:solidFill>
                   <a:srgbClr val="4FC3F7"/>
                 </a:solidFill>
@@ -11776,7 +11669,7 @@
               </a:rPr>
               <a:t>Missing a real defaulter is the most costly error for the bank — false negatives mean undetected risk</a:t>
             </a:r>
-            <a:endParaRPr lang="en-US" sz="1050" dirty="0"/>
+            <a:endParaRPr lang="en-US" sz="1050"/>
           </a:p>
         </p:txBody>
       </p:sp>
@@ -11804,7 +11697,7 @@
             <a:prstDash val="solid"/>
           </a:ln>
           <a:effectLst>
-            <a:outerShdw sx="100000" sy="100000" kx="0" ky="0" algn="bl" rotWithShape="0" blurRad="101600" dist="38100" dir="8100000">
+            <a:outerShdw blurRad="101600" dist="38100" dir="8100000" algn="bl" rotWithShape="0">
               <a:srgbClr val="000000">
                 <a:alpha val="12000"/>
               </a:srgbClr>
@@ -11858,11 +11751,11 @@
           <a:bodyPr wrap="square" rtlCol="0" anchor="ctr"/>
           <a:lstStyle/>
           <a:p>
-            <a:pPr indent="0" marL="0">
-              <a:buNone/>
-            </a:pPr>
-            <a:r>
-              <a:rPr lang="en-US" sz="850" b="1" spc="100" kern="0" dirty="0">
+            <a:pPr marL="0" indent="0">
+              <a:buNone/>
+            </a:pPr>
+            <a:r>
+              <a:rPr lang="en-US" sz="850" b="1" kern="0" spc="100">
                 <a:solidFill>
                   <a:srgbClr val="FFB300"/>
                 </a:solidFill>
@@ -11872,7 +11765,7 @@
               </a:rPr>
               <a:t>SECONDARY</a:t>
             </a:r>
-            <a:endParaRPr lang="en-US" sz="850" dirty="0"/>
+            <a:endParaRPr lang="en-US" sz="850"/>
           </a:p>
         </p:txBody>
       </p:sp>
@@ -11897,11 +11790,11 @@
           <a:bodyPr wrap="square" rtlCol="0" anchor="ctr"/>
           <a:lstStyle/>
           <a:p>
-            <a:pPr indent="0" marL="0">
-              <a:buNone/>
-            </a:pPr>
-            <a:r>
-              <a:rPr lang="en-US" sz="1300" b="1" dirty="0">
+            <a:pPr marL="0" indent="0">
+              <a:buNone/>
+            </a:pPr>
+            <a:r>
+              <a:rPr lang="en-US" sz="1300" b="1">
                 <a:solidFill>
                   <a:srgbClr val="FFFFFF"/>
                 </a:solidFill>
@@ -11911,7 +11804,7 @@
               </a:rPr>
               <a:t>Precision (Default class)</a:t>
             </a:r>
-            <a:endParaRPr lang="en-US" sz="1300" dirty="0"/>
+            <a:endParaRPr lang="en-US" sz="1300"/>
           </a:p>
         </p:txBody>
       </p:sp>
@@ -11961,11 +11854,11 @@
           <a:bodyPr wrap="square" rtlCol="0" anchor="ctr"/>
           <a:lstStyle/>
           <a:p>
-            <a:pPr indent="0" marL="0">
-              <a:buNone/>
-            </a:pPr>
-            <a:r>
-              <a:rPr lang="en-US" sz="1050" dirty="0">
+            <a:pPr marL="0" indent="0">
+              <a:buNone/>
+            </a:pPr>
+            <a:r>
+              <a:rPr lang="en-US" sz="1050">
                 <a:solidFill>
                   <a:srgbClr val="4FC3F7"/>
                 </a:solidFill>
@@ -11975,7 +11868,7 @@
               </a:rPr>
               <a:t>Also important — too many false positives rejects creditworthy customers unnecessarily</a:t>
             </a:r>
-            <a:endParaRPr lang="en-US" sz="1050" dirty="0"/>
+            <a:endParaRPr lang="en-US" sz="1050"/>
           </a:p>
         </p:txBody>
       </p:sp>
@@ -12003,7 +11896,7 @@
             <a:prstDash val="solid"/>
           </a:ln>
           <a:effectLst>
-            <a:outerShdw sx="100000" sy="100000" kx="0" ky="0" algn="bl" rotWithShape="0" blurRad="101600" dist="38100" dir="8100000">
+            <a:outerShdw blurRad="101600" dist="38100" dir="8100000" algn="bl" rotWithShape="0">
               <a:srgbClr val="000000">
                 <a:alpha val="12000"/>
               </a:srgbClr>
@@ -12057,11 +11950,11 @@
           <a:bodyPr wrap="square" rtlCol="0" anchor="ctr"/>
           <a:lstStyle/>
           <a:p>
-            <a:pPr indent="0" marL="0">
-              <a:buNone/>
-            </a:pPr>
-            <a:r>
-              <a:rPr lang="en-US" sz="850" b="1" spc="100" kern="0" dirty="0">
+            <a:pPr marL="0" indent="0">
+              <a:buNone/>
+            </a:pPr>
+            <a:r>
+              <a:rPr lang="en-US" sz="850" b="1" kern="0" spc="100">
                 <a:solidFill>
                   <a:srgbClr val="00B8D4"/>
                 </a:solidFill>
@@ -12071,7 +11964,7 @@
               </a:rPr>
               <a:t>BALANCE METRIC</a:t>
             </a:r>
-            <a:endParaRPr lang="en-US" sz="850" dirty="0"/>
+            <a:endParaRPr lang="en-US" sz="850"/>
           </a:p>
         </p:txBody>
       </p:sp>
@@ -12096,11 +11989,11 @@
           <a:bodyPr wrap="square" rtlCol="0" anchor="ctr"/>
           <a:lstStyle/>
           <a:p>
-            <a:pPr indent="0" marL="0">
-              <a:buNone/>
-            </a:pPr>
-            <a:r>
-              <a:rPr lang="en-US" sz="1300" b="1" dirty="0">
+            <a:pPr marL="0" indent="0">
+              <a:buNone/>
+            </a:pPr>
+            <a:r>
+              <a:rPr lang="en-US" sz="1300" b="1">
                 <a:solidFill>
                   <a:srgbClr val="FFFFFF"/>
                 </a:solidFill>
@@ -12110,7 +12003,7 @@
               </a:rPr>
               <a:t>F1-Score</a:t>
             </a:r>
-            <a:endParaRPr lang="en-US" sz="1300" dirty="0"/>
+            <a:endParaRPr lang="en-US" sz="1300"/>
           </a:p>
         </p:txBody>
       </p:sp>
@@ -12160,11 +12053,11 @@
           <a:bodyPr wrap="square" rtlCol="0" anchor="ctr"/>
           <a:lstStyle/>
           <a:p>
-            <a:pPr indent="0" marL="0">
-              <a:buNone/>
-            </a:pPr>
-            <a:r>
-              <a:rPr lang="en-US" sz="1050" dirty="0">
+            <a:pPr marL="0" indent="0">
+              <a:buNone/>
+            </a:pPr>
+            <a:r>
+              <a:rPr lang="en-US" sz="1050">
                 <a:solidFill>
                   <a:srgbClr val="4FC3F7"/>
                 </a:solidFill>
@@ -12174,7 +12067,7 @@
               </a:rPr>
               <a:t>Harmonic mean of precision &amp; recall — single score that penalises extreme imbalance between the two</a:t>
             </a:r>
-            <a:endParaRPr lang="en-US" sz="1050" dirty="0"/>
+            <a:endParaRPr lang="en-US" sz="1050"/>
           </a:p>
         </p:txBody>
       </p:sp>
@@ -12202,7 +12095,7 @@
             <a:prstDash val="solid"/>
           </a:ln>
           <a:effectLst>
-            <a:outerShdw sx="100000" sy="100000" kx="0" ky="0" algn="bl" rotWithShape="0" blurRad="101600" dist="38100" dir="8100000">
+            <a:outerShdw blurRad="101600" dist="38100" dir="8100000" algn="bl" rotWithShape="0">
               <a:srgbClr val="000000">
                 <a:alpha val="12000"/>
               </a:srgbClr>
@@ -12256,11 +12149,11 @@
           <a:bodyPr wrap="square" rtlCol="0" anchor="ctr"/>
           <a:lstStyle/>
           <a:p>
-            <a:pPr indent="0" marL="0">
-              <a:buNone/>
-            </a:pPr>
-            <a:r>
-              <a:rPr lang="en-US" sz="850" b="1" spc="100" kern="0" dirty="0">
+            <a:pPr marL="0" indent="0">
+              <a:buNone/>
+            </a:pPr>
+            <a:r>
+              <a:rPr lang="en-US" sz="850" b="1" kern="0" spc="100">
                 <a:solidFill>
                   <a:srgbClr val="00C853"/>
                 </a:solidFill>
@@ -12270,7 +12163,7 @@
               </a:rPr>
               <a:t>PRIMARY COMPARISON</a:t>
             </a:r>
-            <a:endParaRPr lang="en-US" sz="850" dirty="0"/>
+            <a:endParaRPr lang="en-US" sz="850"/>
           </a:p>
         </p:txBody>
       </p:sp>
@@ -12295,11 +12188,11 @@
           <a:bodyPr wrap="square" rtlCol="0" anchor="ctr"/>
           <a:lstStyle/>
           <a:p>
-            <a:pPr indent="0" marL="0">
-              <a:buNone/>
-            </a:pPr>
-            <a:r>
-              <a:rPr lang="en-US" sz="1400" b="1" dirty="0">
+            <a:pPr marL="0" indent="0">
+              <a:buNone/>
+            </a:pPr>
+            <a:r>
+              <a:rPr lang="en-US" sz="1400" b="1">
                 <a:solidFill>
                   <a:srgbClr val="FFFFFF"/>
                 </a:solidFill>
@@ -12309,7 +12202,7 @@
               </a:rPr>
               <a:t>ROC-AUC</a:t>
             </a:r>
-            <a:endParaRPr lang="en-US" sz="1400" dirty="0"/>
+            <a:endParaRPr lang="en-US" sz="1400"/>
           </a:p>
         </p:txBody>
       </p:sp>
@@ -12359,11 +12252,11 @@
           <a:bodyPr wrap="square" rtlCol="0" anchor="ctr"/>
           <a:lstStyle/>
           <a:p>
-            <a:pPr indent="0" marL="0">
-              <a:buNone/>
-            </a:pPr>
-            <a:r>
-              <a:rPr lang="en-US" sz="1100" dirty="0">
+            <a:pPr marL="0" indent="0">
+              <a:buNone/>
+            </a:pPr>
+            <a:r>
+              <a:rPr lang="en-US" sz="1100">
                 <a:solidFill>
                   <a:srgbClr val="4FC3F7"/>
                 </a:solidFill>
@@ -12373,7 +12266,7 @@
               </a:rPr>
               <a:t>Measures discrimination ability across ALL decision thresholds — robust to class imbalance, main ranking metric</a:t>
             </a:r>
-            <a:endParaRPr lang="en-US" sz="1100" dirty="0"/>
+            <a:endParaRPr lang="en-US" sz="1100"/>
           </a:p>
         </p:txBody>
       </p:sp>
@@ -12401,7 +12294,7 @@
             <a:prstDash val="solid"/>
           </a:ln>
           <a:effectLst>
-            <a:outerShdw sx="100000" sy="100000" kx="0" ky="0" algn="bl" rotWithShape="0" blurRad="101600" dist="38100" dir="8100000">
+            <a:outerShdw blurRad="101600" dist="38100" dir="8100000" algn="bl" rotWithShape="0">
               <a:srgbClr val="000000">
                 <a:alpha val="12000"/>
               </a:srgbClr>
@@ -12455,11 +12348,11 @@
           <a:bodyPr wrap="square" rtlCol="0" anchor="ctr"/>
           <a:lstStyle/>
           <a:p>
-            <a:pPr indent="0" marL="0">
-              <a:buNone/>
-            </a:pPr>
-            <a:r>
-              <a:rPr lang="en-US" sz="850" b="1" spc="100" kern="0" dirty="0">
+            <a:pPr marL="0" indent="0">
+              <a:buNone/>
+            </a:pPr>
+            <a:r>
+              <a:rPr lang="en-US" sz="850" b="1" kern="0" spc="100">
                 <a:solidFill>
                   <a:srgbClr val="4FC3F7"/>
                 </a:solidFill>
@@ -12469,7 +12362,7 @@
               </a:rPr>
               <a:t>RELIABILITY CHECK</a:t>
             </a:r>
-            <a:endParaRPr lang="en-US" sz="850" dirty="0"/>
+            <a:endParaRPr lang="en-US" sz="850"/>
           </a:p>
         </p:txBody>
       </p:sp>
@@ -12494,11 +12387,11 @@
           <a:bodyPr wrap="square" rtlCol="0" anchor="ctr"/>
           <a:lstStyle/>
           <a:p>
-            <a:pPr indent="0" marL="0">
-              <a:buNone/>
-            </a:pPr>
-            <a:r>
-              <a:rPr lang="en-US" sz="1400" b="1" dirty="0">
+            <a:pPr marL="0" indent="0">
+              <a:buNone/>
+            </a:pPr>
+            <a:r>
+              <a:rPr lang="en-US" sz="1400" b="1">
                 <a:solidFill>
                   <a:srgbClr val="FFFFFF"/>
                 </a:solidFill>
@@ -12508,7 +12401,7 @@
               </a:rPr>
               <a:t>5-Fold Stratified CV</a:t>
             </a:r>
-            <a:endParaRPr lang="en-US" sz="1400" dirty="0"/>
+            <a:endParaRPr lang="en-US" sz="1400"/>
           </a:p>
         </p:txBody>
       </p:sp>
@@ -12558,11 +12451,11 @@
           <a:bodyPr wrap="square" rtlCol="0" anchor="ctr"/>
           <a:lstStyle/>
           <a:p>
-            <a:pPr indent="0" marL="0">
-              <a:buNone/>
-            </a:pPr>
-            <a:r>
-              <a:rPr lang="en-US" sz="1100" dirty="0">
+            <a:pPr marL="0" indent="0">
+              <a:buNone/>
+            </a:pPr>
+            <a:r>
+              <a:rPr lang="en-US" sz="1100">
                 <a:solidFill>
                   <a:srgbClr val="4FC3F7"/>
                 </a:solidFill>
@@ -12572,7 +12465,7 @@
               </a:rPr>
               <a:t>Each fold preserves the 22.12% default rate — guards against lucky/unlucky single splits and measures model stability</a:t>
             </a:r>
-            <a:endParaRPr lang="en-US" sz="1100" dirty="0"/>
+            <a:endParaRPr lang="en-US" sz="1100"/>
           </a:p>
         </p:txBody>
       </p:sp>
@@ -12592,6 +12485,7 @@
         <a:solidFill>
           <a:srgbClr val="F0F6FC"/>
         </a:solidFill>
+        <a:effectLst/>
       </p:bgPr>
     </p:bg>
     <p:spTree>
@@ -12654,11 +12548,11 @@
           <a:bodyPr wrap="square" rtlCol="0" anchor="ctr"/>
           <a:lstStyle/>
           <a:p>
-            <a:pPr indent="0" marL="0">
-              <a:buNone/>
-            </a:pPr>
-            <a:r>
-              <a:rPr lang="en-US" sz="2600" b="1" dirty="0">
+            <a:pPr marL="0" indent="0">
+              <a:buNone/>
+            </a:pPr>
+            <a:r>
+              <a:rPr lang="en-US" sz="2600" b="1">
                 <a:solidFill>
                   <a:srgbClr val="FFFFFF"/>
                 </a:solidFill>
@@ -12668,7 +12562,7 @@
               </a:rPr>
               <a:t>Model Performance Results</a:t>
             </a:r>
-            <a:endParaRPr lang="en-US" sz="2600" dirty="0"/>
+            <a:endParaRPr lang="en-US" sz="2600"/>
           </a:p>
         </p:txBody>
       </p:sp>
@@ -12693,11 +12587,11 @@
           <a:bodyPr wrap="square" rtlCol="0" anchor="ctr"/>
           <a:lstStyle/>
           <a:p>
-            <a:pPr indent="0" marL="0">
-              <a:buNone/>
-            </a:pPr>
-            <a:r>
-              <a:rPr lang="en-US" sz="1100" dirty="0">
+            <a:pPr marL="0" indent="0">
+              <a:buNone/>
+            </a:pPr>
+            <a:r>
+              <a:rPr lang="en-US" sz="1100">
                 <a:solidFill>
                   <a:srgbClr val="546E7A"/>
                 </a:solidFill>
@@ -12707,7 +12601,7 @@
               </a:rPr>
               <a:t>6,000-sample stratified test set  |  * Metrics for Default (1) class</a:t>
             </a:r>
-            <a:endParaRPr lang="en-US" sz="1100" dirty="0"/>
+            <a:endParaRPr lang="en-US" sz="1100"/>
           </a:p>
         </p:txBody>
       </p:sp>
@@ -12734,13 +12628,55 @@
             <a:tbl>
               <a:tblPr/>
               <a:tblGrid>
-                <a:gridCol w="1828800"/>
-                <a:gridCol w="1097280"/>
-                <a:gridCol w="1097280"/>
-                <a:gridCol w="1097280"/>
-                <a:gridCol w="1097280"/>
-                <a:gridCol w="1097280"/>
-                <a:gridCol w="1463040"/>
+                <a:gridCol w="1828800">
+                  <a:extLst>
+                    <a:ext uri="{9D8B030D-6E8A-4147-A177-3AD203B41FA5}">
+                      <a16:colId xmlns:a16="http://schemas.microsoft.com/office/drawing/2014/main" val="20000"/>
+                    </a:ext>
+                  </a:extLst>
+                </a:gridCol>
+                <a:gridCol w="1097280">
+                  <a:extLst>
+                    <a:ext uri="{9D8B030D-6E8A-4147-A177-3AD203B41FA5}">
+                      <a16:colId xmlns:a16="http://schemas.microsoft.com/office/drawing/2014/main" val="20001"/>
+                    </a:ext>
+                  </a:extLst>
+                </a:gridCol>
+                <a:gridCol w="1097280">
+                  <a:extLst>
+                    <a:ext uri="{9D8B030D-6E8A-4147-A177-3AD203B41FA5}">
+                      <a16:colId xmlns:a16="http://schemas.microsoft.com/office/drawing/2014/main" val="20002"/>
+                    </a:ext>
+                  </a:extLst>
+                </a:gridCol>
+                <a:gridCol w="1097280">
+                  <a:extLst>
+                    <a:ext uri="{9D8B030D-6E8A-4147-A177-3AD203B41FA5}">
+                      <a16:colId xmlns:a16="http://schemas.microsoft.com/office/drawing/2014/main" val="20003"/>
+                    </a:ext>
+                  </a:extLst>
+                </a:gridCol>
+                <a:gridCol w="1097280">
+                  <a:extLst>
+                    <a:ext uri="{9D8B030D-6E8A-4147-A177-3AD203B41FA5}">
+                      <a16:colId xmlns:a16="http://schemas.microsoft.com/office/drawing/2014/main" val="20004"/>
+                    </a:ext>
+                  </a:extLst>
+                </a:gridCol>
+                <a:gridCol w="1097280">
+                  <a:extLst>
+                    <a:ext uri="{9D8B030D-6E8A-4147-A177-3AD203B41FA5}">
+                      <a16:colId xmlns:a16="http://schemas.microsoft.com/office/drawing/2014/main" val="20005"/>
+                    </a:ext>
+                  </a:extLst>
+                </a:gridCol>
+                <a:gridCol w="1463040">
+                  <a:extLst>
+                    <a:ext uri="{9D8B030D-6E8A-4147-A177-3AD203B41FA5}">
+                      <a16:colId xmlns:a16="http://schemas.microsoft.com/office/drawing/2014/main" val="20006"/>
+                    </a:ext>
+                  </a:extLst>
+                </a:gridCol>
               </a:tblGrid>
               <a:tr h="457200">
                 <a:tc>
@@ -12748,21 +12684,21 @@
                     <a:bodyPr/>
                     <a:lstStyle/>
                     <a:p>
-                      <a:pPr algn="ctr" indent="0" marL="0">
+                      <a:pPr marL="0" indent="0" algn="ctr">
                         <a:buNone/>
                       </a:pPr>
                       <a:r>
-                        <a:rPr lang="en-US" sz="1200" b="1" dirty="0">
+                        <a:rPr lang="en-US" sz="1200" b="1">
                           <a:solidFill>
                             <a:srgbClr val="FFFFFF"/>
                           </a:solidFill>
                         </a:rPr>
                         <a:t>Model</a:t>
                       </a:r>
-                      <a:endParaRPr lang="en-US" sz="1200" dirty="0"/>
+                      <a:endParaRPr lang="en-US" sz="1200"/>
                     </a:p>
                   </a:txBody>
-                  <a:tcPr marL="91440" marR="91440" marT="45720" marB="45720">
+                  <a:tcPr>
                     <a:lnL w="6350" cap="flat" cmpd="sng" algn="ctr">
                       <a:solidFill>
                         <a:srgbClr val="BBDEFB"/>
@@ -12809,21 +12745,21 @@
                     <a:bodyPr/>
                     <a:lstStyle/>
                     <a:p>
-                      <a:pPr algn="ctr" indent="0" marL="0">
+                      <a:pPr marL="0" indent="0" algn="ctr">
                         <a:buNone/>
                       </a:pPr>
                       <a:r>
-                        <a:rPr lang="en-US" sz="1200" b="1" dirty="0">
+                        <a:rPr lang="en-US" sz="1200" b="1">
                           <a:solidFill>
                             <a:srgbClr val="FFFFFF"/>
                           </a:solidFill>
                         </a:rPr>
                         <a:t>Accuracy</a:t>
                       </a:r>
-                      <a:endParaRPr lang="en-US" sz="1200" dirty="0"/>
+                      <a:endParaRPr lang="en-US" sz="1200"/>
                     </a:p>
                   </a:txBody>
-                  <a:tcPr marL="91440" marR="91440" marT="45720" marB="45720">
+                  <a:tcPr>
                     <a:lnL w="6350" cap="flat" cmpd="sng" algn="ctr">
                       <a:solidFill>
                         <a:srgbClr val="BBDEFB"/>
@@ -12870,21 +12806,21 @@
                     <a:bodyPr/>
                     <a:lstStyle/>
                     <a:p>
-                      <a:pPr algn="ctr" indent="0" marL="0">
+                      <a:pPr marL="0" indent="0" algn="ctr">
                         <a:buNone/>
                       </a:pPr>
                       <a:r>
-                        <a:rPr lang="en-US" sz="1200" b="1" dirty="0">
+                        <a:rPr lang="en-US" sz="1200" b="1">
                           <a:solidFill>
                             <a:srgbClr val="FFFFFF"/>
                           </a:solidFill>
                         </a:rPr>
                         <a:t>Precision*</a:t>
                       </a:r>
-                      <a:endParaRPr lang="en-US" sz="1200" dirty="0"/>
+                      <a:endParaRPr lang="en-US" sz="1200"/>
                     </a:p>
                   </a:txBody>
-                  <a:tcPr marL="91440" marR="91440" marT="45720" marB="45720">
+                  <a:tcPr>
                     <a:lnL w="6350" cap="flat" cmpd="sng" algn="ctr">
                       <a:solidFill>
                         <a:srgbClr val="BBDEFB"/>
@@ -12931,21 +12867,21 @@
                     <a:bodyPr/>
                     <a:lstStyle/>
                     <a:p>
-                      <a:pPr algn="ctr" indent="0" marL="0">
+                      <a:pPr marL="0" indent="0" algn="ctr">
                         <a:buNone/>
                       </a:pPr>
                       <a:r>
-                        <a:rPr lang="en-US" sz="1200" b="1" dirty="0">
+                        <a:rPr lang="en-US" sz="1200" b="1">
                           <a:solidFill>
                             <a:srgbClr val="FFFFFF"/>
                           </a:solidFill>
                         </a:rPr>
                         <a:t>Recall*</a:t>
                       </a:r>
-                      <a:endParaRPr lang="en-US" sz="1200" dirty="0"/>
+                      <a:endParaRPr lang="en-US" sz="1200"/>
                     </a:p>
                   </a:txBody>
-                  <a:tcPr marL="91440" marR="91440" marT="45720" marB="45720">
+                  <a:tcPr>
                     <a:lnL w="6350" cap="flat" cmpd="sng" algn="ctr">
                       <a:solidFill>
                         <a:srgbClr val="BBDEFB"/>
@@ -12992,21 +12928,21 @@
                     <a:bodyPr/>
                     <a:lstStyle/>
                     <a:p>
-                      <a:pPr algn="ctr" indent="0" marL="0">
+                      <a:pPr marL="0" indent="0" algn="ctr">
                         <a:buNone/>
                       </a:pPr>
                       <a:r>
-                        <a:rPr lang="en-US" sz="1200" b="1" dirty="0">
+                        <a:rPr lang="en-US" sz="1200" b="1">
                           <a:solidFill>
                             <a:srgbClr val="FFFFFF"/>
                           </a:solidFill>
                         </a:rPr>
                         <a:t>F1-Score*</a:t>
                       </a:r>
-                      <a:endParaRPr lang="en-US" sz="1200" dirty="0"/>
+                      <a:endParaRPr lang="en-US" sz="1200"/>
                     </a:p>
                   </a:txBody>
-                  <a:tcPr marL="91440" marR="91440" marT="45720" marB="45720">
+                  <a:tcPr>
                     <a:lnL w="6350" cap="flat" cmpd="sng" algn="ctr">
                       <a:solidFill>
                         <a:srgbClr val="BBDEFB"/>
@@ -13053,21 +12989,21 @@
                     <a:bodyPr/>
                     <a:lstStyle/>
                     <a:p>
-                      <a:pPr algn="ctr" indent="0" marL="0">
+                      <a:pPr marL="0" indent="0" algn="ctr">
                         <a:buNone/>
                       </a:pPr>
                       <a:r>
-                        <a:rPr lang="en-US" sz="1200" b="1" dirty="0">
+                        <a:rPr lang="en-US" sz="1200" b="1">
                           <a:solidFill>
                             <a:srgbClr val="FFFFFF"/>
                           </a:solidFill>
                         </a:rPr>
                         <a:t>ROC-AUC</a:t>
                       </a:r>
-                      <a:endParaRPr lang="en-US" sz="1200" dirty="0"/>
+                      <a:endParaRPr lang="en-US" sz="1200"/>
                     </a:p>
                   </a:txBody>
-                  <a:tcPr marL="91440" marR="91440" marT="45720" marB="45720">
+                  <a:tcPr>
                     <a:lnL w="6350" cap="flat" cmpd="sng" algn="ctr">
                       <a:solidFill>
                         <a:srgbClr val="BBDEFB"/>
@@ -13114,21 +13050,21 @@
                     <a:bodyPr/>
                     <a:lstStyle/>
                     <a:p>
-                      <a:pPr algn="ctr" indent="0" marL="0">
+                      <a:pPr marL="0" indent="0" algn="ctr">
                         <a:buNone/>
                       </a:pPr>
                       <a:r>
-                        <a:rPr lang="en-US" sz="1200" b="1" dirty="0">
+                        <a:rPr lang="en-US" sz="1200" b="1">
                           <a:solidFill>
                             <a:srgbClr val="FFFFFF"/>
                           </a:solidFill>
                         </a:rPr>
                         <a:t>CV AUC (5-fold)</a:t>
                       </a:r>
-                      <a:endParaRPr lang="en-US" sz="1200" dirty="0"/>
+                      <a:endParaRPr lang="en-US" sz="1200"/>
                     </a:p>
                   </a:txBody>
-                  <a:tcPr marL="91440" marR="91440" marT="45720" marB="45720">
+                  <a:tcPr>
                     <a:lnL w="6350" cap="flat" cmpd="sng" algn="ctr">
                       <a:solidFill>
                         <a:srgbClr val="BBDEFB"/>
@@ -13170,6 +13106,11 @@
                     </a:solidFill>
                   </a:tcPr>
                 </a:tc>
+                <a:extLst>
+                  <a:ext uri="{0D108BD9-81ED-4DB2-BD59-A6C34878D82A}">
+                    <a16:rowId xmlns:a16="http://schemas.microsoft.com/office/drawing/2014/main" val="10000"/>
+                  </a:ext>
+                </a:extLst>
               </a:tr>
               <a:tr h="457200">
                 <a:tc>
@@ -13177,21 +13118,21 @@
                     <a:bodyPr/>
                     <a:lstStyle/>
                     <a:p>
-                      <a:pPr algn="l" indent="0" marL="0">
+                      <a:pPr marL="0" indent="0" algn="l">
                         <a:buNone/>
                       </a:pPr>
                       <a:r>
-                        <a:rPr lang="en-US" sz="1200" dirty="0">
+                        <a:rPr lang="en-US" sz="1200">
                           <a:solidFill>
                             <a:srgbClr val="000000"/>
                           </a:solidFill>
                         </a:rPr>
                         <a:t>Logistic Regression</a:t>
                       </a:r>
-                      <a:endParaRPr lang="en-US" sz="1200" dirty="0"/>
+                      <a:endParaRPr lang="en-US" sz="1200"/>
                     </a:p>
                   </a:txBody>
-                  <a:tcPr marL="91440" marR="91440" marT="45720" marB="45720">
+                  <a:tcPr>
                     <a:lnL w="6350" cap="flat" cmpd="sng" algn="ctr">
                       <a:solidFill>
                         <a:srgbClr val="BBDEFB"/>
@@ -13235,21 +13176,21 @@
                     <a:bodyPr/>
                     <a:lstStyle/>
                     <a:p>
-                      <a:pPr algn="ctr" indent="0" marL="0">
+                      <a:pPr marL="0" indent="0" algn="ctr">
                         <a:buNone/>
                       </a:pPr>
                       <a:r>
-                        <a:rPr lang="en-US" sz="1200" dirty="0">
+                        <a:rPr lang="en-US" sz="1200">
                           <a:solidFill>
                             <a:srgbClr val="000000"/>
                           </a:solidFill>
                         </a:rPr>
                         <a:t>0.6795</a:t>
                       </a:r>
-                      <a:endParaRPr lang="en-US" sz="1200" dirty="0"/>
+                      <a:endParaRPr lang="en-US" sz="1200"/>
                     </a:p>
                   </a:txBody>
-                  <a:tcPr marL="91440" marR="91440" marT="45720" marB="45720">
+                  <a:tcPr>
                     <a:lnL w="6350" cap="flat" cmpd="sng" algn="ctr">
                       <a:solidFill>
                         <a:srgbClr val="BBDEFB"/>
@@ -13293,21 +13234,21 @@
                     <a:bodyPr/>
                     <a:lstStyle/>
                     <a:p>
-                      <a:pPr algn="ctr" indent="0" marL="0">
+                      <a:pPr marL="0" indent="0" algn="ctr">
                         <a:buNone/>
                       </a:pPr>
                       <a:r>
-                        <a:rPr lang="en-US" sz="1200" dirty="0">
+                        <a:rPr lang="en-US" sz="1200">
                           <a:solidFill>
                             <a:srgbClr val="000000"/>
                           </a:solidFill>
                         </a:rPr>
                         <a:t>0.3671</a:t>
                       </a:r>
-                      <a:endParaRPr lang="en-US" sz="1200" dirty="0"/>
+                      <a:endParaRPr lang="en-US" sz="1200"/>
                     </a:p>
                   </a:txBody>
-                  <a:tcPr marL="91440" marR="91440" marT="45720" marB="45720">
+                  <a:tcPr>
                     <a:lnL w="6350" cap="flat" cmpd="sng" algn="ctr">
                       <a:solidFill>
                         <a:srgbClr val="BBDEFB"/>
@@ -13351,21 +13292,21 @@
                     <a:bodyPr/>
                     <a:lstStyle/>
                     <a:p>
-                      <a:pPr algn="ctr" indent="0" marL="0">
+                      <a:pPr marL="0" indent="0" algn="ctr">
                         <a:buNone/>
                       </a:pPr>
                       <a:r>
-                        <a:rPr lang="en-US" sz="1200" b="1" dirty="0">
+                        <a:rPr lang="en-US" sz="1200" b="1">
                           <a:solidFill>
                             <a:srgbClr val="1565C0"/>
                           </a:solidFill>
                         </a:rPr>
                         <a:t>0.6202</a:t>
                       </a:r>
-                      <a:endParaRPr lang="en-US" sz="1200" dirty="0"/>
+                      <a:endParaRPr lang="en-US" sz="1200"/>
                     </a:p>
                   </a:txBody>
-                  <a:tcPr marL="91440" marR="91440" marT="45720" marB="45720">
+                  <a:tcPr>
                     <a:lnL w="6350" cap="flat" cmpd="sng" algn="ctr">
                       <a:solidFill>
                         <a:srgbClr val="BBDEFB"/>
@@ -13409,21 +13350,21 @@
                     <a:bodyPr/>
                     <a:lstStyle/>
                     <a:p>
-                      <a:pPr algn="ctr" indent="0" marL="0">
+                      <a:pPr marL="0" indent="0" algn="ctr">
                         <a:buNone/>
                       </a:pPr>
                       <a:r>
-                        <a:rPr lang="en-US" sz="1200" dirty="0">
+                        <a:rPr lang="en-US" sz="1200">
                           <a:solidFill>
                             <a:srgbClr val="000000"/>
                           </a:solidFill>
                         </a:rPr>
                         <a:t>0.4612</a:t>
                       </a:r>
-                      <a:endParaRPr lang="en-US" sz="1200" dirty="0"/>
+                      <a:endParaRPr lang="en-US" sz="1200"/>
                     </a:p>
                   </a:txBody>
-                  <a:tcPr marL="91440" marR="91440" marT="45720" marB="45720">
+                  <a:tcPr>
                     <a:lnL w="6350" cap="flat" cmpd="sng" algn="ctr">
                       <a:solidFill>
                         <a:srgbClr val="BBDEFB"/>
@@ -13467,21 +13408,21 @@
                     <a:bodyPr/>
                     <a:lstStyle/>
                     <a:p>
-                      <a:pPr algn="ctr" indent="0" marL="0">
+                      <a:pPr marL="0" indent="0" algn="ctr">
                         <a:buNone/>
                       </a:pPr>
                       <a:r>
-                        <a:rPr lang="en-US" sz="1200" dirty="0">
+                        <a:rPr lang="en-US" sz="1200">
                           <a:solidFill>
                             <a:srgbClr val="000000"/>
                           </a:solidFill>
                         </a:rPr>
                         <a:t>0.7084</a:t>
                       </a:r>
-                      <a:endParaRPr lang="en-US" sz="1200" dirty="0"/>
+                      <a:endParaRPr lang="en-US" sz="1200"/>
                     </a:p>
                   </a:txBody>
-                  <a:tcPr marL="91440" marR="91440" marT="45720" marB="45720">
+                  <a:tcPr>
                     <a:lnL w="6350" cap="flat" cmpd="sng" algn="ctr">
                       <a:solidFill>
                         <a:srgbClr val="BBDEFB"/>
@@ -13525,21 +13466,21 @@
                     <a:bodyPr/>
                     <a:lstStyle/>
                     <a:p>
-                      <a:pPr algn="ctr" indent="0" marL="0">
+                      <a:pPr marL="0" indent="0" algn="ctr">
                         <a:buNone/>
                       </a:pPr>
                       <a:r>
-                        <a:rPr lang="en-US" sz="1100" dirty="0">
+                        <a:rPr lang="en-US" sz="1100">
                           <a:solidFill>
                             <a:srgbClr val="000000"/>
                           </a:solidFill>
                         </a:rPr>
                         <a:t>0.7264 ± 0.011</a:t>
                       </a:r>
-                      <a:endParaRPr lang="en-US" sz="1100" dirty="0"/>
+                      <a:endParaRPr lang="en-US" sz="1100"/>
                     </a:p>
                   </a:txBody>
-                  <a:tcPr marL="91440" marR="91440" marT="45720" marB="45720">
+                  <a:tcPr>
                     <a:lnL w="6350" cap="flat" cmpd="sng" algn="ctr">
                       <a:solidFill>
                         <a:srgbClr val="BBDEFB"/>
@@ -13578,6 +13519,11 @@
                     </a:lnB>
                   </a:tcPr>
                 </a:tc>
+                <a:extLst>
+                  <a:ext uri="{0D108BD9-81ED-4DB2-BD59-A6C34878D82A}">
+                    <a16:rowId xmlns:a16="http://schemas.microsoft.com/office/drawing/2014/main" val="10001"/>
+                  </a:ext>
+                </a:extLst>
               </a:tr>
               <a:tr h="457200">
                 <a:tc>
@@ -13585,21 +13531,21 @@
                     <a:bodyPr/>
                     <a:lstStyle/>
                     <a:p>
-                      <a:pPr algn="l" indent="0" marL="0">
+                      <a:pPr marL="0" indent="0" algn="l">
                         <a:buNone/>
                       </a:pPr>
                       <a:r>
-                        <a:rPr lang="en-US" sz="1200" dirty="0">
+                        <a:rPr lang="en-US" sz="1200">
                           <a:solidFill>
                             <a:srgbClr val="000000"/>
                           </a:solidFill>
                         </a:rPr>
                         <a:t>Gaussian Naive Bayes</a:t>
                       </a:r>
-                      <a:endParaRPr lang="en-US" sz="1200" dirty="0"/>
+                      <a:endParaRPr lang="en-US" sz="1200"/>
                     </a:p>
                   </a:txBody>
-                  <a:tcPr marL="91440" marR="91440" marT="45720" marB="45720">
+                  <a:tcPr>
                     <a:lnL w="6350" cap="flat" cmpd="sng" algn="ctr">
                       <a:solidFill>
                         <a:srgbClr val="BBDEFB"/>
@@ -13643,21 +13589,21 @@
                     <a:bodyPr/>
                     <a:lstStyle/>
                     <a:p>
-                      <a:pPr algn="ctr" indent="0" marL="0">
+                      <a:pPr marL="0" indent="0" algn="ctr">
                         <a:buNone/>
                       </a:pPr>
                       <a:r>
-                        <a:rPr lang="en-US" sz="1200" dirty="0">
+                        <a:rPr lang="en-US" sz="1200">
                           <a:solidFill>
                             <a:srgbClr val="000000"/>
                           </a:solidFill>
                         </a:rPr>
                         <a:t>0.7518</a:t>
                       </a:r>
-                      <a:endParaRPr lang="en-US" sz="1200" dirty="0"/>
+                      <a:endParaRPr lang="en-US" sz="1200"/>
                     </a:p>
                   </a:txBody>
-                  <a:tcPr marL="91440" marR="91440" marT="45720" marB="45720">
+                  <a:tcPr>
                     <a:lnL w="6350" cap="flat" cmpd="sng" algn="ctr">
                       <a:solidFill>
                         <a:srgbClr val="BBDEFB"/>
@@ -13701,21 +13647,21 @@
                     <a:bodyPr/>
                     <a:lstStyle/>
                     <a:p>
-                      <a:pPr algn="ctr" indent="0" marL="0">
+                      <a:pPr marL="0" indent="0" algn="ctr">
                         <a:buNone/>
                       </a:pPr>
                       <a:r>
-                        <a:rPr lang="en-US" sz="1200" dirty="0">
+                        <a:rPr lang="en-US" sz="1200">
                           <a:solidFill>
                             <a:srgbClr val="000000"/>
                           </a:solidFill>
                         </a:rPr>
                         <a:t>0.4504</a:t>
                       </a:r>
-                      <a:endParaRPr lang="en-US" sz="1200" dirty="0"/>
+                      <a:endParaRPr lang="en-US" sz="1200"/>
                     </a:p>
                   </a:txBody>
-                  <a:tcPr marL="91440" marR="91440" marT="45720" marB="45720">
+                  <a:tcPr>
                     <a:lnL w="6350" cap="flat" cmpd="sng" algn="ctr">
                       <a:solidFill>
                         <a:srgbClr val="BBDEFB"/>
@@ -13759,21 +13705,21 @@
                     <a:bodyPr/>
                     <a:lstStyle/>
                     <a:p>
-                      <a:pPr algn="ctr" indent="0" marL="0">
+                      <a:pPr marL="0" indent="0" algn="ctr">
                         <a:buNone/>
                       </a:pPr>
                       <a:r>
-                        <a:rPr lang="en-US" sz="1200" dirty="0">
+                        <a:rPr lang="en-US" sz="1200">
                           <a:solidFill>
                             <a:srgbClr val="000000"/>
                           </a:solidFill>
                         </a:rPr>
                         <a:t>0.5539</a:t>
                       </a:r>
-                      <a:endParaRPr lang="en-US" sz="1200" dirty="0"/>
+                      <a:endParaRPr lang="en-US" sz="1200"/>
                     </a:p>
                   </a:txBody>
-                  <a:tcPr marL="91440" marR="91440" marT="45720" marB="45720">
+                  <a:tcPr>
                     <a:lnL w="6350" cap="flat" cmpd="sng" algn="ctr">
                       <a:solidFill>
                         <a:srgbClr val="BBDEFB"/>
@@ -13817,21 +13763,21 @@
                     <a:bodyPr/>
                     <a:lstStyle/>
                     <a:p>
-                      <a:pPr algn="ctr" indent="0" marL="0">
+                      <a:pPr marL="0" indent="0" algn="ctr">
                         <a:buNone/>
                       </a:pPr>
                       <a:r>
-                        <a:rPr lang="en-US" sz="1200" dirty="0">
+                        <a:rPr lang="en-US" sz="1200">
                           <a:solidFill>
                             <a:srgbClr val="000000"/>
                           </a:solidFill>
                         </a:rPr>
                         <a:t>0.4968</a:t>
                       </a:r>
-                      <a:endParaRPr lang="en-US" sz="1200" dirty="0"/>
+                      <a:endParaRPr lang="en-US" sz="1200"/>
                     </a:p>
                   </a:txBody>
-                  <a:tcPr marL="91440" marR="91440" marT="45720" marB="45720">
+                  <a:tcPr>
                     <a:lnL w="6350" cap="flat" cmpd="sng" algn="ctr">
                       <a:solidFill>
                         <a:srgbClr val="BBDEFB"/>
@@ -13875,21 +13821,21 @@
                     <a:bodyPr/>
                     <a:lstStyle/>
                     <a:p>
-                      <a:pPr algn="ctr" indent="0" marL="0">
+                      <a:pPr marL="0" indent="0" algn="ctr">
                         <a:buNone/>
                       </a:pPr>
                       <a:r>
-                        <a:rPr lang="en-US" sz="1200" dirty="0">
+                        <a:rPr lang="en-US" sz="1200">
                           <a:solidFill>
                             <a:srgbClr val="000000"/>
                           </a:solidFill>
                         </a:rPr>
                         <a:t>0.7248</a:t>
                       </a:r>
-                      <a:endParaRPr lang="en-US" sz="1200" dirty="0"/>
+                      <a:endParaRPr lang="en-US" sz="1200"/>
                     </a:p>
                   </a:txBody>
-                  <a:tcPr marL="91440" marR="91440" marT="45720" marB="45720">
+                  <a:tcPr>
                     <a:lnL w="6350" cap="flat" cmpd="sng" algn="ctr">
                       <a:solidFill>
                         <a:srgbClr val="BBDEFB"/>
@@ -13933,21 +13879,21 @@
                     <a:bodyPr/>
                     <a:lstStyle/>
                     <a:p>
-                      <a:pPr algn="ctr" indent="0" marL="0">
+                      <a:pPr marL="0" indent="0" algn="ctr">
                         <a:buNone/>
                       </a:pPr>
                       <a:r>
-                        <a:rPr lang="en-US" sz="1100" dirty="0">
+                        <a:rPr lang="en-US" sz="1100">
                           <a:solidFill>
                             <a:srgbClr val="000000"/>
                           </a:solidFill>
                         </a:rPr>
                         <a:t>0.7365 ± 0.010</a:t>
                       </a:r>
-                      <a:endParaRPr lang="en-US" sz="1100" dirty="0"/>
+                      <a:endParaRPr lang="en-US" sz="1100"/>
                     </a:p>
                   </a:txBody>
-                  <a:tcPr marL="91440" marR="91440" marT="45720" marB="45720">
+                  <a:tcPr>
                     <a:lnL w="6350" cap="flat" cmpd="sng" algn="ctr">
                       <a:solidFill>
                         <a:srgbClr val="BBDEFB"/>
@@ -13986,6 +13932,11 @@
                     </a:lnB>
                   </a:tcPr>
                 </a:tc>
+                <a:extLst>
+                  <a:ext uri="{0D108BD9-81ED-4DB2-BD59-A6C34878D82A}">
+                    <a16:rowId xmlns:a16="http://schemas.microsoft.com/office/drawing/2014/main" val="10002"/>
+                  </a:ext>
+                </a:extLst>
               </a:tr>
               <a:tr h="457200">
                 <a:tc>
@@ -13993,21 +13944,21 @@
                     <a:bodyPr/>
                     <a:lstStyle/>
                     <a:p>
-                      <a:pPr algn="l" indent="0" marL="0">
+                      <a:pPr marL="0" indent="0" algn="l">
                         <a:buNone/>
                       </a:pPr>
                       <a:r>
-                        <a:rPr lang="en-US" sz="1200" b="1" dirty="0">
+                        <a:rPr lang="en-US" sz="1200" b="1">
                           <a:solidFill>
                             <a:srgbClr val="00695C"/>
                           </a:solidFill>
                         </a:rPr>
                         <a:t>Decision Tree ✓</a:t>
                       </a:r>
-                      <a:endParaRPr lang="en-US" sz="1200" dirty="0"/>
+                      <a:endParaRPr lang="en-US" sz="1200"/>
                     </a:p>
                   </a:txBody>
-                  <a:tcPr marL="91440" marR="91440" marT="45720" marB="45720">
+                  <a:tcPr>
                     <a:lnL w="6350" cap="flat" cmpd="sng" algn="ctr">
                       <a:solidFill>
                         <a:srgbClr val="BBDEFB"/>
@@ -14051,21 +14002,21 @@
                     <a:bodyPr/>
                     <a:lstStyle/>
                     <a:p>
-                      <a:pPr algn="ctr" indent="0" marL="0">
+                      <a:pPr marL="0" indent="0" algn="ctr">
                         <a:buNone/>
                       </a:pPr>
                       <a:r>
-                        <a:rPr lang="en-US" sz="1200" b="1" dirty="0">
+                        <a:rPr lang="en-US" sz="1200" b="1">
                           <a:solidFill>
                             <a:srgbClr val="00695C"/>
                           </a:solidFill>
                         </a:rPr>
                         <a:t>0.7723</a:t>
                       </a:r>
-                      <a:endParaRPr lang="en-US" sz="1200" dirty="0"/>
+                      <a:endParaRPr lang="en-US" sz="1200"/>
                     </a:p>
                   </a:txBody>
-                  <a:tcPr marL="91440" marR="91440" marT="45720" marB="45720">
+                  <a:tcPr>
                     <a:lnL w="6350" cap="flat" cmpd="sng" algn="ctr">
                       <a:solidFill>
                         <a:srgbClr val="BBDEFB"/>
@@ -14109,21 +14060,21 @@
                     <a:bodyPr/>
                     <a:lstStyle/>
                     <a:p>
-                      <a:pPr algn="ctr" indent="0" marL="0">
+                      <a:pPr marL="0" indent="0" algn="ctr">
                         <a:buNone/>
                       </a:pPr>
                       <a:r>
-                        <a:rPr lang="en-US" sz="1200" b="1" dirty="0">
+                        <a:rPr lang="en-US" sz="1200" b="1">
                           <a:solidFill>
                             <a:srgbClr val="00695C"/>
                           </a:solidFill>
                         </a:rPr>
                         <a:t>0.4870</a:t>
                       </a:r>
-                      <a:endParaRPr lang="en-US" sz="1200" dirty="0"/>
+                      <a:endParaRPr lang="en-US" sz="1200"/>
                     </a:p>
                   </a:txBody>
-                  <a:tcPr marL="91440" marR="91440" marT="45720" marB="45720">
+                  <a:tcPr>
                     <a:lnL w="6350" cap="flat" cmpd="sng" algn="ctr">
                       <a:solidFill>
                         <a:srgbClr val="BBDEFB"/>
@@ -14167,21 +14118,21 @@
                     <a:bodyPr/>
                     <a:lstStyle/>
                     <a:p>
-                      <a:pPr algn="ctr" indent="0" marL="0">
+                      <a:pPr marL="0" indent="0" algn="ctr">
                         <a:buNone/>
                       </a:pPr>
                       <a:r>
-                        <a:rPr lang="en-US" sz="1200" b="1" dirty="0">
+                        <a:rPr lang="en-US" sz="1200" b="1">
                           <a:solidFill>
                             <a:srgbClr val="00695C"/>
                           </a:solidFill>
                         </a:rPr>
                         <a:t>0.5516</a:t>
                       </a:r>
-                      <a:endParaRPr lang="en-US" sz="1200" dirty="0"/>
+                      <a:endParaRPr lang="en-US" sz="1200"/>
                     </a:p>
                   </a:txBody>
-                  <a:tcPr marL="91440" marR="91440" marT="45720" marB="45720">
+                  <a:tcPr>
                     <a:lnL w="6350" cap="flat" cmpd="sng" algn="ctr">
                       <a:solidFill>
                         <a:srgbClr val="BBDEFB"/>
@@ -14225,21 +14176,21 @@
                     <a:bodyPr/>
                     <a:lstStyle/>
                     <a:p>
-                      <a:pPr algn="ctr" indent="0" marL="0">
+                      <a:pPr marL="0" indent="0" algn="ctr">
                         <a:buNone/>
                       </a:pPr>
                       <a:r>
-                        <a:rPr lang="en-US" sz="1200" b="1" dirty="0">
+                        <a:rPr lang="en-US" sz="1200" b="1">
                           <a:solidFill>
                             <a:srgbClr val="00695C"/>
                           </a:solidFill>
                         </a:rPr>
                         <a:t>0.5173</a:t>
                       </a:r>
-                      <a:endParaRPr lang="en-US" sz="1200" dirty="0"/>
+                      <a:endParaRPr lang="en-US" sz="1200"/>
                     </a:p>
                   </a:txBody>
-                  <a:tcPr marL="91440" marR="91440" marT="45720" marB="45720">
+                  <a:tcPr>
                     <a:lnL w="6350" cap="flat" cmpd="sng" algn="ctr">
                       <a:solidFill>
                         <a:srgbClr val="BBDEFB"/>
@@ -14283,21 +14234,21 @@
                     <a:bodyPr/>
                     <a:lstStyle/>
                     <a:p>
-                      <a:pPr algn="ctr" indent="0" marL="0">
+                      <a:pPr marL="0" indent="0" algn="ctr">
                         <a:buNone/>
                       </a:pPr>
                       <a:r>
-                        <a:rPr lang="en-US" sz="1200" b="1" dirty="0">
+                        <a:rPr lang="en-US" sz="1200" b="1">
                           <a:solidFill>
                             <a:srgbClr val="00695C"/>
                           </a:solidFill>
                         </a:rPr>
                         <a:t>0.7589</a:t>
                       </a:r>
-                      <a:endParaRPr lang="en-US" sz="1200" dirty="0"/>
+                      <a:endParaRPr lang="en-US" sz="1200"/>
                     </a:p>
                   </a:txBody>
-                  <a:tcPr marL="91440" marR="91440" marT="45720" marB="45720">
+                  <a:tcPr>
                     <a:lnL w="6350" cap="flat" cmpd="sng" algn="ctr">
                       <a:solidFill>
                         <a:srgbClr val="BBDEFB"/>
@@ -14341,21 +14292,21 @@
                     <a:bodyPr/>
                     <a:lstStyle/>
                     <a:p>
-                      <a:pPr algn="ctr" indent="0" marL="0">
+                      <a:pPr marL="0" indent="0" algn="ctr">
                         <a:buNone/>
                       </a:pPr>
                       <a:r>
-                        <a:rPr lang="en-US" sz="1100" b="1" dirty="0">
+                        <a:rPr lang="en-US" sz="1100" b="1">
                           <a:solidFill>
                             <a:srgbClr val="00695C"/>
                           </a:solidFill>
                         </a:rPr>
                         <a:t>0.7577 ± 0.007</a:t>
                       </a:r>
-                      <a:endParaRPr lang="en-US" sz="1100" dirty="0"/>
+                      <a:endParaRPr lang="en-US" sz="1100"/>
                     </a:p>
                   </a:txBody>
-                  <a:tcPr marL="91440" marR="91440" marT="45720" marB="45720">
+                  <a:tcPr>
                     <a:lnL w="6350" cap="flat" cmpd="sng" algn="ctr">
                       <a:solidFill>
                         <a:srgbClr val="BBDEFB"/>
@@ -14394,6 +14345,11 @@
                     </a:lnB>
                   </a:tcPr>
                 </a:tc>
+                <a:extLst>
+                  <a:ext uri="{0D108BD9-81ED-4DB2-BD59-A6C34878D82A}">
+                    <a16:rowId xmlns:a16="http://schemas.microsoft.com/office/drawing/2014/main" val="10003"/>
+                  </a:ext>
+                </a:extLst>
               </a:tr>
             </a:tbl>
           </a:graphicData>
@@ -14423,7 +14379,7 @@
             <a:prstDash val="solid"/>
           </a:ln>
           <a:effectLst>
-            <a:outerShdw sx="100000" sy="100000" kx="0" ky="0" algn="bl" rotWithShape="0" blurRad="101600" dist="38100" dir="8100000">
+            <a:outerShdw blurRad="101600" dist="38100" dir="8100000" algn="bl" rotWithShape="0">
               <a:srgbClr val="000000">
                 <a:alpha val="12000"/>
               </a:srgbClr>
@@ -14458,7 +14414,7 @@
       </p:sp>
       <p:sp>
         <p:nvSpPr>
-          <p:cNvPr id="8" name="Text 5"/>
+          <p:cNvPr id="5" name="Text 5"/>
           <p:cNvSpPr/>
           <p:nvPr/>
         </p:nvSpPr>
@@ -14477,11 +14433,11 @@
           <a:bodyPr wrap="square" rtlCol="0" anchor="ctr"/>
           <a:lstStyle/>
           <a:p>
-            <a:pPr algn="ctr" indent="0" marL="0">
-              <a:buNone/>
-            </a:pPr>
-            <a:r>
-              <a:rPr lang="en-US" sz="800" b="1" spc="200" kern="0" dirty="0">
+            <a:pPr marL="0" indent="0" algn="ctr">
+              <a:buNone/>
+            </a:pPr>
+            <a:r>
+              <a:rPr lang="en-US" sz="800" b="1" kern="0" spc="200">
                 <a:solidFill>
                   <a:srgbClr val="00695C"/>
                 </a:solidFill>
@@ -14491,7 +14447,7 @@
               </a:rPr>
               <a:t>BEST F1</a:t>
             </a:r>
-            <a:endParaRPr lang="en-US" sz="800" dirty="0"/>
+            <a:endParaRPr lang="en-US" sz="800"/>
           </a:p>
         </p:txBody>
       </p:sp>
@@ -14516,11 +14472,11 @@
           <a:bodyPr wrap="square" rtlCol="0" anchor="ctr"/>
           <a:lstStyle/>
           <a:p>
-            <a:pPr algn="ctr" indent="0" marL="0">
-              <a:buNone/>
-            </a:pPr>
-            <a:r>
-              <a:rPr lang="en-US" sz="2600" b="1" dirty="0">
+            <a:pPr marL="0" indent="0" algn="ctr">
+              <a:buNone/>
+            </a:pPr>
+            <a:r>
+              <a:rPr lang="en-US" sz="2600" b="1">
                 <a:solidFill>
                   <a:srgbClr val="0D2137"/>
                 </a:solidFill>
@@ -14530,7 +14486,7 @@
               </a:rPr>
               <a:t>0.5173</a:t>
             </a:r>
-            <a:endParaRPr lang="en-US" sz="2600" dirty="0"/>
+            <a:endParaRPr lang="en-US" sz="2600"/>
           </a:p>
         </p:txBody>
       </p:sp>
@@ -14555,11 +14511,11 @@
           <a:bodyPr wrap="square" rtlCol="0" anchor="ctr"/>
           <a:lstStyle/>
           <a:p>
-            <a:pPr algn="ctr" indent="0" marL="0">
-              <a:buNone/>
-            </a:pPr>
-            <a:r>
-              <a:rPr lang="en-US" sz="900" dirty="0">
+            <a:pPr marL="0" indent="0" algn="ctr">
+              <a:buNone/>
+            </a:pPr>
+            <a:r>
+              <a:rPr lang="en-US" sz="900">
                 <a:solidFill>
                   <a:srgbClr val="546E7A"/>
                 </a:solidFill>
@@ -14569,7 +14525,7 @@
               </a:rPr>
               <a:t>Decision Tree</a:t>
             </a:r>
-            <a:endParaRPr lang="en-US" sz="900" dirty="0"/>
+            <a:endParaRPr lang="en-US" sz="900"/>
           </a:p>
         </p:txBody>
       </p:sp>
@@ -14597,7 +14553,7 @@
             <a:prstDash val="solid"/>
           </a:ln>
           <a:effectLst>
-            <a:outerShdw sx="100000" sy="100000" kx="0" ky="0" algn="bl" rotWithShape="0" blurRad="101600" dist="38100" dir="8100000">
+            <a:outerShdw blurRad="101600" dist="38100" dir="8100000" algn="bl" rotWithShape="0">
               <a:srgbClr val="000000">
                 <a:alpha val="12000"/>
               </a:srgbClr>
@@ -14651,11 +14607,11 @@
           <a:bodyPr wrap="square" rtlCol="0" anchor="ctr"/>
           <a:lstStyle/>
           <a:p>
-            <a:pPr algn="ctr" indent="0" marL="0">
-              <a:buNone/>
-            </a:pPr>
-            <a:r>
-              <a:rPr lang="en-US" sz="800" b="1" spc="200" kern="0" dirty="0">
+            <a:pPr marL="0" indent="0" algn="ctr">
+              <a:buNone/>
+            </a:pPr>
+            <a:r>
+              <a:rPr lang="en-US" sz="800" b="1" kern="0" spc="200">
                 <a:solidFill>
                   <a:srgbClr val="00B8D4"/>
                 </a:solidFill>
@@ -14665,7 +14621,7 @@
               </a:rPr>
               <a:t>BEST AUC</a:t>
             </a:r>
-            <a:endParaRPr lang="en-US" sz="800" dirty="0"/>
+            <a:endParaRPr lang="en-US" sz="800"/>
           </a:p>
         </p:txBody>
       </p:sp>
@@ -14690,11 +14646,11 @@
           <a:bodyPr wrap="square" rtlCol="0" anchor="ctr"/>
           <a:lstStyle/>
           <a:p>
-            <a:pPr algn="ctr" indent="0" marL="0">
-              <a:buNone/>
-            </a:pPr>
-            <a:r>
-              <a:rPr lang="en-US" sz="2600" b="1" dirty="0">
+            <a:pPr marL="0" indent="0" algn="ctr">
+              <a:buNone/>
+            </a:pPr>
+            <a:r>
+              <a:rPr lang="en-US" sz="2600" b="1">
                 <a:solidFill>
                   <a:srgbClr val="0D2137"/>
                 </a:solidFill>
@@ -14704,7 +14660,7 @@
               </a:rPr>
               <a:t>0.7589</a:t>
             </a:r>
-            <a:endParaRPr lang="en-US" sz="2600" dirty="0"/>
+            <a:endParaRPr lang="en-US" sz="2600"/>
           </a:p>
         </p:txBody>
       </p:sp>
@@ -14729,11 +14685,11 @@
           <a:bodyPr wrap="square" rtlCol="0" anchor="ctr"/>
           <a:lstStyle/>
           <a:p>
-            <a:pPr algn="ctr" indent="0" marL="0">
-              <a:buNone/>
-            </a:pPr>
-            <a:r>
-              <a:rPr lang="en-US" sz="900" dirty="0">
+            <a:pPr marL="0" indent="0" algn="ctr">
+              <a:buNone/>
+            </a:pPr>
+            <a:r>
+              <a:rPr lang="en-US" sz="900">
                 <a:solidFill>
                   <a:srgbClr val="546E7A"/>
                 </a:solidFill>
@@ -14743,7 +14699,7 @@
               </a:rPr>
               <a:t>Decision Tree</a:t>
             </a:r>
-            <a:endParaRPr lang="en-US" sz="900" dirty="0"/>
+            <a:endParaRPr lang="en-US" sz="900"/>
           </a:p>
         </p:txBody>
       </p:sp>
@@ -14771,7 +14727,7 @@
             <a:prstDash val="solid"/>
           </a:ln>
           <a:effectLst>
-            <a:outerShdw sx="100000" sy="100000" kx="0" ky="0" algn="bl" rotWithShape="0" blurRad="101600" dist="38100" dir="8100000">
+            <a:outerShdw blurRad="101600" dist="38100" dir="8100000" algn="bl" rotWithShape="0">
               <a:srgbClr val="000000">
                 <a:alpha val="12000"/>
               </a:srgbClr>
@@ -14825,11 +14781,11 @@
           <a:bodyPr wrap="square" rtlCol="0" anchor="ctr"/>
           <a:lstStyle/>
           <a:p>
-            <a:pPr algn="ctr" indent="0" marL="0">
-              <a:buNone/>
-            </a:pPr>
-            <a:r>
-              <a:rPr lang="en-US" sz="800" b="1" spc="200" kern="0" dirty="0">
+            <a:pPr marL="0" indent="0" algn="ctr">
+              <a:buNone/>
+            </a:pPr>
+            <a:r>
+              <a:rPr lang="en-US" sz="800" b="1" kern="0" spc="200">
                 <a:solidFill>
                   <a:srgbClr val="1565C0"/>
                 </a:solidFill>
@@ -14839,7 +14795,7 @@
               </a:rPr>
               <a:t>BEST RECALL</a:t>
             </a:r>
-            <a:endParaRPr lang="en-US" sz="800" dirty="0"/>
+            <a:endParaRPr lang="en-US" sz="800"/>
           </a:p>
         </p:txBody>
       </p:sp>
@@ -14864,11 +14820,11 @@
           <a:bodyPr wrap="square" rtlCol="0" anchor="ctr"/>
           <a:lstStyle/>
           <a:p>
-            <a:pPr algn="ctr" indent="0" marL="0">
-              <a:buNone/>
-            </a:pPr>
-            <a:r>
-              <a:rPr lang="en-US" sz="2600" b="1" dirty="0">
+            <a:pPr marL="0" indent="0" algn="ctr">
+              <a:buNone/>
+            </a:pPr>
+            <a:r>
+              <a:rPr lang="en-US" sz="2600" b="1">
                 <a:solidFill>
                   <a:srgbClr val="0D2137"/>
                 </a:solidFill>
@@ -14878,7 +14834,7 @@
               </a:rPr>
               <a:t>0.6202</a:t>
             </a:r>
-            <a:endParaRPr lang="en-US" sz="2600" dirty="0"/>
+            <a:endParaRPr lang="en-US" sz="2600"/>
           </a:p>
         </p:txBody>
       </p:sp>
@@ -14903,11 +14859,11 @@
           <a:bodyPr wrap="square" rtlCol="0" anchor="ctr"/>
           <a:lstStyle/>
           <a:p>
-            <a:pPr algn="ctr" indent="0" marL="0">
-              <a:buNone/>
-            </a:pPr>
-            <a:r>
-              <a:rPr lang="en-US" sz="900" dirty="0">
+            <a:pPr marL="0" indent="0" algn="ctr">
+              <a:buNone/>
+            </a:pPr>
+            <a:r>
+              <a:rPr lang="en-US" sz="900">
                 <a:solidFill>
                   <a:srgbClr val="546E7A"/>
                 </a:solidFill>
@@ -14917,7 +14873,7 @@
               </a:rPr>
               <a:t>Logistic Regression</a:t>
             </a:r>
-            <a:endParaRPr lang="en-US" sz="900" dirty="0"/>
+            <a:endParaRPr lang="en-US" sz="900"/>
           </a:p>
         </p:txBody>
       </p:sp>
@@ -14945,7 +14901,7 @@
             <a:prstDash val="solid"/>
           </a:ln>
           <a:effectLst>
-            <a:outerShdw sx="100000" sy="100000" kx="0" ky="0" algn="bl" rotWithShape="0" blurRad="101600" dist="38100" dir="8100000">
+            <a:outerShdw blurRad="101600" dist="38100" dir="8100000" algn="bl" rotWithShape="0">
               <a:srgbClr val="000000">
                 <a:alpha val="12000"/>
               </a:srgbClr>
@@ -14999,11 +14955,11 @@
           <a:bodyPr wrap="square" rtlCol="0" anchor="ctr"/>
           <a:lstStyle/>
           <a:p>
-            <a:pPr algn="ctr" indent="0" marL="0">
-              <a:buNone/>
-            </a:pPr>
-            <a:r>
-              <a:rPr lang="en-US" sz="800" b="1" spc="200" kern="0" dirty="0">
+            <a:pPr marL="0" indent="0" algn="ctr">
+              <a:buNone/>
+            </a:pPr>
+            <a:r>
+              <a:rPr lang="en-US" sz="800" b="1" kern="0" spc="200">
                 <a:solidFill>
                   <a:srgbClr val="FFB300"/>
                 </a:solidFill>
@@ -15013,7 +14969,7 @@
               </a:rPr>
               <a:t>LOWEST CV VARIANCE</a:t>
             </a:r>
-            <a:endParaRPr lang="en-US" sz="800" dirty="0"/>
+            <a:endParaRPr lang="en-US" sz="800"/>
           </a:p>
         </p:txBody>
       </p:sp>
@@ -15038,11 +14994,11 @@
           <a:bodyPr wrap="square" rtlCol="0" anchor="ctr"/>
           <a:lstStyle/>
           <a:p>
-            <a:pPr algn="ctr" indent="0" marL="0">
-              <a:buNone/>
-            </a:pPr>
-            <a:r>
-              <a:rPr lang="en-US" sz="2600" b="1" dirty="0">
+            <a:pPr marL="0" indent="0" algn="ctr">
+              <a:buNone/>
+            </a:pPr>
+            <a:r>
+              <a:rPr lang="en-US" sz="2600" b="1">
                 <a:solidFill>
                   <a:srgbClr val="0D2137"/>
                 </a:solidFill>
@@ -15052,7 +15008,7 @@
               </a:rPr>
               <a:t>±0.007</a:t>
             </a:r>
-            <a:endParaRPr lang="en-US" sz="2600" dirty="0"/>
+            <a:endParaRPr lang="en-US" sz="2600"/>
           </a:p>
         </p:txBody>
       </p:sp>
@@ -15077,11 +15033,11 @@
           <a:bodyPr wrap="square" rtlCol="0" anchor="ctr"/>
           <a:lstStyle/>
           <a:p>
-            <a:pPr algn="ctr" indent="0" marL="0">
-              <a:buNone/>
-            </a:pPr>
-            <a:r>
-              <a:rPr lang="en-US" sz="900" dirty="0">
+            <a:pPr marL="0" indent="0" algn="ctr">
+              <a:buNone/>
+            </a:pPr>
+            <a:r>
+              <a:rPr lang="en-US" sz="900">
                 <a:solidFill>
                   <a:srgbClr val="546E7A"/>
                 </a:solidFill>
@@ -15091,7 +15047,7 @@
               </a:rPr>
               <a:t>Decision Tree – most stable</a:t>
             </a:r>
-            <a:endParaRPr lang="en-US" sz="900" dirty="0"/>
+            <a:endParaRPr lang="en-US" sz="900"/>
           </a:p>
         </p:txBody>
       </p:sp>
@@ -15111,6 +15067,7 @@
         <a:solidFill>
           <a:srgbClr val="F0F6FC"/>
         </a:solidFill>
+        <a:effectLst/>
       </p:bgPr>
     </p:bg>
     <p:spTree>
@@ -15173,11 +15130,11 @@
           <a:bodyPr wrap="square" rtlCol="0" anchor="ctr"/>
           <a:lstStyle/>
           <a:p>
-            <a:pPr indent="0" marL="0">
-              <a:buNone/>
-            </a:pPr>
-            <a:r>
-              <a:rPr lang="en-US" sz="2600" b="1" dirty="0">
+            <a:pPr marL="0" indent="0">
+              <a:buNone/>
+            </a:pPr>
+            <a:r>
+              <a:rPr lang="en-US" sz="2600" b="1">
                 <a:solidFill>
                   <a:srgbClr val="FFFFFF"/>
                 </a:solidFill>
@@ -15187,13 +15144,13 @@
               </a:rPr>
               <a:t>Visual Performance Comparison</a:t>
             </a:r>
-            <a:endParaRPr lang="en-US" sz="2600" dirty="0"/>
+            <a:endParaRPr lang="en-US" sz="2600"/>
           </a:p>
         </p:txBody>
       </p:sp>
       <p:graphicFrame>
         <p:nvGraphicFramePr>
-          <p:cNvPr id="4" name="Chart 0" descr=""/>
+          <p:cNvPr id="4" name="Chart 0"/>
           <p:cNvGraphicFramePr/>
           <p:nvPr/>
         </p:nvGraphicFramePr>
@@ -15201,9 +15158,9 @@
           <a:off x="365760" y="822960"/>
           <a:ext cx="8412480" cy="4023360"/>
         </p:xfrm>
-        <a:graphic xmlns:a="http://schemas.openxmlformats.org/drawingml/2006/main">
+        <a:graphic>
           <a:graphicData uri="http://schemas.openxmlformats.org/drawingml/2006/chart">
-            <c:chart xmlns:c="http://schemas.openxmlformats.org/drawingml/2006/chart" r:id="rId1"/>
+            <c:chart xmlns:c="http://schemas.openxmlformats.org/drawingml/2006/chart" xmlns:r="http://schemas.openxmlformats.org/officeDocument/2006/relationships" r:id="rId3"/>
           </a:graphicData>
         </a:graphic>
       </p:graphicFrame>
@@ -15223,6 +15180,7 @@
         <a:solidFill>
           <a:srgbClr val="0D2137"/>
         </a:solidFill>
+        <a:effectLst/>
       </p:bgPr>
     </p:bg>
     <p:spTree>
@@ -15260,11 +15218,11 @@
           <a:bodyPr wrap="square" rtlCol="0" anchor="ctr"/>
           <a:lstStyle/>
           <a:p>
-            <a:pPr indent="0" marL="0">
-              <a:buNone/>
-            </a:pPr>
-            <a:r>
-              <a:rPr lang="en-US" sz="3000" b="1" dirty="0">
+            <a:pPr marL="0" indent="0">
+              <a:buNone/>
+            </a:pPr>
+            <a:r>
+              <a:rPr lang="en-US" sz="3000" b="1">
                 <a:solidFill>
                   <a:srgbClr val="FFFFFF"/>
                 </a:solidFill>
@@ -15274,7 +15232,7 @@
               </a:rPr>
               <a:t>The Dominant Predictor: PAY_0</a:t>
             </a:r>
-            <a:endParaRPr lang="en-US" sz="3000" dirty="0"/>
+            <a:endParaRPr lang="en-US" sz="3000"/>
           </a:p>
         </p:txBody>
       </p:sp>
@@ -15324,11 +15282,11 @@
           <a:bodyPr wrap="square" rtlCol="0" anchor="ctr"/>
           <a:lstStyle/>
           <a:p>
-            <a:pPr indent="0" marL="0">
-              <a:buNone/>
-            </a:pPr>
-            <a:r>
-              <a:rPr lang="en-US" sz="1100" dirty="0">
+            <a:pPr marL="0" indent="0">
+              <a:buNone/>
+            </a:pPr>
+            <a:r>
+              <a:rPr lang="en-US" sz="1100">
                 <a:solidFill>
                   <a:srgbClr val="4FC3F7"/>
                 </a:solidFill>
@@ -15338,13 +15296,13 @@
               </a:rPr>
               <a:t>Decision Tree — Gini Feature Importance  |  PAY_0 = most recent month repayment status</a:t>
             </a:r>
-            <a:endParaRPr lang="en-US" sz="1100" dirty="0"/>
+            <a:endParaRPr lang="en-US" sz="1100"/>
           </a:p>
         </p:txBody>
       </p:sp>
       <p:graphicFrame>
         <p:nvGraphicFramePr>
-          <p:cNvPr id="5" name="Chart 0" descr=""/>
+          <p:cNvPr id="5" name="Chart 0"/>
           <p:cNvGraphicFramePr/>
           <p:nvPr/>
         </p:nvGraphicFramePr>
@@ -15352,9 +15310,9 @@
           <a:off x="274320" y="1188720"/>
           <a:ext cx="5120640" cy="3657600"/>
         </p:xfrm>
-        <a:graphic xmlns:a="http://schemas.openxmlformats.org/drawingml/2006/main">
+        <a:graphic>
           <a:graphicData uri="http://schemas.openxmlformats.org/drawingml/2006/chart">
-            <c:chart xmlns:c="http://schemas.openxmlformats.org/drawingml/2006/chart" r:id="rId1"/>
+            <c:chart xmlns:c="http://schemas.openxmlformats.org/drawingml/2006/chart" xmlns:r="http://schemas.openxmlformats.org/officeDocument/2006/relationships" r:id="rId3"/>
           </a:graphicData>
         </a:graphic>
       </p:graphicFrame>
@@ -15382,7 +15340,7 @@
             <a:prstDash val="solid"/>
           </a:ln>
           <a:effectLst>
-            <a:outerShdw sx="100000" sy="100000" kx="0" ky="0" algn="bl" rotWithShape="0" blurRad="101600" dist="38100" dir="8100000">
+            <a:outerShdw blurRad="101600" dist="38100" dir="8100000" algn="bl" rotWithShape="0">
               <a:srgbClr val="000000">
                 <a:alpha val="12000"/>
               </a:srgbClr>
@@ -15436,11 +15394,11 @@
           <a:bodyPr wrap="square" rtlCol="0" anchor="ctr"/>
           <a:lstStyle/>
           <a:p>
-            <a:pPr indent="0" marL="0">
-              <a:buNone/>
-            </a:pPr>
-            <a:r>
-              <a:rPr lang="en-US" sz="2000" b="1" dirty="0">
+            <a:pPr marL="0" indent="0">
+              <a:buNone/>
+            </a:pPr>
+            <a:r>
+              <a:rPr lang="en-US" sz="2000" b="1">
                 <a:solidFill>
                   <a:srgbClr val="00B8D4"/>
                 </a:solidFill>
@@ -15450,7 +15408,7 @@
               </a:rPr>
               <a:t>74.61%</a:t>
             </a:r>
-            <a:endParaRPr lang="en-US" sz="2000" dirty="0"/>
+            <a:endParaRPr lang="en-US" sz="2000"/>
           </a:p>
         </p:txBody>
       </p:sp>
@@ -15475,11 +15433,11 @@
           <a:bodyPr wrap="square" rtlCol="0" anchor="ctr"/>
           <a:lstStyle/>
           <a:p>
-            <a:pPr indent="0" marL="0">
-              <a:buNone/>
-            </a:pPr>
-            <a:r>
-              <a:rPr lang="en-US" sz="1100" b="1" dirty="0">
+            <a:pPr marL="0" indent="0">
+              <a:buNone/>
+            </a:pPr>
+            <a:r>
+              <a:rPr lang="en-US" sz="1100" b="1">
                 <a:solidFill>
                   <a:srgbClr val="FFFFFF"/>
                 </a:solidFill>
@@ -15489,7 +15447,7 @@
               </a:rPr>
               <a:t>PAY_0 Gini Importance</a:t>
             </a:r>
-            <a:endParaRPr lang="en-US" sz="1100" dirty="0"/>
+            <a:endParaRPr lang="en-US" sz="1100"/>
           </a:p>
         </p:txBody>
       </p:sp>
@@ -15514,11 +15472,11 @@
           <a:bodyPr wrap="square" rtlCol="0" anchor="ctr"/>
           <a:lstStyle/>
           <a:p>
-            <a:pPr indent="0" marL="0">
-              <a:buNone/>
-            </a:pPr>
-            <a:r>
-              <a:rPr lang="en-US" sz="1000" dirty="0">
+            <a:pPr marL="0" indent="0">
+              <a:buNone/>
+            </a:pPr>
+            <a:r>
+              <a:rPr lang="en-US" sz="1000">
                 <a:solidFill>
                   <a:srgbClr val="4FC3F7"/>
                 </a:solidFill>
@@ -15528,7 +15486,7 @@
               </a:rPr>
               <a:t>More than all other 22 features combined</a:t>
             </a:r>
-            <a:endParaRPr lang="en-US" sz="1000" dirty="0"/>
+            <a:endParaRPr lang="en-US" sz="1000"/>
           </a:p>
         </p:txBody>
       </p:sp>
@@ -15556,7 +15514,7 @@
             <a:prstDash val="solid"/>
           </a:ln>
           <a:effectLst>
-            <a:outerShdw sx="100000" sy="100000" kx="0" ky="0" algn="bl" rotWithShape="0" blurRad="101600" dist="38100" dir="8100000">
+            <a:outerShdw blurRad="101600" dist="38100" dir="8100000" algn="bl" rotWithShape="0">
               <a:srgbClr val="000000">
                 <a:alpha val="12000"/>
               </a:srgbClr>
@@ -15610,11 +15568,11 @@
           <a:bodyPr wrap="square" rtlCol="0" anchor="ctr"/>
           <a:lstStyle/>
           <a:p>
-            <a:pPr indent="0" marL="0">
-              <a:buNone/>
-            </a:pPr>
-            <a:r>
-              <a:rPr lang="en-US" sz="2000" b="1" dirty="0">
+            <a:pPr marL="0" indent="0">
+              <a:buNone/>
+            </a:pPr>
+            <a:r>
+              <a:rPr lang="en-US" sz="2000" b="1">
                 <a:solidFill>
                   <a:srgbClr val="00B8D4"/>
                 </a:solidFill>
@@ -15624,7 +15582,7 @@
               </a:rPr>
               <a:t>Top 3</a:t>
             </a:r>
-            <a:endParaRPr lang="en-US" sz="2000" dirty="0"/>
+            <a:endParaRPr lang="en-US" sz="2000"/>
           </a:p>
         </p:txBody>
       </p:sp>
@@ -15649,11 +15607,11 @@
           <a:bodyPr wrap="square" rtlCol="0" anchor="ctr"/>
           <a:lstStyle/>
           <a:p>
-            <a:pPr indent="0" marL="0">
-              <a:buNone/>
-            </a:pPr>
-            <a:r>
-              <a:rPr lang="en-US" sz="1100" b="1" dirty="0">
+            <a:pPr marL="0" indent="0">
+              <a:buNone/>
+            </a:pPr>
+            <a:r>
+              <a:rPr lang="en-US" sz="1100" b="1">
                 <a:solidFill>
                   <a:srgbClr val="FFFFFF"/>
                 </a:solidFill>
@@ -15663,7 +15621,7 @@
               </a:rPr>
               <a:t>All payment history vars</a:t>
             </a:r>
-            <a:endParaRPr lang="en-US" sz="1100" dirty="0"/>
+            <a:endParaRPr lang="en-US" sz="1100"/>
           </a:p>
         </p:txBody>
       </p:sp>
@@ -15688,11 +15646,11 @@
           <a:bodyPr wrap="square" rtlCol="0" anchor="ctr"/>
           <a:lstStyle/>
           <a:p>
-            <a:pPr indent="0" marL="0">
-              <a:buNone/>
-            </a:pPr>
-            <a:r>
-              <a:rPr lang="en-US" sz="1000" dirty="0">
+            <a:pPr marL="0" indent="0">
+              <a:buNone/>
+            </a:pPr>
+            <a:r>
+              <a:rPr lang="en-US" sz="1000">
                 <a:solidFill>
                   <a:srgbClr val="4FC3F7"/>
                 </a:solidFill>
@@ -15702,7 +15660,7 @@
               </a:rPr>
               <a:t>PAY_0, PAY_AMT2, PAY_4</a:t>
             </a:r>
-            <a:endParaRPr lang="en-US" sz="1000" dirty="0"/>
+            <a:endParaRPr lang="en-US" sz="1000"/>
           </a:p>
         </p:txBody>
       </p:sp>
@@ -15730,7 +15688,7 @@
             <a:prstDash val="solid"/>
           </a:ln>
           <a:effectLst>
-            <a:outerShdw sx="100000" sy="100000" kx="0" ky="0" algn="bl" rotWithShape="0" blurRad="101600" dist="38100" dir="8100000">
+            <a:outerShdw blurRad="101600" dist="38100" dir="8100000" algn="bl" rotWithShape="0">
               <a:srgbClr val="000000">
                 <a:alpha val="12000"/>
               </a:srgbClr>
@@ -15784,11 +15742,11 @@
           <a:bodyPr wrap="square" rtlCol="0" anchor="ctr"/>
           <a:lstStyle/>
           <a:p>
-            <a:pPr indent="0" marL="0">
-              <a:buNone/>
-            </a:pPr>
-            <a:r>
-              <a:rPr lang="en-US" sz="2000" b="1" dirty="0">
+            <a:pPr marL="0" indent="0">
+              <a:buNone/>
+            </a:pPr>
+            <a:r>
+              <a:rPr lang="en-US" sz="2000" b="1">
                 <a:solidFill>
                   <a:srgbClr val="00B8D4"/>
                 </a:solidFill>
@@ -15798,7 +15756,7 @@
               </a:rPr>
               <a:t>✓ Verified</a:t>
             </a:r>
-            <a:endParaRPr lang="en-US" sz="2000" dirty="0"/>
+            <a:endParaRPr lang="en-US" sz="2000"/>
           </a:p>
         </p:txBody>
       </p:sp>
@@ -15823,11 +15781,11 @@
           <a:bodyPr wrap="square" rtlCol="0" anchor="ctr"/>
           <a:lstStyle/>
           <a:p>
-            <a:pPr indent="0" marL="0">
-              <a:buNone/>
-            </a:pPr>
-            <a:r>
-              <a:rPr lang="en-US" sz="1100" b="1" dirty="0">
+            <a:pPr marL="0" indent="0">
+              <a:buNone/>
+            </a:pPr>
+            <a:r>
+              <a:rPr lang="en-US" sz="1100" b="1">
                 <a:solidFill>
                   <a:srgbClr val="FFFFFF"/>
                 </a:solidFill>
@@ -15837,7 +15795,7 @@
               </a:rPr>
               <a:t>Yeh &amp; Lien (2009)</a:t>
             </a:r>
-            <a:endParaRPr lang="en-US" sz="1100" dirty="0"/>
+            <a:endParaRPr lang="en-US" sz="1100"/>
           </a:p>
         </p:txBody>
       </p:sp>
@@ -15862,11 +15820,11 @@
           <a:bodyPr wrap="square" rtlCol="0" anchor="ctr"/>
           <a:lstStyle/>
           <a:p>
-            <a:pPr indent="0" marL="0">
-              <a:buNone/>
-            </a:pPr>
-            <a:r>
-              <a:rPr lang="en-US" sz="1000" dirty="0">
+            <a:pPr marL="0" indent="0">
+              <a:buNone/>
+            </a:pPr>
+            <a:r>
+              <a:rPr lang="en-US" sz="1000">
                 <a:solidFill>
                   <a:srgbClr val="4FC3F7"/>
                 </a:solidFill>
@@ -15876,7 +15834,7 @@
               </a:rPr>
               <a:t>Original paper confirmed same finding</a:t>
             </a:r>
-            <a:endParaRPr lang="en-US" sz="1000" dirty="0"/>
+            <a:endParaRPr lang="en-US" sz="1000"/>
           </a:p>
         </p:txBody>
       </p:sp>
@@ -15926,11 +15884,11 @@
           <a:bodyPr wrap="square" rtlCol="0" anchor="ctr"/>
           <a:lstStyle/>
           <a:p>
-            <a:pPr indent="0" marL="0">
-              <a:buNone/>
-            </a:pPr>
-            <a:r>
-              <a:rPr lang="en-US" sz="1100" i="1" dirty="0">
+            <a:pPr marL="0" indent="0">
+              <a:buNone/>
+            </a:pPr>
+            <a:r>
+              <a:rPr lang="en-US" sz="1100" i="1">
                 <a:solidFill>
                   <a:srgbClr val="FFB300"/>
                 </a:solidFill>
@@ -15940,7 +15898,7 @@
               </a:rPr>
               <a:t>If you paid late last month → you're likely to default next month.</a:t>
             </a:r>
-            <a:endParaRPr lang="en-US" sz="1100" dirty="0"/>
+            <a:endParaRPr lang="en-US" sz="1100"/>
           </a:p>
         </p:txBody>
       </p:sp>
@@ -16245,4 +16203,299 @@
     </a:ext>
   </a:extLst>
 </a:theme>
+</file>
+
+<file path=ppt/theme/theme2.xml><?xml version="1.0" encoding="utf-8"?>
+<a:theme xmlns:a="http://schemas.openxmlformats.org/drawingml/2006/main" name="Office Theme">
+  <a:themeElements>
+    <a:clrScheme name="Office">
+      <a:dk1>
+        <a:sysClr val="windowText" lastClr="000000"/>
+      </a:dk1>
+      <a:lt1>
+        <a:sysClr val="window" lastClr="FFFFFF"/>
+      </a:lt1>
+      <a:dk2>
+        <a:srgbClr val="44546A"/>
+      </a:dk2>
+      <a:lt2>
+        <a:srgbClr val="E7E6E6"/>
+      </a:lt2>
+      <a:accent1>
+        <a:srgbClr val="4472C4"/>
+      </a:accent1>
+      <a:accent2>
+        <a:srgbClr val="ED7D31"/>
+      </a:accent2>
+      <a:accent3>
+        <a:srgbClr val="A5A5A5"/>
+      </a:accent3>
+      <a:accent4>
+        <a:srgbClr val="FFC000"/>
+      </a:accent4>
+      <a:accent5>
+        <a:srgbClr val="5B9BD5"/>
+      </a:accent5>
+      <a:accent6>
+        <a:srgbClr val="70AD47"/>
+      </a:accent6>
+      <a:hlink>
+        <a:srgbClr val="0563C1"/>
+      </a:hlink>
+      <a:folHlink>
+        <a:srgbClr val="954F72"/>
+      </a:folHlink>
+    </a:clrScheme>
+    <a:fontScheme name="Office">
+      <a:majorFont>
+        <a:latin typeface="Calibri Light" panose="020F0302020204030204"/>
+        <a:ea typeface=""/>
+        <a:cs typeface=""/>
+        <a:font script="Jpan" typeface="游ゴシック Light"/>
+        <a:font script="Hang" typeface="맑은 고딕"/>
+        <a:font script="Hans" typeface="等线 Light"/>
+        <a:font script="Hant" typeface="新細明體"/>
+        <a:font script="Arab" typeface="Times New Roman"/>
+        <a:font script="Hebr" typeface="Times New Roman"/>
+        <a:font script="Thai" typeface="Angsana New"/>
+        <a:font script="Ethi" typeface="Nyala"/>
+        <a:font script="Beng" typeface="Vrinda"/>
+        <a:font script="Gujr" typeface="Shruti"/>
+        <a:font script="Khmr" typeface="MoolBoran"/>
+        <a:font script="Knda" typeface="Tunga"/>
+        <a:font script="Guru" typeface="Raavi"/>
+        <a:font script="Cans" typeface="Euphemia"/>
+        <a:font script="Cher" typeface="Plantagenet Cherokee"/>
+        <a:font script="Yiii" typeface="Microsoft Yi Baiti"/>
+        <a:font script="Tibt" typeface="Microsoft Himalaya"/>
+        <a:font script="Thaa" typeface="MV Boli"/>
+        <a:font script="Deva" typeface="Mangal"/>
+        <a:font script="Telu" typeface="Gautami"/>
+        <a:font script="Taml" typeface="Latha"/>
+        <a:font script="Syrc" typeface="Estrangelo Edessa"/>
+        <a:font script="Orya" typeface="Kalinga"/>
+        <a:font script="Mlym" typeface="Kartika"/>
+        <a:font script="Laoo" typeface="DokChampa"/>
+        <a:font script="Sinh" typeface="Iskoola Pota"/>
+        <a:font script="Mong" typeface="Mongolian Baiti"/>
+        <a:font script="Viet" typeface="Times New Roman"/>
+        <a:font script="Uigh" typeface="Microsoft Uighur"/>
+        <a:font script="Geor" typeface="Sylfaen"/>
+        <a:font script="Armn" typeface="Arial"/>
+        <a:font script="Bugi" typeface="Leelawadee UI"/>
+        <a:font script="Bopo" typeface="Microsoft JhengHei"/>
+        <a:font script="Java" typeface="Javanese Text"/>
+        <a:font script="Lisu" typeface="Segoe UI"/>
+        <a:font script="Mymr" typeface="Myanmar Text"/>
+        <a:font script="Nkoo" typeface="Ebrima"/>
+        <a:font script="Olck" typeface="Nirmala UI"/>
+        <a:font script="Osma" typeface="Ebrima"/>
+        <a:font script="Phag" typeface="Phagspa"/>
+        <a:font script="Syrn" typeface="Estrangelo Edessa"/>
+        <a:font script="Syrj" typeface="Estrangelo Edessa"/>
+        <a:font script="Syre" typeface="Estrangelo Edessa"/>
+        <a:font script="Sora" typeface="Nirmala UI"/>
+        <a:font script="Tale" typeface="Microsoft Tai Le"/>
+        <a:font script="Talu" typeface="Microsoft New Tai Lue"/>
+        <a:font script="Tfng" typeface="Ebrima"/>
+      </a:majorFont>
+      <a:minorFont>
+        <a:latin typeface="Calibri" panose="020F0502020204030204"/>
+        <a:ea typeface=""/>
+        <a:cs typeface=""/>
+        <a:font script="Jpan" typeface="游ゴシック"/>
+        <a:font script="Hang" typeface="맑은 고딕"/>
+        <a:font script="Hans" typeface="等线"/>
+        <a:font script="Hant" typeface="新細明體"/>
+        <a:font script="Arab" typeface="Arial"/>
+        <a:font script="Hebr" typeface="Arial"/>
+        <a:font script="Thai" typeface="Cordia New"/>
+        <a:font script="Ethi" typeface="Nyala"/>
+        <a:font script="Beng" typeface="Vrinda"/>
+        <a:font script="Gujr" typeface="Shruti"/>
+        <a:font script="Khmr" typeface="DaunPenh"/>
+        <a:font script="Knda" typeface="Tunga"/>
+        <a:font script="Guru" typeface="Raavi"/>
+        <a:font script="Cans" typeface="Euphemia"/>
+        <a:font script="Cher" typeface="Plantagenet Cherokee"/>
+        <a:font script="Yiii" typeface="Microsoft Yi Baiti"/>
+        <a:font script="Tibt" typeface="Microsoft Himalaya"/>
+        <a:font script="Thaa" typeface="MV Boli"/>
+        <a:font script="Deva" typeface="Mangal"/>
+        <a:font script="Telu" typeface="Gautami"/>
+        <a:font script="Taml" typeface="Latha"/>
+        <a:font script="Syrc" typeface="Estrangelo Edessa"/>
+        <a:font script="Orya" typeface="Kalinga"/>
+        <a:font script="Mlym" typeface="Kartika"/>
+        <a:font script="Laoo" typeface="DokChampa"/>
+        <a:font script="Sinh" typeface="Iskoola Pota"/>
+        <a:font script="Mong" typeface="Mongolian Baiti"/>
+        <a:font script="Viet" typeface="Arial"/>
+        <a:font script="Uigh" typeface="Microsoft Uighur"/>
+        <a:font script="Geor" typeface="Sylfaen"/>
+        <a:font script="Armn" typeface="Arial"/>
+        <a:font script="Bugi" typeface="Leelawadee UI"/>
+        <a:font script="Bopo" typeface="Microsoft JhengHei"/>
+        <a:font script="Java" typeface="Javanese Text"/>
+        <a:font script="Lisu" typeface="Segoe UI"/>
+        <a:font script="Mymr" typeface="Myanmar Text"/>
+        <a:font script="Nkoo" typeface="Ebrima"/>
+        <a:font script="Olck" typeface="Nirmala UI"/>
+        <a:font script="Osma" typeface="Ebrima"/>
+        <a:font script="Phag" typeface="Phagspa"/>
+        <a:font script="Syrn" typeface="Estrangelo Edessa"/>
+        <a:font script="Syrj" typeface="Estrangelo Edessa"/>
+        <a:font script="Syre" typeface="Estrangelo Edessa"/>
+        <a:font script="Sora" typeface="Nirmala UI"/>
+        <a:font script="Tale" typeface="Microsoft Tai Le"/>
+        <a:font script="Talu" typeface="Microsoft New Tai Lue"/>
+        <a:font script="Tfng" typeface="Ebrima"/>
+      </a:minorFont>
+    </a:fontScheme>
+    <a:fmtScheme name="Office">
+      <a:fillStyleLst>
+        <a:solidFill>
+          <a:schemeClr val="phClr"/>
+        </a:solidFill>
+        <a:gradFill rotWithShape="1">
+          <a:gsLst>
+            <a:gs pos="0">
+              <a:schemeClr val="phClr">
+                <a:lumMod val="110000"/>
+                <a:satMod val="105000"/>
+                <a:tint val="67000"/>
+              </a:schemeClr>
+            </a:gs>
+            <a:gs pos="50000">
+              <a:schemeClr val="phClr">
+                <a:lumMod val="105000"/>
+                <a:satMod val="103000"/>
+                <a:tint val="73000"/>
+              </a:schemeClr>
+            </a:gs>
+            <a:gs pos="100000">
+              <a:schemeClr val="phClr">
+                <a:lumMod val="105000"/>
+                <a:satMod val="109000"/>
+                <a:tint val="81000"/>
+              </a:schemeClr>
+            </a:gs>
+          </a:gsLst>
+          <a:lin ang="5400000" scaled="0"/>
+        </a:gradFill>
+        <a:gradFill rotWithShape="1">
+          <a:gsLst>
+            <a:gs pos="0">
+              <a:schemeClr val="phClr">
+                <a:satMod val="103000"/>
+                <a:lumMod val="102000"/>
+                <a:tint val="94000"/>
+              </a:schemeClr>
+            </a:gs>
+            <a:gs pos="50000">
+              <a:schemeClr val="phClr">
+                <a:satMod val="110000"/>
+                <a:lumMod val="100000"/>
+                <a:shade val="100000"/>
+              </a:schemeClr>
+            </a:gs>
+            <a:gs pos="100000">
+              <a:schemeClr val="phClr">
+                <a:lumMod val="99000"/>
+                <a:satMod val="120000"/>
+                <a:shade val="78000"/>
+              </a:schemeClr>
+            </a:gs>
+          </a:gsLst>
+          <a:lin ang="5400000" scaled="0"/>
+        </a:gradFill>
+      </a:fillStyleLst>
+      <a:lnStyleLst>
+        <a:ln w="6350" cap="flat" cmpd="sng" algn="ctr">
+          <a:solidFill>
+            <a:schemeClr val="phClr"/>
+          </a:solidFill>
+          <a:prstDash val="solid"/>
+          <a:miter lim="800000"/>
+        </a:ln>
+        <a:ln w="12700" cap="flat" cmpd="sng" algn="ctr">
+          <a:solidFill>
+            <a:schemeClr val="phClr"/>
+          </a:solidFill>
+          <a:prstDash val="solid"/>
+          <a:miter lim="800000"/>
+        </a:ln>
+        <a:ln w="19050" cap="flat" cmpd="sng" algn="ctr">
+          <a:solidFill>
+            <a:schemeClr val="phClr"/>
+          </a:solidFill>
+          <a:prstDash val="solid"/>
+          <a:miter lim="800000"/>
+        </a:ln>
+      </a:lnStyleLst>
+      <a:effectStyleLst>
+        <a:effectStyle>
+          <a:effectLst/>
+        </a:effectStyle>
+        <a:effectStyle>
+          <a:effectLst/>
+        </a:effectStyle>
+        <a:effectStyle>
+          <a:effectLst>
+            <a:outerShdw blurRad="57150" dist="19050" dir="5400000" algn="ctr" rotWithShape="0">
+              <a:srgbClr val="000000">
+                <a:alpha val="63000"/>
+              </a:srgbClr>
+            </a:outerShdw>
+          </a:effectLst>
+        </a:effectStyle>
+      </a:effectStyleLst>
+      <a:bgFillStyleLst>
+        <a:solidFill>
+          <a:schemeClr val="phClr"/>
+        </a:solidFill>
+        <a:solidFill>
+          <a:schemeClr val="phClr">
+            <a:tint val="95000"/>
+            <a:satMod val="170000"/>
+          </a:schemeClr>
+        </a:solidFill>
+        <a:gradFill rotWithShape="1">
+          <a:gsLst>
+            <a:gs pos="0">
+              <a:schemeClr val="phClr">
+                <a:tint val="93000"/>
+                <a:satMod val="150000"/>
+                <a:shade val="98000"/>
+                <a:lumMod val="102000"/>
+              </a:schemeClr>
+            </a:gs>
+            <a:gs pos="50000">
+              <a:schemeClr val="phClr">
+                <a:tint val="98000"/>
+                <a:satMod val="130000"/>
+                <a:shade val="90000"/>
+                <a:lumMod val="103000"/>
+              </a:schemeClr>
+            </a:gs>
+            <a:gs pos="100000">
+              <a:schemeClr val="phClr">
+                <a:shade val="63000"/>
+                <a:satMod val="120000"/>
+              </a:schemeClr>
+            </a:gs>
+          </a:gsLst>
+          <a:lin ang="5400000" scaled="0"/>
+        </a:gradFill>
+      </a:bgFillStyleLst>
+    </a:fmtScheme>
+  </a:themeElements>
+  <a:objectDefaults/>
+  <a:extraClrSchemeLst/>
+  <a:extLst>
+    <a:ext uri="{05A4C25C-085E-4340-85A3-A5531E510DB2}">
+      <thm15:themeFamily xmlns:thm15="http://schemas.microsoft.com/office/thememl/2012/main" name="Office Theme" id="{62F939B6-93AF-4DB8-9C6B-D6C7DFDC589F}" vid="{4A3C46E8-61CC-4603-A589-7422A47A8E4A}"/>
+    </a:ext>
+  </a:extLst>
+</a:theme>
 </file>